--- a/docs/14-debrief/pitch-deck/PermitFlow-pitch.pptx
+++ b/docs/14-debrief/pitch-deck/PermitFlow-pitch.pptx
@@ -2502,7 +2502,7 @@
                 <a:ea typeface="Public Sans" pitchFamily="34" charset="-122"/>
                 <a:cs typeface="Public Sans" pitchFamily="34" charset="-120"/>
               </a:rPr>
-              <a:t>Grafana on grafana.dev.permitflow.space, fed by Prometheus scraping the API's token-protected metrics every 15 seconds; six alert rules on the service objective; the dashboard is a generated file in the repository.</a:t>
+              <a:t>Grafana on grafana.dev.permitflow.space, fed by Prometheus scraping the API's token-protected metrics every 15 seconds; six alert rules on the service objective and an hourly digest reach Telegram, where a bot also answers /status; the dashboard is a generated file in the repository.</a:t>
             </a:r>
             <a:endParaRPr lang="en-US" sz="950" dirty="0"/>
           </a:p>

--- a/docs/14-debrief/pitch-deck/PermitFlow-pitch.pptx
+++ b/docs/14-debrief/pitch-deck/PermitFlow-pitch.pptx
@@ -18,9 +18,11 @@
     <p:sldId id="266" r:id="rId12"/>
     <p:sldId id="267" r:id="rId13"/>
     <p:sldId id="268" r:id="rId14"/>
+    <p:sldId id="269" r:id="rId15"/>
+    <p:sldId id="270" r:id="rId16"/>
   </p:sldIdLst>
   <p:notesMasterIdLst>
-    <p:notesMasterId r:id="rId15"/>
+    <p:notesMasterId r:id="rId17"/>
   </p:notesMasterIdLst>
   <p:sldSz cx="12192000" cy="6858000"/>
   <p:notesSz cx="6858000" cy="12192000"/>
@@ -890,6 +892,182 @@
             <a:fld id="{F7021451-1387-4CA6-816F-3879F97B5CBC}" type="slidenum">
               <a:rPr lang="en-US"/>
               <a:t>13</a:t>
+            </a:fld>
+            <a:endParaRPr lang="en-US"/>
+          </a:p>
+        </p:txBody>
+      </p:sp>
+    </p:spTree>
+    <p:extLst>
+      <p:ext uri="{BB962C8B-B14F-4D97-AF65-F5344CB8AC3E}">
+        <p14:creationId xmlns:p14="http://schemas.microsoft.com/office/powerpoint/2010/main" val="1024086991"/>
+      </p:ext>
+    </p:extLst>
+  </p:cSld>
+  <p:clrMapOvr>
+    <a:masterClrMapping/>
+  </p:clrMapOvr>
+</p:notes>
+</file>
+
+<file path=ppt/notesSlides/notesSlide14.xml><?xml version="1.0" encoding="utf-8"?>
+<p:notes xmlns:a="http://schemas.openxmlformats.org/drawingml/2006/main" xmlns:r="http://schemas.openxmlformats.org/officeDocument/2006/relationships" xmlns:p="http://schemas.openxmlformats.org/presentationml/2006/main">
+  <p:cSld>
+    <p:spTree>
+      <p:nvGrpSpPr>
+        <p:cNvPr id="1" name=""/>
+        <p:cNvGrpSpPr/>
+        <p:nvPr/>
+      </p:nvGrpSpPr>
+      <p:grpSpPr>
+        <a:xfrm>
+          <a:off x="0" y="0"/>
+          <a:ext cx="0" cy="0"/>
+          <a:chOff x="0" y="0"/>
+          <a:chExt cx="0" cy="0"/>
+        </a:xfrm>
+      </p:grpSpPr>
+      <p:sp>
+        <p:nvSpPr>
+          <p:cNvPr id="2" name="Slide Image Placeholder 1"/>
+          <p:cNvSpPr>
+            <a:spLocks noGrp="1" noRot="1" noChangeAspect="1"/>
+          </p:cNvSpPr>
+          <p:nvPr>
+            <p:ph type="sldImg"/>
+          </p:nvPr>
+        </p:nvSpPr>
+        <p:spPr/>
+      </p:sp>
+      <p:sp>
+        <p:nvSpPr>
+          <p:cNvPr id="3" name="Notes Placeholder 2"/>
+          <p:cNvSpPr>
+            <a:spLocks noGrp="1"/>
+          </p:cNvSpPr>
+          <p:nvPr>
+            <p:ph type="body" idx="1"/>
+          </p:nvPr>
+        </p:nvSpPr>
+        <p:spPr/>
+        <p:txBody>
+          <a:bodyPr/>
+          <a:lstStyle/>
+          <a:p>
+            <a:r>
+              <a:rPr lang="en-US" dirty="0"/>
+              <a:t/>
+            </a:r>
+            <a:endParaRPr lang="en-US" dirty="0"/>
+          </a:p>
+        </p:txBody>
+      </p:sp>
+      <p:sp>
+        <p:nvSpPr>
+          <p:cNvPr id="4" name="Slide Number Placeholder 3"/>
+          <p:cNvSpPr>
+            <a:spLocks noGrp="1"/>
+          </p:cNvSpPr>
+          <p:nvPr>
+            <p:ph type="sldNum" sz="quarter" idx="10"/>
+          </p:nvPr>
+        </p:nvSpPr>
+        <p:spPr/>
+        <p:txBody>
+          <a:bodyPr/>
+          <a:lstStyle/>
+          <a:p>
+            <a:fld id="{F7021451-1387-4CA6-816F-3879F97B5CBC}" type="slidenum">
+              <a:rPr lang="en-US"/>
+              <a:t>14</a:t>
+            </a:fld>
+            <a:endParaRPr lang="en-US"/>
+          </a:p>
+        </p:txBody>
+      </p:sp>
+    </p:spTree>
+    <p:extLst>
+      <p:ext uri="{BB962C8B-B14F-4D97-AF65-F5344CB8AC3E}">
+        <p14:creationId xmlns:p14="http://schemas.microsoft.com/office/powerpoint/2010/main" val="1024086991"/>
+      </p:ext>
+    </p:extLst>
+  </p:cSld>
+  <p:clrMapOvr>
+    <a:masterClrMapping/>
+  </p:clrMapOvr>
+</p:notes>
+</file>
+
+<file path=ppt/notesSlides/notesSlide15.xml><?xml version="1.0" encoding="utf-8"?>
+<p:notes xmlns:a="http://schemas.openxmlformats.org/drawingml/2006/main" xmlns:r="http://schemas.openxmlformats.org/officeDocument/2006/relationships" xmlns:p="http://schemas.openxmlformats.org/presentationml/2006/main">
+  <p:cSld>
+    <p:spTree>
+      <p:nvGrpSpPr>
+        <p:cNvPr id="1" name=""/>
+        <p:cNvGrpSpPr/>
+        <p:nvPr/>
+      </p:nvGrpSpPr>
+      <p:grpSpPr>
+        <a:xfrm>
+          <a:off x="0" y="0"/>
+          <a:ext cx="0" cy="0"/>
+          <a:chOff x="0" y="0"/>
+          <a:chExt cx="0" cy="0"/>
+        </a:xfrm>
+      </p:grpSpPr>
+      <p:sp>
+        <p:nvSpPr>
+          <p:cNvPr id="2" name="Slide Image Placeholder 1"/>
+          <p:cNvSpPr>
+            <a:spLocks noGrp="1" noRot="1" noChangeAspect="1"/>
+          </p:cNvSpPr>
+          <p:nvPr>
+            <p:ph type="sldImg"/>
+          </p:nvPr>
+        </p:nvSpPr>
+        <p:spPr/>
+      </p:sp>
+      <p:sp>
+        <p:nvSpPr>
+          <p:cNvPr id="3" name="Notes Placeholder 2"/>
+          <p:cNvSpPr>
+            <a:spLocks noGrp="1"/>
+          </p:cNvSpPr>
+          <p:nvPr>
+            <p:ph type="body" idx="1"/>
+          </p:nvPr>
+        </p:nvSpPr>
+        <p:spPr/>
+        <p:txBody>
+          <a:bodyPr/>
+          <a:lstStyle/>
+          <a:p>
+            <a:r>
+              <a:rPr lang="en-US" dirty="0"/>
+              <a:t/>
+            </a:r>
+            <a:endParaRPr lang="en-US" dirty="0"/>
+          </a:p>
+        </p:txBody>
+      </p:sp>
+      <p:sp>
+        <p:nvSpPr>
+          <p:cNvPr id="4" name="Slide Number Placeholder 3"/>
+          <p:cNvSpPr>
+            <a:spLocks noGrp="1"/>
+          </p:cNvSpPr>
+          <p:nvPr>
+            <p:ph type="sldNum" sz="quarter" idx="10"/>
+          </p:nvPr>
+        </p:nvSpPr>
+        <p:spPr/>
+        <p:txBody>
+          <a:bodyPr/>
+          <a:lstStyle/>
+          <a:p>
+            <a:fld id="{F7021451-1387-4CA6-816F-3879F97B5CBC}" type="slidenum">
+              <a:rPr lang="en-US"/>
+              <a:t>15</a:t>
             </a:fld>
             <a:endParaRPr lang="en-US"/>
           </a:p>
@@ -2360,7 +2538,7 @@
                 <a:ea typeface="Public Sans" pitchFamily="34" charset="-122"/>
                 <a:cs typeface="Public Sans" pitchFamily="34" charset="-120"/>
               </a:rPr>
-              <a:t>BUILT TO BE WATCHED</a:t>
+              <a:t>WHAT MAKES IT DIFFERENT</a:t>
             </a:r>
             <a:endParaRPr lang="en-US" sz="1100" dirty="0"/>
           </a:p>
@@ -2375,7 +2553,7 @@
         <p:spPr>
           <a:xfrm>
             <a:off x="762000" y="863600"/>
-            <a:ext cx="10668000" cy="825500"/>
+            <a:ext cx="9906000" cy="508000"/>
           </a:xfrm>
           <a:prstGeom prst="rect">
             <a:avLst/>
@@ -2394,7 +2572,7 @@
               <a:buNone/>
             </a:pPr>
             <a:r>
-              <a:rPr lang="en-US" sz="2000" dirty="0">
+              <a:rPr lang="en-US" sz="3000" dirty="0">
                 <a:solidFill>
                   <a:srgbClr val="1B2430"/>
                 </a:solidFill>
@@ -2402,9 +2580,9 @@
                 <a:ea typeface="Instrument Serif" pitchFamily="34" charset="-122"/>
                 <a:cs typeface="Instrument Serif" pitchFamily="34" charset="-120"/>
               </a:rPr>
-              <a:t>One dashboard answers whether the API is healthy, whether the document checks are healthy and what they cost, and whether the queue is moving.</a:t>
-            </a:r>
-            <a:endParaRPr lang="en-US" sz="2000" dirty="0"/>
+              <a:t>Six principles, each enforced by code.</a:t>
+            </a:r>
+            <a:endParaRPr lang="en-US" sz="3000" dirty="0"/>
           </a:p>
         </p:txBody>
       </p:sp>
@@ -2416,66 +2594,31 @@
         </p:nvSpPr>
         <p:spPr>
           <a:xfrm>
-            <a:off x="2343150" y="1835150"/>
-            <a:ext cx="7505700" cy="4229100"/>
-          </a:xfrm>
-          <a:prstGeom prst="roundRect">
-            <a:avLst>
-              <a:gd name="adj" fmla="val 901"/>
-            </a:avLst>
-          </a:prstGeom>
-          <a:solidFill>
-            <a:srgbClr val="FFFFFF"/>
-          </a:solidFill>
+            <a:off x="762000" y="1828800"/>
+            <a:ext cx="5156200" cy="0"/>
+          </a:xfrm>
+          <a:prstGeom prst="line">
+            <a:avLst/>
+          </a:prstGeom>
+          <a:noFill/>
           <a:ln w="9525">
             <a:solidFill>
               <a:srgbClr val="DDE1E7"/>
             </a:solidFill>
             <a:prstDash val="solid"/>
           </a:ln>
-          <a:effectLst>
-            <a:outerShdw sx="100000" sy="100000" kx="0" ky="0" algn="bl" rotWithShape="0" blurRad="38100" dist="12700" dir="5400000">
-              <a:srgbClr val="101828">
-                <a:alpha val="8000"/>
-              </a:srgbClr>
-            </a:outerShdw>
-          </a:effectLst>
-        </p:spPr>
-      </p:sp>
-      <p:pic>
-        <p:nvPicPr>
-          <p:cNvPr id="5" name="Image 0" descr="/Users/suhaasnv/Documents/Desktop ALT/portfolioprojects/permitflow/docs/13-observability/grafana-dashboard.png">    </p:cNvPr>
-          <p:cNvPicPr>
-            <a:picLocks noChangeAspect="1"/>
-          </p:cNvPicPr>
-          <p:nvPr/>
-        </p:nvPicPr>
-        <p:blipFill>
-          <a:blip r:embed="rId1"/>
-          <a:stretch>
-            <a:fillRect/>
-          </a:stretch>
-        </p:blipFill>
-        <p:spPr>
-          <a:xfrm>
-            <a:off x="2349500" y="1841500"/>
-            <a:ext cx="7493000" cy="4216400"/>
-          </a:xfrm>
-          <a:prstGeom prst="rect">
-            <a:avLst/>
-          </a:prstGeom>
-        </p:spPr>
-      </p:pic>
-      <p:sp>
-        <p:nvSpPr>
-          <p:cNvPr id="6" name="Text 3"/>
+        </p:spPr>
+      </p:sp>
+      <p:sp>
+        <p:nvSpPr>
+          <p:cNvPr id="5" name="Text 3"/>
           <p:cNvSpPr txBox="1"/>
           <p:nvPr/>
         </p:nvSpPr>
         <p:spPr>
           <a:xfrm>
-            <a:off x="2349500" y="6146800"/>
-            <a:ext cx="7493000" cy="381000"/>
+            <a:off x="762000" y="2019300"/>
+            <a:ext cx="317500" cy="190500"/>
           </a:xfrm>
           <a:prstGeom prst="rect">
             <a:avLst/>
@@ -2489,35 +2632,135 @@
           <a:p>
             <a:pPr algn="l" indent="0" marL="0">
               <a:lnSpc>
-                <a:spcPct val="125000"/>
-              </a:lnSpc>
-              <a:buNone/>
-            </a:pPr>
-            <a:r>
-              <a:rPr lang="en-US" sz="950" dirty="0">
-                <a:solidFill>
-                  <a:srgbClr val="465060"/>
+                <a:spcPct val="115000"/>
+              </a:lnSpc>
+              <a:buNone/>
+            </a:pPr>
+            <a:r>
+              <a:rPr lang="en-US" sz="1100" dirty="0">
+                <a:solidFill>
+                  <a:srgbClr val="616C7A"/>
+                </a:solidFill>
+                <a:latin typeface="IBM Plex Mono" pitchFamily="34" charset="0"/>
+                <a:ea typeface="IBM Plex Mono" pitchFamily="34" charset="-122"/>
+                <a:cs typeface="IBM Plex Mono" pitchFamily="34" charset="-120"/>
+              </a:rPr>
+              <a:t>01</a:t>
+            </a:r>
+            <a:endParaRPr lang="en-US" sz="1100" dirty="0"/>
+          </a:p>
+        </p:txBody>
+      </p:sp>
+      <p:sp>
+        <p:nvSpPr>
+          <p:cNvPr id="6" name="Text 4"/>
+          <p:cNvSpPr txBox="1"/>
+          <p:nvPr/>
+        </p:nvSpPr>
+        <p:spPr>
+          <a:xfrm>
+            <a:off x="1206500" y="1981200"/>
+            <a:ext cx="4711700" cy="1320800"/>
+          </a:xfrm>
+          <a:prstGeom prst="rect">
+            <a:avLst/>
+          </a:prstGeom>
+          <a:noFill/>
+          <a:ln/>
+        </p:spPr>
+        <p:txBody>
+          <a:bodyPr wrap="square" lIns="0" tIns="0" rIns="0" bIns="0" rtlCol="0" anchor="t"/>
+          <a:lstStyle/>
+          <a:p>
+            <a:pPr algn="l" indent="0" marL="0">
+              <a:lnSpc>
+                <a:spcPct val="130000"/>
+              </a:lnSpc>
+              <a:spcAft>
+                <a:spcPts val="600"/>
+              </a:spcAft>
+              <a:buNone/>
+            </a:pPr>
+            <a:r>
+              <a:rPr lang="en-US" sz="1500" b="1" dirty="0">
+                <a:solidFill>
+                  <a:srgbClr val="1B2430"/>
                 </a:solidFill>
                 <a:latin typeface="Public Sans" pitchFamily="34" charset="0"/>
                 <a:ea typeface="Public Sans" pitchFamily="34" charset="-122"/>
                 <a:cs typeface="Public Sans" pitchFamily="34" charset="-120"/>
               </a:rPr>
-              <a:t>Grafana on grafana.dev.permitflow.space, fed by Prometheus scraping the API's token-protected metrics every 15 seconds; six alert rules on the service objective and an hourly digest reach Telegram, where a bot also answers /status; the dashboard is a generated file in the repository.</a:t>
-            </a:r>
-            <a:endParaRPr lang="en-US" sz="950" dirty="0"/>
-          </a:p>
-        </p:txBody>
-      </p:sp>
-      <p:sp>
-        <p:nvSpPr>
-          <p:cNvPr id="7" name="Text 4"/>
+              <a:t>Continuous workflow</a:t>
+            </a:r>
+            <a:endParaRPr lang="en-US" sz="1200" dirty="0"/>
+          </a:p>
+          <a:p>
+            <a:pPr algn="l" indent="0" marL="0">
+              <a:lnSpc>
+                <a:spcPct val="130000"/>
+              </a:lnSpc>
+              <a:spcAft>
+                <a:spcPts val="800"/>
+              </a:spcAft>
+              <a:buNone/>
+            </a:pPr>
+            <a:r>
+              <a:rPr lang="en-US" sz="1200" dirty="0">
+                <a:solidFill>
+                  <a:srgbClr val="465060"/>
+                </a:solidFill>
+                <a:latin typeface="Public Sans" pitchFamily="34" charset="0"/>
+                <a:ea typeface="Public Sans" pitchFamily="34" charset="-122"/>
+                <a:cs typeface="Public Sans" pitchFamily="34" charset="-120"/>
+              </a:rPr>
+              <a:t>One application, any number of rounds. Fourteen states with actors, guards and labels as a table; every status change goes through one function.</a:t>
+            </a:r>
+            <a:endParaRPr lang="en-US" sz="1200" dirty="0"/>
+          </a:p>
+          <a:p>
+            <a:pPr algn="l" indent="0" marL="0">
+              <a:lnSpc>
+                <a:spcPct val="130000"/>
+              </a:lnSpc>
+              <a:buNone/>
+            </a:pPr>
+            <a:endParaRPr lang="en-US" sz="1200" dirty="0"/>
+          </a:p>
+        </p:txBody>
+      </p:sp>
+      <p:sp>
+        <p:nvSpPr>
+          <p:cNvPr id="7" name="Shape 5"/>
+          <p:cNvSpPr/>
+          <p:nvPr/>
+        </p:nvSpPr>
+        <p:spPr>
+          <a:xfrm>
+            <a:off x="762000" y="3403600"/>
+            <a:ext cx="5156200" cy="0"/>
+          </a:xfrm>
+          <a:prstGeom prst="line">
+            <a:avLst/>
+          </a:prstGeom>
+          <a:noFill/>
+          <a:ln w="9525">
+            <a:solidFill>
+              <a:srgbClr val="DDE1E7"/>
+            </a:solidFill>
+            <a:prstDash val="solid"/>
+          </a:ln>
+        </p:spPr>
+      </p:sp>
+      <p:sp>
+        <p:nvSpPr>
+          <p:cNvPr id="8" name="Text 6"/>
           <p:cNvSpPr txBox="1"/>
           <p:nvPr/>
         </p:nvSpPr>
         <p:spPr>
           <a:xfrm>
-            <a:off x="10160000" y="571500"/>
-            <a:ext cx="1270000" cy="190500"/>
+            <a:off x="762000" y="3594100"/>
+            <a:ext cx="317500" cy="190500"/>
           </a:xfrm>
           <a:prstGeom prst="rect">
             <a:avLst/>
@@ -2529,14 +2772,14 @@
           <a:bodyPr wrap="square" lIns="0" tIns="0" rIns="0" bIns="0" rtlCol="0" anchor="t"/>
           <a:lstStyle/>
           <a:p>
-            <a:pPr algn="r" indent="0" marL="0">
+            <a:pPr algn="l" indent="0" marL="0">
               <a:lnSpc>
                 <a:spcPct val="115000"/>
               </a:lnSpc>
               <a:buNone/>
             </a:pPr>
             <a:r>
-              <a:rPr lang="en-US" sz="1000" dirty="0">
+              <a:rPr lang="en-US" sz="1100" dirty="0">
                 <a:solidFill>
                   <a:srgbClr val="616C7A"/>
                 </a:solidFill>
@@ -2544,7 +2787,694 @@
                 <a:ea typeface="IBM Plex Mono" pitchFamily="34" charset="-122"/>
                 <a:cs typeface="IBM Plex Mono" pitchFamily="34" charset="-120"/>
               </a:rPr>
-              <a:t>10 / 13</a:t>
+              <a:t>02</a:t>
+            </a:r>
+            <a:endParaRPr lang="en-US" sz="1100" dirty="0"/>
+          </a:p>
+        </p:txBody>
+      </p:sp>
+      <p:sp>
+        <p:nvSpPr>
+          <p:cNvPr id="9" name="Text 7"/>
+          <p:cNvSpPr txBox="1"/>
+          <p:nvPr/>
+        </p:nvSpPr>
+        <p:spPr>
+          <a:xfrm>
+            <a:off x="1206500" y="3556000"/>
+            <a:ext cx="4711700" cy="1320800"/>
+          </a:xfrm>
+          <a:prstGeom prst="rect">
+            <a:avLst/>
+          </a:prstGeom>
+          <a:noFill/>
+          <a:ln/>
+        </p:spPr>
+        <p:txBody>
+          <a:bodyPr wrap="square" lIns="0" tIns="0" rIns="0" bIns="0" rtlCol="0" anchor="t"/>
+          <a:lstStyle/>
+          <a:p>
+            <a:pPr algn="l" indent="0" marL="0">
+              <a:lnSpc>
+                <a:spcPct val="130000"/>
+              </a:lnSpc>
+              <a:spcAft>
+                <a:spcPts val="600"/>
+              </a:spcAft>
+              <a:buNone/>
+            </a:pPr>
+            <a:r>
+              <a:rPr lang="en-US" sz="1500" b="1" dirty="0">
+                <a:solidFill>
+                  <a:srgbClr val="1B2430"/>
+                </a:solidFill>
+                <a:latin typeface="Public Sans" pitchFamily="34" charset="0"/>
+                <a:ea typeface="Public Sans" pitchFamily="34" charset="-122"/>
+                <a:cs typeface="Public Sans" pitchFamily="34" charset="-120"/>
+              </a:rPr>
+              <a:t>Immutable revisions</a:t>
+            </a:r>
+            <a:endParaRPr lang="en-US" sz="1200" dirty="0"/>
+          </a:p>
+          <a:p>
+            <a:pPr algn="l" indent="0" marL="0">
+              <a:lnSpc>
+                <a:spcPct val="130000"/>
+              </a:lnSpc>
+              <a:spcAft>
+                <a:spcPts val="800"/>
+              </a:spcAft>
+              <a:buNone/>
+            </a:pPr>
+            <a:r>
+              <a:rPr lang="en-US" sz="1200" dirty="0">
+                <a:solidFill>
+                  <a:srgbClr val="465060"/>
+                </a:solidFill>
+                <a:latin typeface="Public Sans" pitchFamily="34" charset="0"/>
+                <a:ea typeface="Public Sans" pitchFamily="34" charset="-122"/>
+                <a:cs typeface="Public Sans" pitchFamily="34" charset="-120"/>
+              </a:rPr>
+              <a:t>Every submission is a snapshot. The compare view is a read-time diff, computed and never stored, so nothing is lost between rounds by construction.</a:t>
+            </a:r>
+            <a:endParaRPr lang="en-US" sz="1200" dirty="0"/>
+          </a:p>
+          <a:p>
+            <a:pPr algn="l" indent="0" marL="0">
+              <a:lnSpc>
+                <a:spcPct val="130000"/>
+              </a:lnSpc>
+              <a:buNone/>
+            </a:pPr>
+            <a:endParaRPr lang="en-US" sz="1200" dirty="0"/>
+          </a:p>
+        </p:txBody>
+      </p:sp>
+      <p:sp>
+        <p:nvSpPr>
+          <p:cNvPr id="10" name="Shape 8"/>
+          <p:cNvSpPr/>
+          <p:nvPr/>
+        </p:nvSpPr>
+        <p:spPr>
+          <a:xfrm>
+            <a:off x="762000" y="4978400"/>
+            <a:ext cx="5156200" cy="0"/>
+          </a:xfrm>
+          <a:prstGeom prst="line">
+            <a:avLst/>
+          </a:prstGeom>
+          <a:noFill/>
+          <a:ln w="9525">
+            <a:solidFill>
+              <a:srgbClr val="DDE1E7"/>
+            </a:solidFill>
+            <a:prstDash val="solid"/>
+          </a:ln>
+        </p:spPr>
+      </p:sp>
+      <p:sp>
+        <p:nvSpPr>
+          <p:cNvPr id="11" name="Text 9"/>
+          <p:cNvSpPr txBox="1"/>
+          <p:nvPr/>
+        </p:nvSpPr>
+        <p:spPr>
+          <a:xfrm>
+            <a:off x="762000" y="5168900"/>
+            <a:ext cx="317500" cy="190500"/>
+          </a:xfrm>
+          <a:prstGeom prst="rect">
+            <a:avLst/>
+          </a:prstGeom>
+          <a:noFill/>
+          <a:ln/>
+        </p:spPr>
+        <p:txBody>
+          <a:bodyPr wrap="square" lIns="0" tIns="0" rIns="0" bIns="0" rtlCol="0" anchor="t"/>
+          <a:lstStyle/>
+          <a:p>
+            <a:pPr algn="l" indent="0" marL="0">
+              <a:lnSpc>
+                <a:spcPct val="115000"/>
+              </a:lnSpc>
+              <a:buNone/>
+            </a:pPr>
+            <a:r>
+              <a:rPr lang="en-US" sz="1100" dirty="0">
+                <a:solidFill>
+                  <a:srgbClr val="616C7A"/>
+                </a:solidFill>
+                <a:latin typeface="IBM Plex Mono" pitchFamily="34" charset="0"/>
+                <a:ea typeface="IBM Plex Mono" pitchFamily="34" charset="-122"/>
+                <a:cs typeface="IBM Plex Mono" pitchFamily="34" charset="-120"/>
+              </a:rPr>
+              <a:t>03</a:t>
+            </a:r>
+            <a:endParaRPr lang="en-US" sz="1100" dirty="0"/>
+          </a:p>
+        </p:txBody>
+      </p:sp>
+      <p:sp>
+        <p:nvSpPr>
+          <p:cNvPr id="12" name="Text 10"/>
+          <p:cNvSpPr txBox="1"/>
+          <p:nvPr/>
+        </p:nvSpPr>
+        <p:spPr>
+          <a:xfrm>
+            <a:off x="1206500" y="5130800"/>
+            <a:ext cx="4711700" cy="1320800"/>
+          </a:xfrm>
+          <a:prstGeom prst="rect">
+            <a:avLst/>
+          </a:prstGeom>
+          <a:noFill/>
+          <a:ln/>
+        </p:spPr>
+        <p:txBody>
+          <a:bodyPr wrap="square" lIns="0" tIns="0" rIns="0" bIns="0" rtlCol="0" anchor="t"/>
+          <a:lstStyle/>
+          <a:p>
+            <a:pPr algn="l" indent="0" marL="0">
+              <a:lnSpc>
+                <a:spcPct val="130000"/>
+              </a:lnSpc>
+              <a:spcAft>
+                <a:spcPts val="600"/>
+              </a:spcAft>
+              <a:buNone/>
+            </a:pPr>
+            <a:r>
+              <a:rPr lang="en-US" sz="1500" b="1" dirty="0">
+                <a:solidFill>
+                  <a:srgbClr val="1B2430"/>
+                </a:solidFill>
+                <a:latin typeface="Public Sans" pitchFamily="34" charset="0"/>
+                <a:ea typeface="Public Sans" pitchFamily="34" charset="-122"/>
+                <a:cs typeface="Public Sans" pitchFamily="34" charset="-120"/>
+              </a:rPr>
+              <a:t>Contextual feedback</a:t>
+            </a:r>
+            <a:endParaRPr lang="en-US" sz="1200" dirty="0"/>
+          </a:p>
+          <a:p>
+            <a:pPr algn="l" indent="0" marL="0">
+              <a:lnSpc>
+                <a:spcPct val="130000"/>
+              </a:lnSpc>
+              <a:spcAft>
+                <a:spcPts val="800"/>
+              </a:spcAft>
+              <a:buNone/>
+            </a:pPr>
+            <a:r>
+              <a:rPr lang="en-US" sz="1200" dirty="0">
+                <a:solidFill>
+                  <a:srgbClr val="465060"/>
+                </a:solidFill>
+                <a:latin typeface="Public Sans" pitchFamily="34" charset="0"/>
+                <a:ea typeface="Public Sans" pitchFamily="34" charset="-122"/>
+                <a:cs typeface="Public Sans" pitchFamily="34" charset="-120"/>
+              </a:rPr>
+              <a:t>Every item is tied to a section or a document. "Only the flagged parts" is an authorization rule: the server answers 403, the UI walks the operator through exactly those targets.</a:t>
+            </a:r>
+            <a:endParaRPr lang="en-US" sz="1200" dirty="0"/>
+          </a:p>
+          <a:p>
+            <a:pPr algn="l" indent="0" marL="0">
+              <a:lnSpc>
+                <a:spcPct val="130000"/>
+              </a:lnSpc>
+              <a:buNone/>
+            </a:pPr>
+            <a:endParaRPr lang="en-US" sz="1200" dirty="0"/>
+          </a:p>
+        </p:txBody>
+      </p:sp>
+      <p:sp>
+        <p:nvSpPr>
+          <p:cNvPr id="13" name="b1"/>
+          <p:cNvSpPr/>
+          <p:nvPr/>
+        </p:nvSpPr>
+        <p:spPr>
+          <a:xfrm>
+            <a:off x="6273800" y="1828800"/>
+            <a:ext cx="5156200" cy="0"/>
+          </a:xfrm>
+          <a:prstGeom prst="line">
+            <a:avLst/>
+          </a:prstGeom>
+          <a:noFill/>
+          <a:ln w="9525">
+            <a:solidFill>
+              <a:srgbClr val="DDE1E7"/>
+            </a:solidFill>
+            <a:prstDash val="solid"/>
+          </a:ln>
+        </p:spPr>
+      </p:sp>
+      <p:sp>
+        <p:nvSpPr>
+          <p:cNvPr id="14" name="b1"/>
+          <p:cNvSpPr txBox="1"/>
+          <p:nvPr/>
+        </p:nvSpPr>
+        <p:spPr>
+          <a:xfrm>
+            <a:off x="6273800" y="2019300"/>
+            <a:ext cx="317500" cy="190500"/>
+          </a:xfrm>
+          <a:prstGeom prst="rect">
+            <a:avLst/>
+          </a:prstGeom>
+          <a:noFill/>
+          <a:ln/>
+        </p:spPr>
+        <p:txBody>
+          <a:bodyPr wrap="square" lIns="0" tIns="0" rIns="0" bIns="0" rtlCol="0" anchor="t"/>
+          <a:lstStyle/>
+          <a:p>
+            <a:pPr algn="l" indent="0" marL="0">
+              <a:lnSpc>
+                <a:spcPct val="115000"/>
+              </a:lnSpc>
+              <a:buNone/>
+            </a:pPr>
+            <a:r>
+              <a:rPr lang="en-US" sz="1100" dirty="0">
+                <a:solidFill>
+                  <a:srgbClr val="616C7A"/>
+                </a:solidFill>
+                <a:latin typeface="IBM Plex Mono" pitchFamily="34" charset="0"/>
+                <a:ea typeface="IBM Plex Mono" pitchFamily="34" charset="-122"/>
+                <a:cs typeface="IBM Plex Mono" pitchFamily="34" charset="-120"/>
+              </a:rPr>
+              <a:t>04</a:t>
+            </a:r>
+            <a:endParaRPr lang="en-US" sz="1100" dirty="0"/>
+          </a:p>
+        </p:txBody>
+      </p:sp>
+      <p:sp>
+        <p:nvSpPr>
+          <p:cNvPr id="15" name="b1"/>
+          <p:cNvSpPr txBox="1"/>
+          <p:nvPr/>
+        </p:nvSpPr>
+        <p:spPr>
+          <a:xfrm>
+            <a:off x="6718300" y="1981200"/>
+            <a:ext cx="4711700" cy="1320800"/>
+          </a:xfrm>
+          <a:prstGeom prst="rect">
+            <a:avLst/>
+          </a:prstGeom>
+          <a:noFill/>
+          <a:ln/>
+        </p:spPr>
+        <p:txBody>
+          <a:bodyPr wrap="square" lIns="0" tIns="0" rIns="0" bIns="0" rtlCol="0" anchor="t"/>
+          <a:lstStyle/>
+          <a:p>
+            <a:pPr algn="l" indent="0" marL="0">
+              <a:lnSpc>
+                <a:spcPct val="130000"/>
+              </a:lnSpc>
+              <a:spcAft>
+                <a:spcPts val="600"/>
+              </a:spcAft>
+              <a:buNone/>
+            </a:pPr>
+            <a:r>
+              <a:rPr lang="en-US" sz="1500" b="1" dirty="0">
+                <a:solidFill>
+                  <a:srgbClr val="1B2430"/>
+                </a:solidFill>
+                <a:latin typeface="Public Sans" pitchFamily="34" charset="0"/>
+                <a:ea typeface="Public Sans" pitchFamily="34" charset="-122"/>
+                <a:cs typeface="Public Sans" pitchFamily="34" charset="-120"/>
+              </a:rPr>
+              <a:t>AI-assisted, never AI-decided</a:t>
+            </a:r>
+            <a:endParaRPr lang="en-US" sz="1200" dirty="0"/>
+          </a:p>
+          <a:p>
+            <a:pPr algn="l" indent="0" marL="0">
+              <a:lnSpc>
+                <a:spcPct val="130000"/>
+              </a:lnSpc>
+              <a:spcAft>
+                <a:spcPts val="800"/>
+              </a:spcAft>
+              <a:buNone/>
+            </a:pPr>
+            <a:r>
+              <a:rPr lang="en-US" sz="1200" dirty="0">
+                <a:solidFill>
+                  <a:srgbClr val="465060"/>
+                </a:solidFill>
+                <a:latin typeface="Public Sans" pitchFamily="34" charset="0"/>
+                <a:ea typeface="Public Sans" pitchFamily="34" charset="-122"/>
+                <a:cs typeface="Public Sans" pitchFamily="34" charset="-120"/>
+              </a:rPr>
+              <a:t>The verifier writes only to verification_runs. The state machine has no AI actor. Injection is handled by a deterministic rule before the verdict is read.</a:t>
+            </a:r>
+            <a:endParaRPr lang="en-US" sz="1200" dirty="0"/>
+          </a:p>
+          <a:p>
+            <a:pPr algn="l" indent="0" marL="0">
+              <a:lnSpc>
+                <a:spcPct val="130000"/>
+              </a:lnSpc>
+              <a:buNone/>
+            </a:pPr>
+            <a:endParaRPr lang="en-US" sz="1200" dirty="0"/>
+          </a:p>
+        </p:txBody>
+      </p:sp>
+      <p:sp>
+        <p:nvSpPr>
+          <p:cNvPr id="16" name="b1"/>
+          <p:cNvSpPr/>
+          <p:nvPr/>
+        </p:nvSpPr>
+        <p:spPr>
+          <a:xfrm>
+            <a:off x="6273800" y="3403600"/>
+            <a:ext cx="5156200" cy="0"/>
+          </a:xfrm>
+          <a:prstGeom prst="line">
+            <a:avLst/>
+          </a:prstGeom>
+          <a:noFill/>
+          <a:ln w="9525">
+            <a:solidFill>
+              <a:srgbClr val="DDE1E7"/>
+            </a:solidFill>
+            <a:prstDash val="solid"/>
+          </a:ln>
+        </p:spPr>
+      </p:sp>
+      <p:sp>
+        <p:nvSpPr>
+          <p:cNvPr id="17" name="b1"/>
+          <p:cNvSpPr txBox="1"/>
+          <p:nvPr/>
+        </p:nvSpPr>
+        <p:spPr>
+          <a:xfrm>
+            <a:off x="6273800" y="3594100"/>
+            <a:ext cx="317500" cy="190500"/>
+          </a:xfrm>
+          <a:prstGeom prst="rect">
+            <a:avLst/>
+          </a:prstGeom>
+          <a:noFill/>
+          <a:ln/>
+        </p:spPr>
+        <p:txBody>
+          <a:bodyPr wrap="square" lIns="0" tIns="0" rIns="0" bIns="0" rtlCol="0" anchor="t"/>
+          <a:lstStyle/>
+          <a:p>
+            <a:pPr algn="l" indent="0" marL="0">
+              <a:lnSpc>
+                <a:spcPct val="115000"/>
+              </a:lnSpc>
+              <a:buNone/>
+            </a:pPr>
+            <a:r>
+              <a:rPr lang="en-US" sz="1100" dirty="0">
+                <a:solidFill>
+                  <a:srgbClr val="616C7A"/>
+                </a:solidFill>
+                <a:latin typeface="IBM Plex Mono" pitchFamily="34" charset="0"/>
+                <a:ea typeface="IBM Plex Mono" pitchFamily="34" charset="-122"/>
+                <a:cs typeface="IBM Plex Mono" pitchFamily="34" charset="-120"/>
+              </a:rPr>
+              <a:t>05</a:t>
+            </a:r>
+            <a:endParaRPr lang="en-US" sz="1100" dirty="0"/>
+          </a:p>
+        </p:txBody>
+      </p:sp>
+      <p:sp>
+        <p:nvSpPr>
+          <p:cNvPr id="18" name="b1"/>
+          <p:cNvSpPr txBox="1"/>
+          <p:nvPr/>
+        </p:nvSpPr>
+        <p:spPr>
+          <a:xfrm>
+            <a:off x="6718300" y="3556000"/>
+            <a:ext cx="4711700" cy="1320800"/>
+          </a:xfrm>
+          <a:prstGeom prst="rect">
+            <a:avLst/>
+          </a:prstGeom>
+          <a:noFill/>
+          <a:ln/>
+        </p:spPr>
+        <p:txBody>
+          <a:bodyPr wrap="square" lIns="0" tIns="0" rIns="0" bIns="0" rtlCol="0" anchor="t"/>
+          <a:lstStyle/>
+          <a:p>
+            <a:pPr algn="l" indent="0" marL="0">
+              <a:lnSpc>
+                <a:spcPct val="130000"/>
+              </a:lnSpc>
+              <a:spcAft>
+                <a:spcPts val="600"/>
+              </a:spcAft>
+              <a:buNone/>
+            </a:pPr>
+            <a:r>
+              <a:rPr lang="en-US" sz="1500" b="1" dirty="0">
+                <a:solidFill>
+                  <a:srgbClr val="1B2430"/>
+                </a:solidFill>
+                <a:latin typeface="Public Sans" pitchFamily="34" charset="0"/>
+                <a:ea typeface="Public Sans" pitchFamily="34" charset="-122"/>
+                <a:cs typeface="Public Sans" pitchFamily="34" charset="-120"/>
+              </a:rPr>
+              <a:t>Same-transaction audit</a:t>
+            </a:r>
+            <a:endParaRPr lang="en-US" sz="1200" dirty="0"/>
+          </a:p>
+          <a:p>
+            <a:pPr algn="l" indent="0" marL="0">
+              <a:lnSpc>
+                <a:spcPct val="130000"/>
+              </a:lnSpc>
+              <a:spcAft>
+                <a:spcPts val="800"/>
+              </a:spcAft>
+              <a:buNone/>
+            </a:pPr>
+            <a:r>
+              <a:rPr lang="en-US" sz="1200" dirty="0">
+                <a:solidFill>
+                  <a:srgbClr val="465060"/>
+                </a:solidFill>
+                <a:latin typeface="Public Sans" pitchFamily="34" charset="0"/>
+                <a:ea typeface="Public Sans" pitchFamily="34" charset="-122"/>
+                <a:cs typeface="Public Sans" pitchFamily="34" charset="-120"/>
+              </a:rPr>
+              <a:t>A status change, its audit row, the operator's notification and, on approval, the licence certificate either all happen or none do.</a:t>
+            </a:r>
+            <a:endParaRPr lang="en-US" sz="1200" dirty="0"/>
+          </a:p>
+          <a:p>
+            <a:pPr algn="l" indent="0" marL="0">
+              <a:lnSpc>
+                <a:spcPct val="130000"/>
+              </a:lnSpc>
+              <a:buNone/>
+            </a:pPr>
+            <a:endParaRPr lang="en-US" sz="1200" dirty="0"/>
+          </a:p>
+        </p:txBody>
+      </p:sp>
+      <p:sp>
+        <p:nvSpPr>
+          <p:cNvPr id="19" name="b1"/>
+          <p:cNvSpPr/>
+          <p:nvPr/>
+        </p:nvSpPr>
+        <p:spPr>
+          <a:xfrm>
+            <a:off x="6273800" y="4978400"/>
+            <a:ext cx="5156200" cy="0"/>
+          </a:xfrm>
+          <a:prstGeom prst="line">
+            <a:avLst/>
+          </a:prstGeom>
+          <a:noFill/>
+          <a:ln w="9525">
+            <a:solidFill>
+              <a:srgbClr val="DDE1E7"/>
+            </a:solidFill>
+            <a:prstDash val="solid"/>
+          </a:ln>
+        </p:spPr>
+      </p:sp>
+      <p:sp>
+        <p:nvSpPr>
+          <p:cNvPr id="20" name="b1"/>
+          <p:cNvSpPr txBox="1"/>
+          <p:nvPr/>
+        </p:nvSpPr>
+        <p:spPr>
+          <a:xfrm>
+            <a:off x="6273800" y="5168900"/>
+            <a:ext cx="317500" cy="190500"/>
+          </a:xfrm>
+          <a:prstGeom prst="rect">
+            <a:avLst/>
+          </a:prstGeom>
+          <a:noFill/>
+          <a:ln/>
+        </p:spPr>
+        <p:txBody>
+          <a:bodyPr wrap="square" lIns="0" tIns="0" rIns="0" bIns="0" rtlCol="0" anchor="t"/>
+          <a:lstStyle/>
+          <a:p>
+            <a:pPr algn="l" indent="0" marL="0">
+              <a:lnSpc>
+                <a:spcPct val="115000"/>
+              </a:lnSpc>
+              <a:buNone/>
+            </a:pPr>
+            <a:r>
+              <a:rPr lang="en-US" sz="1100" dirty="0">
+                <a:solidFill>
+                  <a:srgbClr val="616C7A"/>
+                </a:solidFill>
+                <a:latin typeface="IBM Plex Mono" pitchFamily="34" charset="0"/>
+                <a:ea typeface="IBM Plex Mono" pitchFamily="34" charset="-122"/>
+                <a:cs typeface="IBM Plex Mono" pitchFamily="34" charset="-120"/>
+              </a:rPr>
+              <a:t>06</a:t>
+            </a:r>
+            <a:endParaRPr lang="en-US" sz="1100" dirty="0"/>
+          </a:p>
+        </p:txBody>
+      </p:sp>
+      <p:sp>
+        <p:nvSpPr>
+          <p:cNvPr id="21" name="b1"/>
+          <p:cNvSpPr txBox="1"/>
+          <p:nvPr/>
+        </p:nvSpPr>
+        <p:spPr>
+          <a:xfrm>
+            <a:off x="6718300" y="5130800"/>
+            <a:ext cx="4711700" cy="1320800"/>
+          </a:xfrm>
+          <a:prstGeom prst="rect">
+            <a:avLst/>
+          </a:prstGeom>
+          <a:noFill/>
+          <a:ln/>
+        </p:spPr>
+        <p:txBody>
+          <a:bodyPr wrap="square" lIns="0" tIns="0" rIns="0" bIns="0" rtlCol="0" anchor="t"/>
+          <a:lstStyle/>
+          <a:p>
+            <a:pPr algn="l" indent="0" marL="0">
+              <a:lnSpc>
+                <a:spcPct val="130000"/>
+              </a:lnSpc>
+              <a:spcAft>
+                <a:spcPts val="600"/>
+              </a:spcAft>
+              <a:buNone/>
+            </a:pPr>
+            <a:r>
+              <a:rPr lang="en-US" sz="1500" b="1" dirty="0">
+                <a:solidFill>
+                  <a:srgbClr val="1B2430"/>
+                </a:solidFill>
+                <a:latin typeface="Public Sans" pitchFamily="34" charset="0"/>
+                <a:ea typeface="Public Sans" pitchFamily="34" charset="-122"/>
+                <a:cs typeface="Public Sans" pitchFamily="34" charset="-120"/>
+              </a:rPr>
+              <a:t>Role-aware by construction</a:t>
+            </a:r>
+            <a:endParaRPr lang="en-US" sz="1200" dirty="0"/>
+          </a:p>
+          <a:p>
+            <a:pPr algn="l" indent="0" marL="0">
+              <a:lnSpc>
+                <a:spcPct val="130000"/>
+              </a:lnSpc>
+              <a:spcAft>
+                <a:spcPts val="800"/>
+              </a:spcAft>
+              <a:buNone/>
+            </a:pPr>
+            <a:r>
+              <a:rPr lang="en-US" sz="1200" dirty="0">
+                <a:solidFill>
+                  <a:srgbClr val="465060"/>
+                </a:solidFill>
+                <a:latin typeface="Public Sans" pitchFamily="34" charset="0"/>
+                <a:ea typeface="Public Sans" pitchFamily="34" charset="-122"/>
+                <a:cs typeface="Public Sans" pitchFamily="34" charset="-120"/>
+              </a:rPr>
+              <a:t>Authorization is server-side on every route with an authorization test per endpoint. Operators receive their own labels and never an internal status code.</a:t>
+            </a:r>
+            <a:endParaRPr lang="en-US" sz="1200" dirty="0"/>
+          </a:p>
+          <a:p>
+            <a:pPr algn="l" indent="0" marL="0">
+              <a:lnSpc>
+                <a:spcPct val="130000"/>
+              </a:lnSpc>
+              <a:buNone/>
+            </a:pPr>
+            <a:endParaRPr lang="en-US" sz="1200" dirty="0"/>
+          </a:p>
+        </p:txBody>
+      </p:sp>
+      <p:sp>
+        <p:nvSpPr>
+          <p:cNvPr id="22" name="Text 20"/>
+          <p:cNvSpPr txBox="1"/>
+          <p:nvPr/>
+        </p:nvSpPr>
+        <p:spPr>
+          <a:xfrm>
+            <a:off x="10160000" y="571500"/>
+            <a:ext cx="1270000" cy="190500"/>
+          </a:xfrm>
+          <a:prstGeom prst="rect">
+            <a:avLst/>
+          </a:prstGeom>
+          <a:noFill/>
+          <a:ln/>
+        </p:spPr>
+        <p:txBody>
+          <a:bodyPr wrap="square" lIns="0" tIns="0" rIns="0" bIns="0" rtlCol="0" anchor="t"/>
+          <a:lstStyle/>
+          <a:p>
+            <a:pPr algn="r" indent="0" marL="0">
+              <a:lnSpc>
+                <a:spcPct val="115000"/>
+              </a:lnSpc>
+              <a:buNone/>
+            </a:pPr>
+            <a:r>
+              <a:rPr lang="en-US" sz="1000" dirty="0">
+                <a:solidFill>
+                  <a:srgbClr val="616C7A"/>
+                </a:solidFill>
+                <a:latin typeface="IBM Plex Mono" pitchFamily="34" charset="0"/>
+                <a:ea typeface="IBM Plex Mono" pitchFamily="34" charset="-122"/>
+                <a:cs typeface="IBM Plex Mono" pitchFamily="34" charset="-120"/>
+              </a:rPr>
+              <a:t>10 / 15</a:t>
             </a:r>
             <a:endParaRPr lang="en-US" sz="1000" dirty="0"/>
           </a:p>
@@ -2558,6 +3488,380 @@
   <p:transition spd="fast">
     <p:fade/>
   </p:transition>
+  <p:timing>
+    <p:tnLst>
+      <p:par>
+        <p:cTn id="1" dur="indefinite" restart="never" nodeType="tmRoot">
+          <p:childTnLst>
+            <p:seq concurrent="1" nextAc="seek">
+              <p:cTn id="2" dur="indefinite" nodeType="mainSeq">
+                <p:childTnLst>
+                  <p:par>
+                    <p:cTn id="30" fill="hold">
+                      <p:stCondLst>
+                        <p:cond delay="indefinite"/>
+                      </p:stCondLst>
+                      <p:childTnLst>
+                        <p:par>
+                          <p:cTn id="31" fill="hold">
+                            <p:stCondLst>
+                              <p:cond delay="0"/>
+                            </p:stCondLst>
+                            <p:childTnLst>
+                              <p:par>
+                                <p:cTn id="3" presetID="10" presetClass="entr" presetSubtype="0" fill="hold" grpId="0" nodeType="clickEffect">
+                                  <p:stCondLst>
+                                    <p:cond delay="0"/>
+                                  </p:stCondLst>
+                                  <p:childTnLst>
+                                    <p:set>
+                                      <p:cBhvr>
+                                        <p:cTn id="4" dur="1" fill="hold">
+                                          <p:stCondLst>
+                                            <p:cond delay="0"/>
+                                          </p:stCondLst>
+                                        </p:cTn>
+                                        <p:tgtEl>
+                                          <p:spTgt spid="13"/>
+                                        </p:tgtEl>
+                                        <p:attrNameLst>
+                                          <p:attrName>style.visibility</p:attrName>
+                                        </p:attrNameLst>
+                                      </p:cBhvr>
+                                      <p:to>
+                                        <p:strVal val="visible"/>
+                                      </p:to>
+                                    </p:set>
+                                    <p:animEffect transition="in" filter="fade">
+                                      <p:cBhvr>
+                                        <p:cTn id="5" dur="320"/>
+                                        <p:tgtEl>
+                                          <p:spTgt spid="13"/>
+                                        </p:tgtEl>
+                                      </p:cBhvr>
+                                    </p:animEffect>
+                                  </p:childTnLst>
+                                </p:cTn>
+                              </p:par>
+                              <p:par>
+                                <p:cTn id="6" presetID="10" presetClass="entr" presetSubtype="0" fill="hold" grpId="0" nodeType="withEffect">
+                                  <p:stCondLst>
+                                    <p:cond delay="100"/>
+                                  </p:stCondLst>
+                                  <p:childTnLst>
+                                    <p:set>
+                                      <p:cBhvr>
+                                        <p:cTn id="7" dur="1" fill="hold">
+                                          <p:stCondLst>
+                                            <p:cond delay="0"/>
+                                          </p:stCondLst>
+                                        </p:cTn>
+                                        <p:tgtEl>
+                                          <p:spTgt spid="14"/>
+                                        </p:tgtEl>
+                                        <p:attrNameLst>
+                                          <p:attrName>style.visibility</p:attrName>
+                                        </p:attrNameLst>
+                                      </p:cBhvr>
+                                      <p:to>
+                                        <p:strVal val="visible"/>
+                                      </p:to>
+                                    </p:set>
+                                    <p:animEffect transition="in" filter="fade">
+                                      <p:cBhvr>
+                                        <p:cTn id="8" dur="320"/>
+                                        <p:tgtEl>
+                                          <p:spTgt spid="14"/>
+                                        </p:tgtEl>
+                                      </p:cBhvr>
+                                    </p:animEffect>
+                                  </p:childTnLst>
+                                </p:cTn>
+                              </p:par>
+                              <p:par>
+                                <p:cTn id="9" presetID="10" presetClass="entr" presetSubtype="0" fill="hold" grpId="0" nodeType="withEffect">
+                                  <p:stCondLst>
+                                    <p:cond delay="200"/>
+                                  </p:stCondLst>
+                                  <p:childTnLst>
+                                    <p:set>
+                                      <p:cBhvr>
+                                        <p:cTn id="10" dur="1" fill="hold">
+                                          <p:stCondLst>
+                                            <p:cond delay="0"/>
+                                          </p:stCondLst>
+                                        </p:cTn>
+                                        <p:tgtEl>
+                                          <p:spTgt spid="15"/>
+                                        </p:tgtEl>
+                                        <p:attrNameLst>
+                                          <p:attrName>style.visibility</p:attrName>
+                                        </p:attrNameLst>
+                                      </p:cBhvr>
+                                      <p:to>
+                                        <p:strVal val="visible"/>
+                                      </p:to>
+                                    </p:set>
+                                    <p:animEffect transition="in" filter="fade">
+                                      <p:cBhvr>
+                                        <p:cTn id="11" dur="320"/>
+                                        <p:tgtEl>
+                                          <p:spTgt spid="15"/>
+                                        </p:tgtEl>
+                                      </p:cBhvr>
+                                    </p:animEffect>
+                                  </p:childTnLst>
+                                </p:cTn>
+                              </p:par>
+                              <p:par>
+                                <p:cTn id="12" presetID="10" presetClass="entr" presetSubtype="0" fill="hold" grpId="0" nodeType="withEffect">
+                                  <p:stCondLst>
+                                    <p:cond delay="300"/>
+                                  </p:stCondLst>
+                                  <p:childTnLst>
+                                    <p:set>
+                                      <p:cBhvr>
+                                        <p:cTn id="13" dur="1" fill="hold">
+                                          <p:stCondLst>
+                                            <p:cond delay="0"/>
+                                          </p:stCondLst>
+                                        </p:cTn>
+                                        <p:tgtEl>
+                                          <p:spTgt spid="16"/>
+                                        </p:tgtEl>
+                                        <p:attrNameLst>
+                                          <p:attrName>style.visibility</p:attrName>
+                                        </p:attrNameLst>
+                                      </p:cBhvr>
+                                      <p:to>
+                                        <p:strVal val="visible"/>
+                                      </p:to>
+                                    </p:set>
+                                    <p:animEffect transition="in" filter="fade">
+                                      <p:cBhvr>
+                                        <p:cTn id="14" dur="320"/>
+                                        <p:tgtEl>
+                                          <p:spTgt spid="16"/>
+                                        </p:tgtEl>
+                                      </p:cBhvr>
+                                    </p:animEffect>
+                                  </p:childTnLst>
+                                </p:cTn>
+                              </p:par>
+                              <p:par>
+                                <p:cTn id="15" presetID="10" presetClass="entr" presetSubtype="0" fill="hold" grpId="0" nodeType="withEffect">
+                                  <p:stCondLst>
+                                    <p:cond delay="400"/>
+                                  </p:stCondLst>
+                                  <p:childTnLst>
+                                    <p:set>
+                                      <p:cBhvr>
+                                        <p:cTn id="16" dur="1" fill="hold">
+                                          <p:stCondLst>
+                                            <p:cond delay="0"/>
+                                          </p:stCondLst>
+                                        </p:cTn>
+                                        <p:tgtEl>
+                                          <p:spTgt spid="17"/>
+                                        </p:tgtEl>
+                                        <p:attrNameLst>
+                                          <p:attrName>style.visibility</p:attrName>
+                                        </p:attrNameLst>
+                                      </p:cBhvr>
+                                      <p:to>
+                                        <p:strVal val="visible"/>
+                                      </p:to>
+                                    </p:set>
+                                    <p:animEffect transition="in" filter="fade">
+                                      <p:cBhvr>
+                                        <p:cTn id="17" dur="320"/>
+                                        <p:tgtEl>
+                                          <p:spTgt spid="17"/>
+                                        </p:tgtEl>
+                                      </p:cBhvr>
+                                    </p:animEffect>
+                                  </p:childTnLst>
+                                </p:cTn>
+                              </p:par>
+                              <p:par>
+                                <p:cTn id="18" presetID="10" presetClass="entr" presetSubtype="0" fill="hold" grpId="0" nodeType="withEffect">
+                                  <p:stCondLst>
+                                    <p:cond delay="500"/>
+                                  </p:stCondLst>
+                                  <p:childTnLst>
+                                    <p:set>
+                                      <p:cBhvr>
+                                        <p:cTn id="19" dur="1" fill="hold">
+                                          <p:stCondLst>
+                                            <p:cond delay="0"/>
+                                          </p:stCondLst>
+                                        </p:cTn>
+                                        <p:tgtEl>
+                                          <p:spTgt spid="18"/>
+                                        </p:tgtEl>
+                                        <p:attrNameLst>
+                                          <p:attrName>style.visibility</p:attrName>
+                                        </p:attrNameLst>
+                                      </p:cBhvr>
+                                      <p:to>
+                                        <p:strVal val="visible"/>
+                                      </p:to>
+                                    </p:set>
+                                    <p:animEffect transition="in" filter="fade">
+                                      <p:cBhvr>
+                                        <p:cTn id="20" dur="320"/>
+                                        <p:tgtEl>
+                                          <p:spTgt spid="18"/>
+                                        </p:tgtEl>
+                                      </p:cBhvr>
+                                    </p:animEffect>
+                                  </p:childTnLst>
+                                </p:cTn>
+                              </p:par>
+                              <p:par>
+                                <p:cTn id="21" presetID="10" presetClass="entr" presetSubtype="0" fill="hold" grpId="0" nodeType="withEffect">
+                                  <p:stCondLst>
+                                    <p:cond delay="600"/>
+                                  </p:stCondLst>
+                                  <p:childTnLst>
+                                    <p:set>
+                                      <p:cBhvr>
+                                        <p:cTn id="22" dur="1" fill="hold">
+                                          <p:stCondLst>
+                                            <p:cond delay="0"/>
+                                          </p:stCondLst>
+                                        </p:cTn>
+                                        <p:tgtEl>
+                                          <p:spTgt spid="19"/>
+                                        </p:tgtEl>
+                                        <p:attrNameLst>
+                                          <p:attrName>style.visibility</p:attrName>
+                                        </p:attrNameLst>
+                                      </p:cBhvr>
+                                      <p:to>
+                                        <p:strVal val="visible"/>
+                                      </p:to>
+                                    </p:set>
+                                    <p:animEffect transition="in" filter="fade">
+                                      <p:cBhvr>
+                                        <p:cTn id="23" dur="320"/>
+                                        <p:tgtEl>
+                                          <p:spTgt spid="19"/>
+                                        </p:tgtEl>
+                                      </p:cBhvr>
+                                    </p:animEffect>
+                                  </p:childTnLst>
+                                </p:cTn>
+                              </p:par>
+                              <p:par>
+                                <p:cTn id="24" presetID="10" presetClass="entr" presetSubtype="0" fill="hold" grpId="0" nodeType="withEffect">
+                                  <p:stCondLst>
+                                    <p:cond delay="700"/>
+                                  </p:stCondLst>
+                                  <p:childTnLst>
+                                    <p:set>
+                                      <p:cBhvr>
+                                        <p:cTn id="25" dur="1" fill="hold">
+                                          <p:stCondLst>
+                                            <p:cond delay="0"/>
+                                          </p:stCondLst>
+                                        </p:cTn>
+                                        <p:tgtEl>
+                                          <p:spTgt spid="20"/>
+                                        </p:tgtEl>
+                                        <p:attrNameLst>
+                                          <p:attrName>style.visibility</p:attrName>
+                                        </p:attrNameLst>
+                                      </p:cBhvr>
+                                      <p:to>
+                                        <p:strVal val="visible"/>
+                                      </p:to>
+                                    </p:set>
+                                    <p:animEffect transition="in" filter="fade">
+                                      <p:cBhvr>
+                                        <p:cTn id="26" dur="320"/>
+                                        <p:tgtEl>
+                                          <p:spTgt spid="20"/>
+                                        </p:tgtEl>
+                                      </p:cBhvr>
+                                    </p:animEffect>
+                                  </p:childTnLst>
+                                </p:cTn>
+                              </p:par>
+                              <p:par>
+                                <p:cTn id="27" presetID="10" presetClass="entr" presetSubtype="0" fill="hold" grpId="0" nodeType="withEffect">
+                                  <p:stCondLst>
+                                    <p:cond delay="800"/>
+                                  </p:stCondLst>
+                                  <p:childTnLst>
+                                    <p:set>
+                                      <p:cBhvr>
+                                        <p:cTn id="28" dur="1" fill="hold">
+                                          <p:stCondLst>
+                                            <p:cond delay="0"/>
+                                          </p:stCondLst>
+                                        </p:cTn>
+                                        <p:tgtEl>
+                                          <p:spTgt spid="21"/>
+                                        </p:tgtEl>
+                                        <p:attrNameLst>
+                                          <p:attrName>style.visibility</p:attrName>
+                                        </p:attrNameLst>
+                                      </p:cBhvr>
+                                      <p:to>
+                                        <p:strVal val="visible"/>
+                                      </p:to>
+                                    </p:set>
+                                    <p:animEffect transition="in" filter="fade">
+                                      <p:cBhvr>
+                                        <p:cTn id="29" dur="320"/>
+                                        <p:tgtEl>
+                                          <p:spTgt spid="21"/>
+                                        </p:tgtEl>
+                                      </p:cBhvr>
+                                    </p:animEffect>
+                                  </p:childTnLst>
+                                </p:cTn>
+                              </p:par>
+                            </p:childTnLst>
+                          </p:cTn>
+                        </p:par>
+                      </p:childTnLst>
+                    </p:cTn>
+                  </p:par>
+                </p:childTnLst>
+              </p:cTn>
+              <p:prevCondLst>
+                <p:cond evt="onPrev" delay="0">
+                  <p:tgtEl>
+                    <p:sldTgt/>
+                  </p:tgtEl>
+                </p:cond>
+              </p:prevCondLst>
+              <p:nextCondLst>
+                <p:cond evt="onNext" delay="0">
+                  <p:tgtEl>
+                    <p:sldTgt/>
+                  </p:tgtEl>
+                </p:cond>
+              </p:nextCondLst>
+            </p:seq>
+          </p:childTnLst>
+        </p:cTn>
+      </p:par>
+    </p:tnLst>
+    <p:bldLst>
+      <p:bldP spid="13" grpId="0" animBg="1"/>
+      <p:bldP spid="14" grpId="0" animBg="1"/>
+      <p:bldP spid="15" grpId="0" animBg="1"/>
+      <p:bldP spid="16" grpId="0" animBg="1"/>
+      <p:bldP spid="17" grpId="0" animBg="1"/>
+      <p:bldP spid="18" grpId="0" animBg="1"/>
+      <p:bldP spid="19" grpId="0" animBg="1"/>
+      <p:bldP spid="20" grpId="0" animBg="1"/>
+      <p:bldP spid="21" grpId="0" animBg="1"/>
+    </p:bldLst>
+  </p:timing>
 </p:sld>
 </file>
 
@@ -2621,6 +3925,2248 @@
                 <a:ea typeface="Public Sans" pitchFamily="34" charset="-122"/>
                 <a:cs typeface="Public Sans" pitchFamily="34" charset="-120"/>
               </a:rPr>
+              <a:t>BUILT TO BE TAKEN TO PRODUCTION</a:t>
+            </a:r>
+            <a:endParaRPr lang="en-US" sz="1100" dirty="0"/>
+          </a:p>
+        </p:txBody>
+      </p:sp>
+      <p:sp>
+        <p:nvSpPr>
+          <p:cNvPr id="3" name="Text 1"/>
+          <p:cNvSpPr txBox="1"/>
+          <p:nvPr/>
+        </p:nvSpPr>
+        <p:spPr>
+          <a:xfrm>
+            <a:off x="762000" y="863600"/>
+            <a:ext cx="9906000" cy="825500"/>
+          </a:xfrm>
+          <a:prstGeom prst="rect">
+            <a:avLst/>
+          </a:prstGeom>
+          <a:noFill/>
+          <a:ln/>
+        </p:spPr>
+        <p:txBody>
+          <a:bodyPr wrap="square" lIns="0" tIns="0" rIns="0" bIns="0" rtlCol="0" anchor="t"/>
+          <a:lstStyle/>
+          <a:p>
+            <a:pPr algn="l" indent="0" marL="0">
+              <a:lnSpc>
+                <a:spcPct val="108000"/>
+              </a:lnSpc>
+              <a:buNone/>
+            </a:pPr>
+            <a:r>
+              <a:rPr lang="en-US" sz="2700" dirty="0">
+                <a:solidFill>
+                  <a:srgbClr val="1B2430"/>
+                </a:solidFill>
+                <a:latin typeface="Instrument Serif" pitchFamily="34" charset="0"/>
+                <a:ea typeface="Instrument Serif" pitchFamily="34" charset="-122"/>
+                <a:cs typeface="Instrument Serif" pitchFamily="34" charset="-120"/>
+              </a:rPr>
+              <a:t>A modular monolith with an explicit state machine, an advisory AI module and an audit trail written in the same transaction.</a:t>
+            </a:r>
+            <a:endParaRPr lang="en-US" sz="2700" dirty="0"/>
+          </a:p>
+        </p:txBody>
+      </p:sp>
+      <p:sp>
+        <p:nvSpPr>
+          <p:cNvPr id="4" name="Text 2"/>
+          <p:cNvSpPr txBox="1"/>
+          <p:nvPr/>
+        </p:nvSpPr>
+        <p:spPr>
+          <a:xfrm>
+            <a:off x="736600" y="2146300"/>
+            <a:ext cx="711200" cy="177800"/>
+          </a:xfrm>
+          <a:prstGeom prst="rect">
+            <a:avLst/>
+          </a:prstGeom>
+          <a:noFill/>
+          <a:ln/>
+        </p:spPr>
+        <p:txBody>
+          <a:bodyPr wrap="square" lIns="0" tIns="0" rIns="0" bIns="0" rtlCol="0" anchor="t"/>
+          <a:lstStyle/>
+          <a:p>
+            <a:pPr algn="l" indent="0" marL="0">
+              <a:lnSpc>
+                <a:spcPct val="115000"/>
+              </a:lnSpc>
+              <a:buNone/>
+            </a:pPr>
+            <a:r>
+              <a:rPr lang="en-US" sz="950" b="1" spc="20" kern="0" dirty="0">
+                <a:solidFill>
+                  <a:srgbClr val="616C7A"/>
+                </a:solidFill>
+                <a:latin typeface="Public Sans" pitchFamily="34" charset="0"/>
+                <a:ea typeface="Public Sans" pitchFamily="34" charset="-122"/>
+                <a:cs typeface="Public Sans" pitchFamily="34" charset="-120"/>
+              </a:rPr>
+              <a:t>BROWSER</a:t>
+            </a:r>
+            <a:endParaRPr lang="en-US" sz="950" dirty="0"/>
+          </a:p>
+        </p:txBody>
+      </p:sp>
+      <p:sp>
+        <p:nvSpPr>
+          <p:cNvPr id="5" name="Text 3"/>
+          <p:cNvSpPr txBox="1"/>
+          <p:nvPr/>
+        </p:nvSpPr>
+        <p:spPr>
+          <a:xfrm>
+            <a:off x="736600" y="3035300"/>
+            <a:ext cx="711200" cy="177800"/>
+          </a:xfrm>
+          <a:prstGeom prst="rect">
+            <a:avLst/>
+          </a:prstGeom>
+          <a:noFill/>
+          <a:ln/>
+        </p:spPr>
+        <p:txBody>
+          <a:bodyPr wrap="square" lIns="0" tIns="0" rIns="0" bIns="0" rtlCol="0" anchor="t"/>
+          <a:lstStyle/>
+          <a:p>
+            <a:pPr algn="l" indent="0" marL="0">
+              <a:lnSpc>
+                <a:spcPct val="115000"/>
+              </a:lnSpc>
+              <a:buNone/>
+            </a:pPr>
+            <a:r>
+              <a:rPr lang="en-US" sz="950" b="1" spc="20" kern="0" dirty="0">
+                <a:solidFill>
+                  <a:srgbClr val="616C7A"/>
+                </a:solidFill>
+                <a:latin typeface="Public Sans" pitchFamily="34" charset="0"/>
+                <a:ea typeface="Public Sans" pitchFamily="34" charset="-122"/>
+                <a:cs typeface="Public Sans" pitchFamily="34" charset="-120"/>
+              </a:rPr>
+              <a:t>API</a:t>
+            </a:r>
+            <a:endParaRPr lang="en-US" sz="950" dirty="0"/>
+          </a:p>
+        </p:txBody>
+      </p:sp>
+      <p:sp>
+        <p:nvSpPr>
+          <p:cNvPr id="6" name="Text 4"/>
+          <p:cNvSpPr txBox="1"/>
+          <p:nvPr/>
+        </p:nvSpPr>
+        <p:spPr>
+          <a:xfrm>
+            <a:off x="736600" y="3924300"/>
+            <a:ext cx="711200" cy="177800"/>
+          </a:xfrm>
+          <a:prstGeom prst="rect">
+            <a:avLst/>
+          </a:prstGeom>
+          <a:noFill/>
+          <a:ln/>
+        </p:spPr>
+        <p:txBody>
+          <a:bodyPr wrap="square" lIns="0" tIns="0" rIns="0" bIns="0" rtlCol="0" anchor="t"/>
+          <a:lstStyle/>
+          <a:p>
+            <a:pPr algn="l" indent="0" marL="0">
+              <a:lnSpc>
+                <a:spcPct val="115000"/>
+              </a:lnSpc>
+              <a:buNone/>
+            </a:pPr>
+            <a:r>
+              <a:rPr lang="en-US" sz="950" b="1" spc="20" kern="0" dirty="0">
+                <a:solidFill>
+                  <a:srgbClr val="616C7A"/>
+                </a:solidFill>
+                <a:latin typeface="Public Sans" pitchFamily="34" charset="0"/>
+                <a:ea typeface="Public Sans" pitchFamily="34" charset="-122"/>
+                <a:cs typeface="Public Sans" pitchFamily="34" charset="-120"/>
+              </a:rPr>
+              <a:t>DOMAIN</a:t>
+            </a:r>
+            <a:endParaRPr lang="en-US" sz="950" dirty="0"/>
+          </a:p>
+        </p:txBody>
+      </p:sp>
+      <p:sp>
+        <p:nvSpPr>
+          <p:cNvPr id="7" name="Text 5"/>
+          <p:cNvSpPr txBox="1"/>
+          <p:nvPr/>
+        </p:nvSpPr>
+        <p:spPr>
+          <a:xfrm>
+            <a:off x="736600" y="4813300"/>
+            <a:ext cx="711200" cy="177800"/>
+          </a:xfrm>
+          <a:prstGeom prst="rect">
+            <a:avLst/>
+          </a:prstGeom>
+          <a:noFill/>
+          <a:ln/>
+        </p:spPr>
+        <p:txBody>
+          <a:bodyPr wrap="square" lIns="0" tIns="0" rIns="0" bIns="0" rtlCol="0" anchor="t"/>
+          <a:lstStyle/>
+          <a:p>
+            <a:pPr algn="l" indent="0" marL="0">
+              <a:lnSpc>
+                <a:spcPct val="115000"/>
+              </a:lnSpc>
+              <a:buNone/>
+            </a:pPr>
+            <a:r>
+              <a:rPr lang="en-US" sz="950" b="1" spc="20" kern="0" dirty="0">
+                <a:solidFill>
+                  <a:srgbClr val="616C7A"/>
+                </a:solidFill>
+                <a:latin typeface="Public Sans" pitchFamily="34" charset="0"/>
+                <a:ea typeface="Public Sans" pitchFamily="34" charset="-122"/>
+                <a:cs typeface="Public Sans" pitchFamily="34" charset="-120"/>
+              </a:rPr>
+              <a:t>DATA</a:t>
+            </a:r>
+            <a:endParaRPr lang="en-US" sz="950" dirty="0"/>
+          </a:p>
+        </p:txBody>
+      </p:sp>
+      <p:sp>
+        <p:nvSpPr>
+          <p:cNvPr id="8" name="Text 6"/>
+          <p:cNvSpPr txBox="1"/>
+          <p:nvPr/>
+        </p:nvSpPr>
+        <p:spPr>
+          <a:xfrm>
+            <a:off x="736600" y="5702300"/>
+            <a:ext cx="711200" cy="177800"/>
+          </a:xfrm>
+          <a:prstGeom prst="rect">
+            <a:avLst/>
+          </a:prstGeom>
+          <a:noFill/>
+          <a:ln/>
+        </p:spPr>
+        <p:txBody>
+          <a:bodyPr wrap="square" lIns="0" tIns="0" rIns="0" bIns="0" rtlCol="0" anchor="t"/>
+          <a:lstStyle/>
+          <a:p>
+            <a:pPr algn="l" indent="0" marL="0">
+              <a:lnSpc>
+                <a:spcPct val="115000"/>
+              </a:lnSpc>
+              <a:buNone/>
+            </a:pPr>
+            <a:r>
+              <a:rPr lang="en-US" sz="950" b="1" spc="20" kern="0" dirty="0">
+                <a:solidFill>
+                  <a:srgbClr val="616C7A"/>
+                </a:solidFill>
+                <a:latin typeface="Public Sans" pitchFamily="34" charset="0"/>
+                <a:ea typeface="Public Sans" pitchFamily="34" charset="-122"/>
+                <a:cs typeface="Public Sans" pitchFamily="34" charset="-120"/>
+              </a:rPr>
+              <a:t>RUNS ON</a:t>
+            </a:r>
+            <a:endParaRPr lang="en-US" sz="950" dirty="0"/>
+          </a:p>
+        </p:txBody>
+      </p:sp>
+      <p:sp>
+        <p:nvSpPr>
+          <p:cNvPr id="9" name="Shape 7"/>
+          <p:cNvSpPr/>
+          <p:nvPr/>
+        </p:nvSpPr>
+        <p:spPr>
+          <a:xfrm>
+            <a:off x="3937000" y="2540000"/>
+            <a:ext cx="0" cy="254000"/>
+          </a:xfrm>
+          <a:prstGeom prst="line">
+            <a:avLst/>
+          </a:prstGeom>
+          <a:noFill/>
+          <a:ln w="31750">
+            <a:solidFill>
+              <a:srgbClr val="AEB6C2"/>
+            </a:solidFill>
+            <a:prstDash val="solid"/>
+          </a:ln>
+        </p:spPr>
+      </p:sp>
+      <p:sp>
+        <p:nvSpPr>
+          <p:cNvPr id="10" name="Shape 8"/>
+          <p:cNvSpPr/>
+          <p:nvPr/>
+        </p:nvSpPr>
+        <p:spPr>
+          <a:xfrm>
+            <a:off x="3937000" y="3429000"/>
+            <a:ext cx="0" cy="254000"/>
+          </a:xfrm>
+          <a:prstGeom prst="line">
+            <a:avLst/>
+          </a:prstGeom>
+          <a:noFill/>
+          <a:ln w="31750">
+            <a:solidFill>
+              <a:srgbClr val="AEB6C2"/>
+            </a:solidFill>
+            <a:prstDash val="solid"/>
+          </a:ln>
+        </p:spPr>
+      </p:sp>
+      <p:sp>
+        <p:nvSpPr>
+          <p:cNvPr id="11" name="Shape 9"/>
+          <p:cNvSpPr/>
+          <p:nvPr/>
+        </p:nvSpPr>
+        <p:spPr>
+          <a:xfrm>
+            <a:off x="3937000" y="4318000"/>
+            <a:ext cx="0" cy="254000"/>
+          </a:xfrm>
+          <a:prstGeom prst="line">
+            <a:avLst/>
+          </a:prstGeom>
+          <a:noFill/>
+          <a:ln w="31750">
+            <a:solidFill>
+              <a:srgbClr val="AEB6C2"/>
+            </a:solidFill>
+            <a:prstDash val="solid"/>
+          </a:ln>
+        </p:spPr>
+      </p:sp>
+      <p:sp>
+        <p:nvSpPr>
+          <p:cNvPr id="12" name="Shape 10"/>
+          <p:cNvSpPr/>
+          <p:nvPr/>
+        </p:nvSpPr>
+        <p:spPr>
+          <a:xfrm>
+            <a:off x="3937000" y="5207000"/>
+            <a:ext cx="0" cy="254000"/>
+          </a:xfrm>
+          <a:prstGeom prst="line">
+            <a:avLst/>
+          </a:prstGeom>
+          <a:noFill/>
+          <a:ln w="31750">
+            <a:solidFill>
+              <a:srgbClr val="AEB6C2"/>
+            </a:solidFill>
+            <a:prstDash val="solid"/>
+          </a:ln>
+        </p:spPr>
+      </p:sp>
+      <p:sp>
+        <p:nvSpPr>
+          <p:cNvPr id="13" name="Shape 11"/>
+          <p:cNvSpPr/>
+          <p:nvPr/>
+        </p:nvSpPr>
+        <p:spPr>
+          <a:xfrm>
+            <a:off x="6413500" y="3111500"/>
+            <a:ext cx="635000" cy="0"/>
+          </a:xfrm>
+          <a:prstGeom prst="line">
+            <a:avLst/>
+          </a:prstGeom>
+          <a:noFill/>
+          <a:ln w="31750">
+            <a:solidFill>
+              <a:srgbClr val="AEB6C2"/>
+            </a:solidFill>
+            <a:prstDash val="solid"/>
+          </a:ln>
+        </p:spPr>
+      </p:sp>
+      <p:sp>
+        <p:nvSpPr>
+          <p:cNvPr id="14" name="Shape 12"/>
+          <p:cNvSpPr/>
+          <p:nvPr/>
+        </p:nvSpPr>
+        <p:spPr>
+          <a:xfrm>
+            <a:off x="8826500" y="3429000"/>
+            <a:ext cx="0" cy="254000"/>
+          </a:xfrm>
+          <a:prstGeom prst="line">
+            <a:avLst/>
+          </a:prstGeom>
+          <a:noFill/>
+          <a:ln w="31750">
+            <a:solidFill>
+              <a:srgbClr val="AEB6C2"/>
+            </a:solidFill>
+            <a:prstDash val="solid"/>
+          </a:ln>
+        </p:spPr>
+      </p:sp>
+      <p:sp>
+        <p:nvSpPr>
+          <p:cNvPr id="15" name="Shape 13"/>
+          <p:cNvSpPr/>
+          <p:nvPr/>
+        </p:nvSpPr>
+        <p:spPr>
+          <a:xfrm>
+            <a:off x="8826500" y="4318000"/>
+            <a:ext cx="0" cy="254000"/>
+          </a:xfrm>
+          <a:prstGeom prst="line">
+            <a:avLst/>
+          </a:prstGeom>
+          <a:noFill/>
+          <a:ln w="31750">
+            <a:solidFill>
+              <a:srgbClr val="AEB6C2"/>
+            </a:solidFill>
+            <a:prstDash val="solid"/>
+          </a:ln>
+        </p:spPr>
+      </p:sp>
+      <p:sp>
+        <p:nvSpPr>
+          <p:cNvPr id="16" name="Shape 14"/>
+          <p:cNvSpPr/>
+          <p:nvPr/>
+        </p:nvSpPr>
+        <p:spPr>
+          <a:xfrm>
+            <a:off x="5588000" y="4318000"/>
+            <a:ext cx="0" cy="254000"/>
+          </a:xfrm>
+          <a:prstGeom prst="line">
+            <a:avLst/>
+          </a:prstGeom>
+          <a:noFill/>
+          <a:ln w="31750">
+            <a:solidFill>
+              <a:srgbClr val="AEB6C2"/>
+            </a:solidFill>
+            <a:prstDash val="solid"/>
+          </a:ln>
+        </p:spPr>
+      </p:sp>
+      <p:sp>
+        <p:nvSpPr>
+          <p:cNvPr id="17" name="Shape 15"/>
+          <p:cNvSpPr/>
+          <p:nvPr/>
+        </p:nvSpPr>
+        <p:spPr>
+          <a:xfrm>
+            <a:off x="1460500" y="1905000"/>
+            <a:ext cx="4953000" cy="635000"/>
+          </a:xfrm>
+          <a:prstGeom prst="roundRect">
+            <a:avLst>
+              <a:gd name="adj" fmla="val 6000"/>
+            </a:avLst>
+          </a:prstGeom>
+          <a:solidFill>
+            <a:srgbClr val="FFFFFF"/>
+          </a:solidFill>
+          <a:ln w="9525">
+            <a:solidFill>
+              <a:srgbClr val="DDE1E7"/>
+            </a:solidFill>
+            <a:prstDash val="solid"/>
+          </a:ln>
+          <a:effectLst>
+            <a:outerShdw sx="100000" sy="100000" kx="0" ky="0" algn="bl" rotWithShape="0" blurRad="38100" dist="12700" dir="5400000">
+              <a:srgbClr val="101828">
+                <a:alpha val="8000"/>
+              </a:srgbClr>
+            </a:outerShdw>
+          </a:effectLst>
+        </p:spPr>
+      </p:sp>
+      <p:sp>
+        <p:nvSpPr>
+          <p:cNvPr id="18" name="Text 16"/>
+          <p:cNvSpPr txBox="1"/>
+          <p:nvPr/>
+        </p:nvSpPr>
+        <p:spPr>
+          <a:xfrm>
+            <a:off x="1600200" y="1993900"/>
+            <a:ext cx="4673600" cy="190500"/>
+          </a:xfrm>
+          <a:prstGeom prst="rect">
+            <a:avLst/>
+          </a:prstGeom>
+          <a:noFill/>
+          <a:ln/>
+        </p:spPr>
+        <p:txBody>
+          <a:bodyPr wrap="none" lIns="0" tIns="0" rIns="0" bIns="0" rtlCol="0" anchor="t"/>
+          <a:lstStyle/>
+          <a:p>
+            <a:pPr algn="l" indent="0" marL="0">
+              <a:lnSpc>
+                <a:spcPct val="115000"/>
+              </a:lnSpc>
+              <a:buNone/>
+            </a:pPr>
+            <a:r>
+              <a:rPr lang="en-US" sz="1150" b="1" dirty="0">
+                <a:solidFill>
+                  <a:srgbClr val="1B2430"/>
+                </a:solidFill>
+                <a:latin typeface="Public Sans" pitchFamily="34" charset="0"/>
+                <a:ea typeface="Public Sans" pitchFamily="34" charset="-122"/>
+                <a:cs typeface="Public Sans" pitchFamily="34" charset="-120"/>
+              </a:rPr>
+              <a:t>React 19 UI · TypeScript strict · Vite · TanStack Query</a:t>
+            </a:r>
+            <a:endParaRPr lang="en-US" sz="1150" dirty="0"/>
+          </a:p>
+        </p:txBody>
+      </p:sp>
+      <p:sp>
+        <p:nvSpPr>
+          <p:cNvPr id="19" name="Text 17"/>
+          <p:cNvSpPr txBox="1"/>
+          <p:nvPr/>
+        </p:nvSpPr>
+        <p:spPr>
+          <a:xfrm>
+            <a:off x="1600200" y="2171700"/>
+            <a:ext cx="4673600" cy="342900"/>
+          </a:xfrm>
+          <a:prstGeom prst="rect">
+            <a:avLst/>
+          </a:prstGeom>
+          <a:noFill/>
+          <a:ln/>
+        </p:spPr>
+        <p:txBody>
+          <a:bodyPr wrap="square" lIns="0" tIns="0" rIns="0" bIns="0" rtlCol="0" anchor="t"/>
+          <a:lstStyle/>
+          <a:p>
+            <a:pPr algn="l" indent="0" marL="0">
+              <a:lnSpc>
+                <a:spcPct val="115000"/>
+              </a:lnSpc>
+              <a:buNone/>
+            </a:pPr>
+            <a:r>
+              <a:rPr lang="en-US" sz="1000" dirty="0">
+                <a:solidFill>
+                  <a:srgbClr val="465060"/>
+                </a:solidFill>
+                <a:latin typeface="Public Sans" pitchFamily="34" charset="0"/>
+                <a:ea typeface="Public Sans" pitchFamily="34" charset="-122"/>
+                <a:cs typeface="Public Sans" pitchFamily="34" charset="-120"/>
+              </a:rPr>
+              <a:t>Operator and officer workspaces, role-specific labels; a check's status is polled while it runs</a:t>
+            </a:r>
+            <a:endParaRPr lang="en-US" sz="1000" dirty="0"/>
+          </a:p>
+        </p:txBody>
+      </p:sp>
+      <p:sp>
+        <p:nvSpPr>
+          <p:cNvPr id="20" name="Shape 18"/>
+          <p:cNvSpPr/>
+          <p:nvPr/>
+        </p:nvSpPr>
+        <p:spPr>
+          <a:xfrm>
+            <a:off x="7048500" y="1905000"/>
+            <a:ext cx="3556000" cy="635000"/>
+          </a:xfrm>
+          <a:prstGeom prst="roundRect">
+            <a:avLst>
+              <a:gd name="adj" fmla="val 6000"/>
+            </a:avLst>
+          </a:prstGeom>
+          <a:solidFill>
+            <a:srgbClr val="F8F9FB"/>
+          </a:solidFill>
+          <a:ln w="9525">
+            <a:solidFill>
+              <a:srgbClr val="DDE1E7"/>
+            </a:solidFill>
+            <a:prstDash val="solid"/>
+          </a:ln>
+          <a:effectLst>
+            <a:outerShdw sx="100000" sy="100000" kx="0" ky="0" algn="bl" rotWithShape="0" blurRad="38100" dist="12700" dir="5400000">
+              <a:srgbClr val="101828">
+                <a:alpha val="8000"/>
+              </a:srgbClr>
+            </a:outerShdw>
+          </a:effectLst>
+        </p:spPr>
+      </p:sp>
+      <p:sp>
+        <p:nvSpPr>
+          <p:cNvPr id="21" name="Text 19"/>
+          <p:cNvSpPr txBox="1"/>
+          <p:nvPr/>
+        </p:nvSpPr>
+        <p:spPr>
+          <a:xfrm>
+            <a:off x="7188200" y="1993900"/>
+            <a:ext cx="3276600" cy="190500"/>
+          </a:xfrm>
+          <a:prstGeom prst="rect">
+            <a:avLst/>
+          </a:prstGeom>
+          <a:noFill/>
+          <a:ln/>
+        </p:spPr>
+        <p:txBody>
+          <a:bodyPr wrap="none" lIns="0" tIns="0" rIns="0" bIns="0" rtlCol="0" anchor="t"/>
+          <a:lstStyle/>
+          <a:p>
+            <a:pPr algn="l" indent="0" marL="0">
+              <a:lnSpc>
+                <a:spcPct val="115000"/>
+              </a:lnSpc>
+              <a:buNone/>
+            </a:pPr>
+            <a:r>
+              <a:rPr lang="en-US" sz="1150" b="1" dirty="0">
+                <a:solidFill>
+                  <a:srgbClr val="1B2430"/>
+                </a:solidFill>
+                <a:latin typeface="Public Sans" pitchFamily="34" charset="0"/>
+                <a:ea typeface="Public Sans" pitchFamily="34" charset="-122"/>
+                <a:cs typeface="Public Sans" pitchFamily="34" charset="-120"/>
+              </a:rPr>
+              <a:t>Operator · Officer · Admin (reserved)</a:t>
+            </a:r>
+            <a:endParaRPr lang="en-US" sz="1150" dirty="0"/>
+          </a:p>
+        </p:txBody>
+      </p:sp>
+      <p:sp>
+        <p:nvSpPr>
+          <p:cNvPr id="22" name="Text 20"/>
+          <p:cNvSpPr txBox="1"/>
+          <p:nvPr/>
+        </p:nvSpPr>
+        <p:spPr>
+          <a:xfrm>
+            <a:off x="7188200" y="2171700"/>
+            <a:ext cx="3276600" cy="342900"/>
+          </a:xfrm>
+          <a:prstGeom prst="rect">
+            <a:avLst/>
+          </a:prstGeom>
+          <a:noFill/>
+          <a:ln/>
+        </p:spPr>
+        <p:txBody>
+          <a:bodyPr wrap="square" lIns="0" tIns="0" rIns="0" bIns="0" rtlCol="0" anchor="t"/>
+          <a:lstStyle/>
+          <a:p>
+            <a:pPr algn="l" indent="0" marL="0">
+              <a:lnSpc>
+                <a:spcPct val="115000"/>
+              </a:lnSpc>
+              <a:buNone/>
+            </a:pPr>
+            <a:r>
+              <a:rPr lang="en-US" sz="1000" dirty="0">
+                <a:solidFill>
+                  <a:srgbClr val="465060"/>
+                </a:solidFill>
+                <a:latin typeface="Public Sans" pitchFamily="34" charset="0"/>
+                <a:ea typeface="Public Sans" pitchFamily="34" charset="-122"/>
+                <a:cs typeface="Public Sans" pitchFamily="34" charset="-120"/>
+              </a:rPr>
+              <a:t>Three roles; every authorization decision is made on the server</a:t>
+            </a:r>
+            <a:endParaRPr lang="en-US" sz="1000" dirty="0"/>
+          </a:p>
+        </p:txBody>
+      </p:sp>
+      <p:sp>
+        <p:nvSpPr>
+          <p:cNvPr id="23" name="Shape 21"/>
+          <p:cNvSpPr/>
+          <p:nvPr/>
+        </p:nvSpPr>
+        <p:spPr>
+          <a:xfrm>
+            <a:off x="1460500" y="2794000"/>
+            <a:ext cx="4953000" cy="635000"/>
+          </a:xfrm>
+          <a:prstGeom prst="roundRect">
+            <a:avLst>
+              <a:gd name="adj" fmla="val 6000"/>
+            </a:avLst>
+          </a:prstGeom>
+          <a:solidFill>
+            <a:srgbClr val="FFFFFF"/>
+          </a:solidFill>
+          <a:ln w="9525">
+            <a:solidFill>
+              <a:srgbClr val="DDE1E7"/>
+            </a:solidFill>
+            <a:prstDash val="solid"/>
+          </a:ln>
+          <a:effectLst>
+            <a:outerShdw sx="100000" sy="100000" kx="0" ky="0" algn="bl" rotWithShape="0" blurRad="38100" dist="12700" dir="5400000">
+              <a:srgbClr val="101828">
+                <a:alpha val="8000"/>
+              </a:srgbClr>
+            </a:outerShdw>
+          </a:effectLst>
+        </p:spPr>
+      </p:sp>
+      <p:sp>
+        <p:nvSpPr>
+          <p:cNvPr id="24" name="Text 22"/>
+          <p:cNvSpPr txBox="1"/>
+          <p:nvPr/>
+        </p:nvSpPr>
+        <p:spPr>
+          <a:xfrm>
+            <a:off x="1600200" y="2882900"/>
+            <a:ext cx="4673600" cy="190500"/>
+          </a:xfrm>
+          <a:prstGeom prst="rect">
+            <a:avLst/>
+          </a:prstGeom>
+          <a:noFill/>
+          <a:ln/>
+        </p:spPr>
+        <p:txBody>
+          <a:bodyPr wrap="none" lIns="0" tIns="0" rIns="0" bIns="0" rtlCol="0" anchor="t"/>
+          <a:lstStyle/>
+          <a:p>
+            <a:pPr algn="l" indent="0" marL="0">
+              <a:lnSpc>
+                <a:spcPct val="115000"/>
+              </a:lnSpc>
+              <a:buNone/>
+            </a:pPr>
+            <a:r>
+              <a:rPr lang="en-US" sz="1150" b="1" dirty="0">
+                <a:solidFill>
+                  <a:srgbClr val="1B2430"/>
+                </a:solidFill>
+                <a:latin typeface="Public Sans" pitchFamily="34" charset="0"/>
+                <a:ea typeface="Public Sans" pitchFamily="34" charset="-122"/>
+                <a:cs typeface="Public Sans" pitchFamily="34" charset="-120"/>
+              </a:rPr>
+              <a:t>FastAPI · JWT with a role claim · rate limits</a:t>
+            </a:r>
+            <a:endParaRPr lang="en-US" sz="1150" dirty="0"/>
+          </a:p>
+        </p:txBody>
+      </p:sp>
+      <p:sp>
+        <p:nvSpPr>
+          <p:cNvPr id="25" name="Text 23"/>
+          <p:cNvSpPr txBox="1"/>
+          <p:nvPr/>
+        </p:nvSpPr>
+        <p:spPr>
+          <a:xfrm>
+            <a:off x="1600200" y="3060700"/>
+            <a:ext cx="4673600" cy="342900"/>
+          </a:xfrm>
+          <a:prstGeom prst="rect">
+            <a:avLst/>
+          </a:prstGeom>
+          <a:noFill/>
+          <a:ln/>
+        </p:spPr>
+        <p:txBody>
+          <a:bodyPr wrap="square" lIns="0" tIns="0" rIns="0" bIns="0" rtlCol="0" anchor="t"/>
+          <a:lstStyle/>
+          <a:p>
+            <a:pPr algn="l" indent="0" marL="0">
+              <a:lnSpc>
+                <a:spcPct val="115000"/>
+              </a:lnSpc>
+              <a:buNone/>
+            </a:pPr>
+            <a:r>
+              <a:rPr lang="en-US" sz="1000" dirty="0">
+                <a:solidFill>
+                  <a:srgbClr val="465060"/>
+                </a:solidFill>
+                <a:latin typeface="Public Sans" pitchFamily="34" charset="0"/>
+                <a:ea typeface="Public Sans" pitchFamily="34" charset="-122"/>
+                <a:cs typeface="Public Sans" pitchFamily="34" charset="-120"/>
+              </a:rPr>
+              <a:t>Role guard per router, ownership as 404, one error envelope with a request id</a:t>
+            </a:r>
+            <a:endParaRPr lang="en-US" sz="1000" dirty="0"/>
+          </a:p>
+        </p:txBody>
+      </p:sp>
+      <p:sp>
+        <p:nvSpPr>
+          <p:cNvPr id="26" name="Shape 24"/>
+          <p:cNvSpPr/>
+          <p:nvPr/>
+        </p:nvSpPr>
+        <p:spPr>
+          <a:xfrm>
+            <a:off x="7048500" y="2794000"/>
+            <a:ext cx="3556000" cy="635000"/>
+          </a:xfrm>
+          <a:prstGeom prst="roundRect">
+            <a:avLst>
+              <a:gd name="adj" fmla="val 6000"/>
+            </a:avLst>
+          </a:prstGeom>
+          <a:solidFill>
+            <a:srgbClr val="FFFFFF"/>
+          </a:solidFill>
+          <a:ln w="9525">
+            <a:solidFill>
+              <a:srgbClr val="DDE1E7"/>
+            </a:solidFill>
+            <a:prstDash val="solid"/>
+          </a:ln>
+          <a:effectLst>
+            <a:outerShdw sx="100000" sy="100000" kx="0" ky="0" algn="bl" rotWithShape="0" blurRad="38100" dist="12700" dir="5400000">
+              <a:srgbClr val="101828">
+                <a:alpha val="8000"/>
+              </a:srgbClr>
+            </a:outerShdw>
+          </a:effectLst>
+        </p:spPr>
+      </p:sp>
+      <p:sp>
+        <p:nvSpPr>
+          <p:cNvPr id="27" name="Text 25"/>
+          <p:cNvSpPr txBox="1"/>
+          <p:nvPr/>
+        </p:nvSpPr>
+        <p:spPr>
+          <a:xfrm>
+            <a:off x="7188200" y="2882900"/>
+            <a:ext cx="3276600" cy="190500"/>
+          </a:xfrm>
+          <a:prstGeom prst="rect">
+            <a:avLst/>
+          </a:prstGeom>
+          <a:noFill/>
+          <a:ln/>
+        </p:spPr>
+        <p:txBody>
+          <a:bodyPr wrap="none" lIns="0" tIns="0" rIns="0" bIns="0" rtlCol="0" anchor="t"/>
+          <a:lstStyle/>
+          <a:p>
+            <a:pPr algn="l" indent="0" marL="0">
+              <a:lnSpc>
+                <a:spcPct val="115000"/>
+              </a:lnSpc>
+              <a:buNone/>
+            </a:pPr>
+            <a:r>
+              <a:rPr lang="en-US" sz="1150" b="1" dirty="0">
+                <a:solidFill>
+                  <a:srgbClr val="1B2430"/>
+                </a:solidFill>
+                <a:latin typeface="Public Sans" pitchFamily="34" charset="0"/>
+                <a:ea typeface="Public Sans" pitchFamily="34" charset="-122"/>
+                <a:cs typeface="Public Sans" pitchFamily="34" charset="-120"/>
+              </a:rPr>
+              <a:t>AI verification</a:t>
+            </a:r>
+            <a:endParaRPr lang="en-US" sz="1150" dirty="0"/>
+          </a:p>
+        </p:txBody>
+      </p:sp>
+      <p:sp>
+        <p:nvSpPr>
+          <p:cNvPr id="28" name="Text 26"/>
+          <p:cNvSpPr txBox="1"/>
+          <p:nvPr/>
+        </p:nvSpPr>
+        <p:spPr>
+          <a:xfrm>
+            <a:off x="7188200" y="3060700"/>
+            <a:ext cx="3276600" cy="342900"/>
+          </a:xfrm>
+          <a:prstGeom prst="rect">
+            <a:avLst/>
+          </a:prstGeom>
+          <a:noFill/>
+          <a:ln/>
+        </p:spPr>
+        <p:txBody>
+          <a:bodyPr wrap="square" lIns="0" tIns="0" rIns="0" bIns="0" rtlCol="0" anchor="t"/>
+          <a:lstStyle/>
+          <a:p>
+            <a:pPr algn="l" indent="0" marL="0">
+              <a:lnSpc>
+                <a:spcPct val="115000"/>
+              </a:lnSpc>
+              <a:buNone/>
+            </a:pPr>
+            <a:r>
+              <a:rPr lang="en-US" sz="1000" dirty="0">
+                <a:solidFill>
+                  <a:srgbClr val="465060"/>
+                </a:solidFill>
+                <a:latin typeface="Public Sans" pitchFamily="34" charset="0"/>
+                <a:ea typeface="Public Sans" pitchFamily="34" charset="-122"/>
+                <a:cs typeface="Public Sans" pitchFamily="34" charset="-120"/>
+              </a:rPr>
+              <a:t>In-process background task per upload; Re-run check recovers after a restart</a:t>
+            </a:r>
+            <a:endParaRPr lang="en-US" sz="1000" dirty="0"/>
+          </a:p>
+        </p:txBody>
+      </p:sp>
+      <p:sp>
+        <p:nvSpPr>
+          <p:cNvPr id="29" name="Shape 27"/>
+          <p:cNvSpPr/>
+          <p:nvPr/>
+        </p:nvSpPr>
+        <p:spPr>
+          <a:xfrm>
+            <a:off x="1460500" y="3683000"/>
+            <a:ext cx="4953000" cy="635000"/>
+          </a:xfrm>
+          <a:prstGeom prst="roundRect">
+            <a:avLst>
+              <a:gd name="adj" fmla="val 6000"/>
+            </a:avLst>
+          </a:prstGeom>
+          <a:solidFill>
+            <a:srgbClr val="FFFFFF"/>
+          </a:solidFill>
+          <a:ln w="9525">
+            <a:solidFill>
+              <a:srgbClr val="DDE1E7"/>
+            </a:solidFill>
+            <a:prstDash val="solid"/>
+          </a:ln>
+          <a:effectLst>
+            <a:outerShdw sx="100000" sy="100000" kx="0" ky="0" algn="bl" rotWithShape="0" blurRad="38100" dist="12700" dir="5400000">
+              <a:srgbClr val="101828">
+                <a:alpha val="8000"/>
+              </a:srgbClr>
+            </a:outerShdw>
+          </a:effectLst>
+        </p:spPr>
+      </p:sp>
+      <p:sp>
+        <p:nvSpPr>
+          <p:cNvPr id="30" name="Text 28"/>
+          <p:cNvSpPr txBox="1"/>
+          <p:nvPr/>
+        </p:nvSpPr>
+        <p:spPr>
+          <a:xfrm>
+            <a:off x="1600200" y="3771900"/>
+            <a:ext cx="4673600" cy="190500"/>
+          </a:xfrm>
+          <a:prstGeom prst="rect">
+            <a:avLst/>
+          </a:prstGeom>
+          <a:noFill/>
+          <a:ln/>
+        </p:spPr>
+        <p:txBody>
+          <a:bodyPr wrap="none" lIns="0" tIns="0" rIns="0" bIns="0" rtlCol="0" anchor="t"/>
+          <a:lstStyle/>
+          <a:p>
+            <a:pPr algn="l" indent="0" marL="0">
+              <a:lnSpc>
+                <a:spcPct val="115000"/>
+              </a:lnSpc>
+              <a:buNone/>
+            </a:pPr>
+            <a:r>
+              <a:rPr lang="en-US" sz="1150" b="1" dirty="0">
+                <a:solidFill>
+                  <a:srgbClr val="1B2430"/>
+                </a:solidFill>
+                <a:latin typeface="Public Sans" pitchFamily="34" charset="0"/>
+                <a:ea typeface="Public Sans" pitchFamily="34" charset="-122"/>
+                <a:cs typeface="Public Sans" pitchFamily="34" charset="-120"/>
+              </a:rPr>
+              <a:t>Application services · pure Python domain</a:t>
+            </a:r>
+            <a:endParaRPr lang="en-US" sz="1150" dirty="0"/>
+          </a:p>
+        </p:txBody>
+      </p:sp>
+      <p:sp>
+        <p:nvSpPr>
+          <p:cNvPr id="31" name="Text 29"/>
+          <p:cNvSpPr txBox="1"/>
+          <p:nvPr/>
+        </p:nvSpPr>
+        <p:spPr>
+          <a:xfrm>
+            <a:off x="1600200" y="3949700"/>
+            <a:ext cx="4673600" cy="342900"/>
+          </a:xfrm>
+          <a:prstGeom prst="rect">
+            <a:avLst/>
+          </a:prstGeom>
+          <a:noFill/>
+          <a:ln/>
+        </p:spPr>
+        <p:txBody>
+          <a:bodyPr wrap="square" lIns="0" tIns="0" rIns="0" bIns="0" rtlCol="0" anchor="t"/>
+          <a:lstStyle/>
+          <a:p>
+            <a:pPr algn="l" indent="0" marL="0">
+              <a:lnSpc>
+                <a:spcPct val="115000"/>
+              </a:lnSpc>
+              <a:buNone/>
+            </a:pPr>
+            <a:r>
+              <a:rPr lang="en-US" sz="1000" dirty="0">
+                <a:solidFill>
+                  <a:srgbClr val="465060"/>
+                </a:solidFill>
+                <a:latin typeface="Public Sans" pitchFamily="34" charset="0"/>
+                <a:ea typeface="Public Sans" pitchFamily="34" charset="-122"/>
+                <a:cs typeface="Public Sans" pitchFamily="34" charset="-120"/>
+              </a:rPr>
+              <a:t>Workflow table, verification rules, diff, upload rules; no FastAPI or SQLAlchemy import</a:t>
+            </a:r>
+            <a:endParaRPr lang="en-US" sz="1000" dirty="0"/>
+          </a:p>
+        </p:txBody>
+      </p:sp>
+      <p:sp>
+        <p:nvSpPr>
+          <p:cNvPr id="32" name="Shape 30"/>
+          <p:cNvSpPr/>
+          <p:nvPr/>
+        </p:nvSpPr>
+        <p:spPr>
+          <a:xfrm>
+            <a:off x="7048500" y="3683000"/>
+            <a:ext cx="3556000" cy="635000"/>
+          </a:xfrm>
+          <a:prstGeom prst="roundRect">
+            <a:avLst>
+              <a:gd name="adj" fmla="val 6000"/>
+            </a:avLst>
+          </a:prstGeom>
+          <a:solidFill>
+            <a:srgbClr val="FFFFFF"/>
+          </a:solidFill>
+          <a:ln w="9525">
+            <a:solidFill>
+              <a:srgbClr val="DDE1E7"/>
+            </a:solidFill>
+            <a:prstDash val="solid"/>
+          </a:ln>
+          <a:effectLst>
+            <a:outerShdw sx="100000" sy="100000" kx="0" ky="0" algn="bl" rotWithShape="0" blurRad="38100" dist="12700" dir="5400000">
+              <a:srgbClr val="101828">
+                <a:alpha val="8000"/>
+              </a:srgbClr>
+            </a:outerShdw>
+          </a:effectLst>
+        </p:spPr>
+      </p:sp>
+      <p:sp>
+        <p:nvSpPr>
+          <p:cNvPr id="33" name="Text 31"/>
+          <p:cNvSpPr txBox="1"/>
+          <p:nvPr/>
+        </p:nvSpPr>
+        <p:spPr>
+          <a:xfrm>
+            <a:off x="7188200" y="3771900"/>
+            <a:ext cx="3276600" cy="190500"/>
+          </a:xfrm>
+          <a:prstGeom prst="rect">
+            <a:avLst/>
+          </a:prstGeom>
+          <a:noFill/>
+          <a:ln/>
+        </p:spPr>
+        <p:txBody>
+          <a:bodyPr wrap="none" lIns="0" tIns="0" rIns="0" bIns="0" rtlCol="0" anchor="t"/>
+          <a:lstStyle/>
+          <a:p>
+            <a:pPr algn="l" indent="0" marL="0">
+              <a:lnSpc>
+                <a:spcPct val="115000"/>
+              </a:lnSpc>
+              <a:buNone/>
+            </a:pPr>
+            <a:r>
+              <a:rPr lang="en-US" sz="1150" b="1" dirty="0">
+                <a:solidFill>
+                  <a:srgbClr val="1B2430"/>
+                </a:solidFill>
+                <a:latin typeface="Public Sans" pitchFamily="34" charset="0"/>
+                <a:ea typeface="Public Sans" pitchFamily="34" charset="-122"/>
+                <a:cs typeface="Public Sans" pitchFamily="34" charset="-120"/>
+              </a:rPr>
+              <a:t>VerificationProvider</a:t>
+            </a:r>
+            <a:endParaRPr lang="en-US" sz="1150" dirty="0"/>
+          </a:p>
+        </p:txBody>
+      </p:sp>
+      <p:sp>
+        <p:nvSpPr>
+          <p:cNvPr id="34" name="Text 32"/>
+          <p:cNvSpPr txBox="1"/>
+          <p:nvPr/>
+        </p:nvSpPr>
+        <p:spPr>
+          <a:xfrm>
+            <a:off x="7188200" y="3949700"/>
+            <a:ext cx="3276600" cy="342900"/>
+          </a:xfrm>
+          <a:prstGeom prst="rect">
+            <a:avLst/>
+          </a:prstGeom>
+          <a:noFill/>
+          <a:ln/>
+        </p:spPr>
+        <p:txBody>
+          <a:bodyPr wrap="square" lIns="0" tIns="0" rIns="0" bIns="0" rtlCol="0" anchor="t"/>
+          <a:lstStyle/>
+          <a:p>
+            <a:pPr algn="l" indent="0" marL="0">
+              <a:lnSpc>
+                <a:spcPct val="115000"/>
+              </a:lnSpc>
+              <a:buNone/>
+            </a:pPr>
+            <a:r>
+              <a:rPr lang="en-US" sz="1000" dirty="0">
+                <a:solidFill>
+                  <a:srgbClr val="465060"/>
+                </a:solidFill>
+                <a:latin typeface="Public Sans" pitchFamily="34" charset="0"/>
+                <a:ea typeface="Public Sans" pitchFamily="34" charset="-122"/>
+                <a:cs typeface="Public Sans" pitchFamily="34" charset="-120"/>
+              </a:rPr>
+              <a:t>Structured output through two strict schemas, then deterministic post-rules</a:t>
+            </a:r>
+            <a:endParaRPr lang="en-US" sz="1000" dirty="0"/>
+          </a:p>
+        </p:txBody>
+      </p:sp>
+      <p:sp>
+        <p:nvSpPr>
+          <p:cNvPr id="35" name="Shape 33"/>
+          <p:cNvSpPr/>
+          <p:nvPr/>
+        </p:nvSpPr>
+        <p:spPr>
+          <a:xfrm>
+            <a:off x="1460500" y="4572000"/>
+            <a:ext cx="3048000" cy="635000"/>
+          </a:xfrm>
+          <a:prstGeom prst="roundRect">
+            <a:avLst>
+              <a:gd name="adj" fmla="val 6000"/>
+            </a:avLst>
+          </a:prstGeom>
+          <a:solidFill>
+            <a:srgbClr val="FFFFFF"/>
+          </a:solidFill>
+          <a:ln w="9525">
+            <a:solidFill>
+              <a:srgbClr val="DDE1E7"/>
+            </a:solidFill>
+            <a:prstDash val="solid"/>
+          </a:ln>
+          <a:effectLst>
+            <a:outerShdw sx="100000" sy="100000" kx="0" ky="0" algn="bl" rotWithShape="0" blurRad="38100" dist="12700" dir="5400000">
+              <a:srgbClr val="101828">
+                <a:alpha val="8000"/>
+              </a:srgbClr>
+            </a:outerShdw>
+          </a:effectLst>
+        </p:spPr>
+      </p:sp>
+      <p:sp>
+        <p:nvSpPr>
+          <p:cNvPr id="36" name="Text 34"/>
+          <p:cNvSpPr txBox="1"/>
+          <p:nvPr/>
+        </p:nvSpPr>
+        <p:spPr>
+          <a:xfrm>
+            <a:off x="1600200" y="4660900"/>
+            <a:ext cx="2768600" cy="190500"/>
+          </a:xfrm>
+          <a:prstGeom prst="rect">
+            <a:avLst/>
+          </a:prstGeom>
+          <a:noFill/>
+          <a:ln/>
+        </p:spPr>
+        <p:txBody>
+          <a:bodyPr wrap="none" lIns="0" tIns="0" rIns="0" bIns="0" rtlCol="0" anchor="t"/>
+          <a:lstStyle/>
+          <a:p>
+            <a:pPr algn="l" indent="0" marL="0">
+              <a:lnSpc>
+                <a:spcPct val="115000"/>
+              </a:lnSpc>
+              <a:buNone/>
+            </a:pPr>
+            <a:r>
+              <a:rPr lang="en-US" sz="1150" b="1" dirty="0">
+                <a:solidFill>
+                  <a:srgbClr val="1B2430"/>
+                </a:solidFill>
+                <a:latin typeface="Public Sans" pitchFamily="34" charset="0"/>
+                <a:ea typeface="Public Sans" pitchFamily="34" charset="-122"/>
+                <a:cs typeface="Public Sans" pitchFamily="34" charset="-120"/>
+              </a:rPr>
+              <a:t>Repositories · audit trail</a:t>
+            </a:r>
+            <a:endParaRPr lang="en-US" sz="1150" dirty="0"/>
+          </a:p>
+        </p:txBody>
+      </p:sp>
+      <p:sp>
+        <p:nvSpPr>
+          <p:cNvPr id="37" name="Text 35"/>
+          <p:cNvSpPr txBox="1"/>
+          <p:nvPr/>
+        </p:nvSpPr>
+        <p:spPr>
+          <a:xfrm>
+            <a:off x="1600200" y="4838700"/>
+            <a:ext cx="2768600" cy="342900"/>
+          </a:xfrm>
+          <a:prstGeom prst="rect">
+            <a:avLst/>
+          </a:prstGeom>
+          <a:noFill/>
+          <a:ln/>
+        </p:spPr>
+        <p:txBody>
+          <a:bodyPr wrap="square" lIns="0" tIns="0" rIns="0" bIns="0" rtlCol="0" anchor="t"/>
+          <a:lstStyle/>
+          <a:p>
+            <a:pPr algn="l" indent="0" marL="0">
+              <a:lnSpc>
+                <a:spcPct val="115000"/>
+              </a:lnSpc>
+              <a:buNone/>
+            </a:pPr>
+            <a:r>
+              <a:rPr lang="en-US" sz="1000" dirty="0">
+                <a:solidFill>
+                  <a:srgbClr val="465060"/>
+                </a:solidFill>
+                <a:latin typeface="Public Sans" pitchFamily="34" charset="0"/>
+                <a:ea typeface="Public Sans" pitchFamily="34" charset="-122"/>
+                <a:cs typeface="Public Sans" pitchFamily="34" charset="-120"/>
+              </a:rPr>
+              <a:t>Append-only audit rows in the same transaction</a:t>
+            </a:r>
+            <a:endParaRPr lang="en-US" sz="1000" dirty="0"/>
+          </a:p>
+        </p:txBody>
+      </p:sp>
+      <p:sp>
+        <p:nvSpPr>
+          <p:cNvPr id="38" name="Shape 36"/>
+          <p:cNvSpPr/>
+          <p:nvPr/>
+        </p:nvSpPr>
+        <p:spPr>
+          <a:xfrm>
+            <a:off x="4762500" y="4572000"/>
+            <a:ext cx="1651000" cy="635000"/>
+          </a:xfrm>
+          <a:prstGeom prst="roundRect">
+            <a:avLst>
+              <a:gd name="adj" fmla="val 6000"/>
+            </a:avLst>
+          </a:prstGeom>
+          <a:solidFill>
+            <a:srgbClr val="FFFFFF"/>
+          </a:solidFill>
+          <a:ln w="9525">
+            <a:solidFill>
+              <a:srgbClr val="DDE1E7"/>
+            </a:solidFill>
+            <a:prstDash val="solid"/>
+          </a:ln>
+          <a:effectLst>
+            <a:outerShdw sx="100000" sy="100000" kx="0" ky="0" algn="bl" rotWithShape="0" blurRad="38100" dist="12700" dir="5400000">
+              <a:srgbClr val="101828">
+                <a:alpha val="8000"/>
+              </a:srgbClr>
+            </a:outerShdw>
+          </a:effectLst>
+        </p:spPr>
+      </p:sp>
+      <p:sp>
+        <p:nvSpPr>
+          <p:cNvPr id="39" name="Text 37"/>
+          <p:cNvSpPr txBox="1"/>
+          <p:nvPr/>
+        </p:nvSpPr>
+        <p:spPr>
+          <a:xfrm>
+            <a:off x="4902200" y="4660900"/>
+            <a:ext cx="1371600" cy="190500"/>
+          </a:xfrm>
+          <a:prstGeom prst="rect">
+            <a:avLst/>
+          </a:prstGeom>
+          <a:noFill/>
+          <a:ln/>
+        </p:spPr>
+        <p:txBody>
+          <a:bodyPr wrap="none" lIns="0" tIns="0" rIns="0" bIns="0" rtlCol="0" anchor="t"/>
+          <a:lstStyle/>
+          <a:p>
+            <a:pPr algn="l" indent="0" marL="0">
+              <a:lnSpc>
+                <a:spcPct val="115000"/>
+              </a:lnSpc>
+              <a:buNone/>
+            </a:pPr>
+            <a:r>
+              <a:rPr lang="en-US" sz="1150" b="1" dirty="0">
+                <a:solidFill>
+                  <a:srgbClr val="1B2430"/>
+                </a:solidFill>
+                <a:latin typeface="Public Sans" pitchFamily="34" charset="0"/>
+                <a:ea typeface="Public Sans" pitchFamily="34" charset="-122"/>
+                <a:cs typeface="Public Sans" pitchFamily="34" charset="-120"/>
+              </a:rPr>
+              <a:t>FileStorage</a:t>
+            </a:r>
+            <a:endParaRPr lang="en-US" sz="1150" dirty="0"/>
+          </a:p>
+        </p:txBody>
+      </p:sp>
+      <p:sp>
+        <p:nvSpPr>
+          <p:cNvPr id="40" name="Text 38"/>
+          <p:cNvSpPr txBox="1"/>
+          <p:nvPr/>
+        </p:nvSpPr>
+        <p:spPr>
+          <a:xfrm>
+            <a:off x="4902200" y="4838700"/>
+            <a:ext cx="1371600" cy="342900"/>
+          </a:xfrm>
+          <a:prstGeom prst="rect">
+            <a:avLst/>
+          </a:prstGeom>
+          <a:noFill/>
+          <a:ln/>
+        </p:spPr>
+        <p:txBody>
+          <a:bodyPr wrap="square" lIns="0" tIns="0" rIns="0" bIns="0" rtlCol="0" anchor="t"/>
+          <a:lstStyle/>
+          <a:p>
+            <a:pPr algn="l" indent="0" marL="0">
+              <a:lnSpc>
+                <a:spcPct val="115000"/>
+              </a:lnSpc>
+              <a:buNone/>
+            </a:pPr>
+            <a:r>
+              <a:rPr lang="en-US" sz="1000" dirty="0">
+                <a:solidFill>
+                  <a:srgbClr val="465060"/>
+                </a:solidFill>
+                <a:latin typeface="Public Sans" pitchFamily="34" charset="0"/>
+                <a:ea typeface="Public Sans" pitchFamily="34" charset="-122"/>
+                <a:cs typeface="Public Sans" pitchFamily="34" charset="-120"/>
+              </a:rPr>
+              <a:t>Allowlist, 10 MB, magic bytes</a:t>
+            </a:r>
+            <a:endParaRPr lang="en-US" sz="1000" dirty="0"/>
+          </a:p>
+        </p:txBody>
+      </p:sp>
+      <p:sp>
+        <p:nvSpPr>
+          <p:cNvPr id="41" name="Shape 39"/>
+          <p:cNvSpPr/>
+          <p:nvPr/>
+        </p:nvSpPr>
+        <p:spPr>
+          <a:xfrm>
+            <a:off x="7048500" y="4572000"/>
+            <a:ext cx="3556000" cy="635000"/>
+          </a:xfrm>
+          <a:prstGeom prst="roundRect">
+            <a:avLst>
+              <a:gd name="adj" fmla="val 6000"/>
+            </a:avLst>
+          </a:prstGeom>
+          <a:solidFill>
+            <a:srgbClr val="F8F9FB"/>
+          </a:solidFill>
+          <a:ln w="9525">
+            <a:solidFill>
+              <a:srgbClr val="DDE1E7"/>
+            </a:solidFill>
+            <a:prstDash val="solid"/>
+          </a:ln>
+          <a:effectLst>
+            <a:outerShdw sx="100000" sy="100000" kx="0" ky="0" algn="bl" rotWithShape="0" blurRad="38100" dist="12700" dir="5400000">
+              <a:srgbClr val="101828">
+                <a:alpha val="8000"/>
+              </a:srgbClr>
+            </a:outerShdw>
+          </a:effectLst>
+        </p:spPr>
+      </p:sp>
+      <p:sp>
+        <p:nvSpPr>
+          <p:cNvPr id="42" name="Text 40"/>
+          <p:cNvSpPr txBox="1"/>
+          <p:nvPr/>
+        </p:nvSpPr>
+        <p:spPr>
+          <a:xfrm>
+            <a:off x="7188200" y="4660900"/>
+            <a:ext cx="3276600" cy="190500"/>
+          </a:xfrm>
+          <a:prstGeom prst="rect">
+            <a:avLst/>
+          </a:prstGeom>
+          <a:noFill/>
+          <a:ln/>
+        </p:spPr>
+        <p:txBody>
+          <a:bodyPr wrap="none" lIns="0" tIns="0" rIns="0" bIns="0" rtlCol="0" anchor="t"/>
+          <a:lstStyle/>
+          <a:p>
+            <a:pPr algn="l" indent="0" marL="0">
+              <a:lnSpc>
+                <a:spcPct val="115000"/>
+              </a:lnSpc>
+              <a:buNone/>
+            </a:pPr>
+            <a:r>
+              <a:rPr lang="en-US" sz="1150" b="1" dirty="0">
+                <a:solidFill>
+                  <a:srgbClr val="1B2430"/>
+                </a:solidFill>
+                <a:latin typeface="Public Sans" pitchFamily="34" charset="0"/>
+                <a:ea typeface="Public Sans" pitchFamily="34" charset="-122"/>
+                <a:cs typeface="Public Sans" pitchFamily="34" charset="-120"/>
+              </a:rPr>
+              <a:t>OpenAI (gpt-4.1-mini) or Mock</a:t>
+            </a:r>
+            <a:endParaRPr lang="en-US" sz="1150" dirty="0"/>
+          </a:p>
+        </p:txBody>
+      </p:sp>
+      <p:sp>
+        <p:nvSpPr>
+          <p:cNvPr id="43" name="Text 41"/>
+          <p:cNvSpPr txBox="1"/>
+          <p:nvPr/>
+        </p:nvSpPr>
+        <p:spPr>
+          <a:xfrm>
+            <a:off x="7188200" y="4838700"/>
+            <a:ext cx="3276600" cy="342900"/>
+          </a:xfrm>
+          <a:prstGeom prst="rect">
+            <a:avLst/>
+          </a:prstGeom>
+          <a:noFill/>
+          <a:ln/>
+        </p:spPr>
+        <p:txBody>
+          <a:bodyPr wrap="square" lIns="0" tIns="0" rIns="0" bIns="0" rtlCol="0" anchor="t"/>
+          <a:lstStyle/>
+          <a:p>
+            <a:pPr algn="l" indent="0" marL="0">
+              <a:lnSpc>
+                <a:spcPct val="115000"/>
+              </a:lnSpc>
+              <a:buNone/>
+            </a:pPr>
+            <a:r>
+              <a:rPr lang="en-US" sz="1000" dirty="0">
+                <a:solidFill>
+                  <a:srgbClr val="465060"/>
+                </a:solidFill>
+                <a:latin typeface="Public Sans" pitchFamily="34" charset="0"/>
+                <a:ea typeface="Public Sans" pitchFamily="34" charset="-122"/>
+                <a:cs typeface="Public Sans" pitchFamily="34" charset="-120"/>
+              </a:rPr>
+              <a:t>Mock by default, in tests and CI; with no key a check is stored unavailable, no model call</a:t>
+            </a:r>
+            <a:endParaRPr lang="en-US" sz="1000" dirty="0"/>
+          </a:p>
+        </p:txBody>
+      </p:sp>
+      <p:sp>
+        <p:nvSpPr>
+          <p:cNvPr id="44" name="Shape 42"/>
+          <p:cNvSpPr/>
+          <p:nvPr/>
+        </p:nvSpPr>
+        <p:spPr>
+          <a:xfrm>
+            <a:off x="1460500" y="5461000"/>
+            <a:ext cx="3048000" cy="635000"/>
+          </a:xfrm>
+          <a:prstGeom prst="roundRect">
+            <a:avLst>
+              <a:gd name="adj" fmla="val 6000"/>
+            </a:avLst>
+          </a:prstGeom>
+          <a:solidFill>
+            <a:srgbClr val="1B2430"/>
+          </a:solidFill>
+          <a:ln w="9525">
+            <a:solidFill>
+              <a:srgbClr val="1B2430"/>
+            </a:solidFill>
+            <a:prstDash val="solid"/>
+          </a:ln>
+        </p:spPr>
+      </p:sp>
+      <p:sp>
+        <p:nvSpPr>
+          <p:cNvPr id="45" name="Text 43"/>
+          <p:cNvSpPr txBox="1"/>
+          <p:nvPr/>
+        </p:nvSpPr>
+        <p:spPr>
+          <a:xfrm>
+            <a:off x="1600200" y="5549900"/>
+            <a:ext cx="2768600" cy="190500"/>
+          </a:xfrm>
+          <a:prstGeom prst="rect">
+            <a:avLst/>
+          </a:prstGeom>
+          <a:noFill/>
+          <a:ln/>
+        </p:spPr>
+        <p:txBody>
+          <a:bodyPr wrap="none" lIns="0" tIns="0" rIns="0" bIns="0" rtlCol="0" anchor="t"/>
+          <a:lstStyle/>
+          <a:p>
+            <a:pPr algn="l" indent="0" marL="0">
+              <a:lnSpc>
+                <a:spcPct val="115000"/>
+              </a:lnSpc>
+              <a:buNone/>
+            </a:pPr>
+            <a:r>
+              <a:rPr lang="en-US" sz="1150" b="1" dirty="0">
+                <a:solidFill>
+                  <a:srgbClr val="FFFFFF"/>
+                </a:solidFill>
+                <a:latin typeface="Public Sans" pitchFamily="34" charset="0"/>
+                <a:ea typeface="Public Sans" pitchFamily="34" charset="-122"/>
+                <a:cs typeface="Public Sans" pitchFamily="34" charset="-120"/>
+              </a:rPr>
+              <a:t>PostgreSQL 18</a:t>
+            </a:r>
+            <a:endParaRPr lang="en-US" sz="1150" dirty="0"/>
+          </a:p>
+        </p:txBody>
+      </p:sp>
+      <p:sp>
+        <p:nvSpPr>
+          <p:cNvPr id="46" name="Text 44"/>
+          <p:cNvSpPr txBox="1"/>
+          <p:nvPr/>
+        </p:nvSpPr>
+        <p:spPr>
+          <a:xfrm>
+            <a:off x="1600200" y="5727700"/>
+            <a:ext cx="2768600" cy="342900"/>
+          </a:xfrm>
+          <a:prstGeom prst="rect">
+            <a:avLst/>
+          </a:prstGeom>
+          <a:noFill/>
+          <a:ln/>
+        </p:spPr>
+        <p:txBody>
+          <a:bodyPr wrap="square" lIns="0" tIns="0" rIns="0" bIns="0" rtlCol="0" anchor="t"/>
+          <a:lstStyle/>
+          <a:p>
+            <a:pPr algn="l" indent="0" marL="0">
+              <a:lnSpc>
+                <a:spcPct val="115000"/>
+              </a:lnSpc>
+              <a:buNone/>
+            </a:pPr>
+            <a:r>
+              <a:rPr lang="en-US" sz="1000" dirty="0">
+                <a:solidFill>
+                  <a:srgbClr val="9AA3B0"/>
+                </a:solidFill>
+                <a:latin typeface="Public Sans" pitchFamily="34" charset="0"/>
+                <a:ea typeface="Public Sans" pitchFamily="34" charset="-122"/>
+                <a:cs typeface="Public Sans" pitchFamily="34" charset="-120"/>
+              </a:rPr>
+              <a:t>Row locks, UUIDs, revisions as JSONB snapshots; 18 on Railway, 16 locally and in CI</a:t>
+            </a:r>
+            <a:endParaRPr lang="en-US" sz="1000" dirty="0"/>
+          </a:p>
+        </p:txBody>
+      </p:sp>
+      <p:sp>
+        <p:nvSpPr>
+          <p:cNvPr id="47" name="Shape 45"/>
+          <p:cNvSpPr/>
+          <p:nvPr/>
+        </p:nvSpPr>
+        <p:spPr>
+          <a:xfrm>
+            <a:off x="4762500" y="5461000"/>
+            <a:ext cx="4064000" cy="635000"/>
+          </a:xfrm>
+          <a:prstGeom prst="roundRect">
+            <a:avLst>
+              <a:gd name="adj" fmla="val 6000"/>
+            </a:avLst>
+          </a:prstGeom>
+          <a:solidFill>
+            <a:srgbClr val="1B2430"/>
+          </a:solidFill>
+          <a:ln w="9525">
+            <a:solidFill>
+              <a:srgbClr val="1B2430"/>
+            </a:solidFill>
+            <a:prstDash val="solid"/>
+          </a:ln>
+        </p:spPr>
+      </p:sp>
+      <p:sp>
+        <p:nvSpPr>
+          <p:cNvPr id="48" name="Text 46"/>
+          <p:cNvSpPr txBox="1"/>
+          <p:nvPr/>
+        </p:nvSpPr>
+        <p:spPr>
+          <a:xfrm>
+            <a:off x="4902200" y="5549900"/>
+            <a:ext cx="3784600" cy="190500"/>
+          </a:xfrm>
+          <a:prstGeom prst="rect">
+            <a:avLst/>
+          </a:prstGeom>
+          <a:noFill/>
+          <a:ln/>
+        </p:spPr>
+        <p:txBody>
+          <a:bodyPr wrap="none" lIns="0" tIns="0" rIns="0" bIns="0" rtlCol="0" anchor="t"/>
+          <a:lstStyle/>
+          <a:p>
+            <a:pPr algn="l" indent="0" marL="0">
+              <a:lnSpc>
+                <a:spcPct val="115000"/>
+              </a:lnSpc>
+              <a:buNone/>
+            </a:pPr>
+            <a:r>
+              <a:rPr lang="en-US" sz="1150" b="1" dirty="0">
+                <a:solidFill>
+                  <a:srgbClr val="FFFFFF"/>
+                </a:solidFill>
+                <a:latin typeface="Public Sans" pitchFamily="34" charset="0"/>
+                <a:ea typeface="Public Sans" pitchFamily="34" charset="-122"/>
+                <a:cs typeface="Public Sans" pitchFamily="34" charset="-120"/>
+              </a:rPr>
+              <a:t>Railway · two environments</a:t>
+            </a:r>
+            <a:endParaRPr lang="en-US" sz="1150" dirty="0"/>
+          </a:p>
+        </p:txBody>
+      </p:sp>
+      <p:sp>
+        <p:nvSpPr>
+          <p:cNvPr id="49" name="Text 47"/>
+          <p:cNvSpPr txBox="1"/>
+          <p:nvPr/>
+        </p:nvSpPr>
+        <p:spPr>
+          <a:xfrm>
+            <a:off x="4902200" y="5727700"/>
+            <a:ext cx="3784600" cy="342900"/>
+          </a:xfrm>
+          <a:prstGeom prst="rect">
+            <a:avLst/>
+          </a:prstGeom>
+          <a:noFill/>
+          <a:ln/>
+        </p:spPr>
+        <p:txBody>
+          <a:bodyPr wrap="square" lIns="0" tIns="0" rIns="0" bIns="0" rtlCol="0" anchor="t"/>
+          <a:lstStyle/>
+          <a:p>
+            <a:pPr algn="l" indent="0" marL="0">
+              <a:lnSpc>
+                <a:spcPct val="115000"/>
+              </a:lnSpc>
+              <a:buNone/>
+            </a:pPr>
+            <a:r>
+              <a:rPr lang="en-US" sz="1000" dirty="0">
+                <a:solidFill>
+                  <a:srgbClr val="9AA3B0"/>
+                </a:solidFill>
+                <a:latin typeface="Public Sans" pitchFamily="34" charset="0"/>
+                <a:ea typeface="Public Sans" pitchFamily="34" charset="-122"/>
+                <a:cs typeface="Public Sans" pitchFamily="34" charset="-120"/>
+              </a:rPr>
+              <a:t>Images built once in CI; dev on push, production run by hand from main and paused for an approval; health gate</a:t>
+            </a:r>
+            <a:endParaRPr lang="en-US" sz="1000" dirty="0"/>
+          </a:p>
+        </p:txBody>
+      </p:sp>
+      <p:sp>
+        <p:nvSpPr>
+          <p:cNvPr id="50" name="Shape 48"/>
+          <p:cNvSpPr/>
+          <p:nvPr/>
+        </p:nvSpPr>
+        <p:spPr>
+          <a:xfrm>
+            <a:off x="9080500" y="5461000"/>
+            <a:ext cx="1524000" cy="635000"/>
+          </a:xfrm>
+          <a:prstGeom prst="roundRect">
+            <a:avLst>
+              <a:gd name="adj" fmla="val 6000"/>
+            </a:avLst>
+          </a:prstGeom>
+          <a:solidFill>
+            <a:srgbClr val="1B2430"/>
+          </a:solidFill>
+          <a:ln w="9525">
+            <a:solidFill>
+              <a:srgbClr val="1B2430"/>
+            </a:solidFill>
+            <a:prstDash val="solid"/>
+          </a:ln>
+        </p:spPr>
+      </p:sp>
+      <p:sp>
+        <p:nvSpPr>
+          <p:cNvPr id="51" name="Text 49"/>
+          <p:cNvSpPr txBox="1"/>
+          <p:nvPr/>
+        </p:nvSpPr>
+        <p:spPr>
+          <a:xfrm>
+            <a:off x="9220200" y="5549900"/>
+            <a:ext cx="1244600" cy="190500"/>
+          </a:xfrm>
+          <a:prstGeom prst="rect">
+            <a:avLst/>
+          </a:prstGeom>
+          <a:noFill/>
+          <a:ln/>
+        </p:spPr>
+        <p:txBody>
+          <a:bodyPr wrap="none" lIns="0" tIns="0" rIns="0" bIns="0" rtlCol="0" anchor="t"/>
+          <a:lstStyle/>
+          <a:p>
+            <a:pPr algn="l" indent="0" marL="0">
+              <a:lnSpc>
+                <a:spcPct val="115000"/>
+              </a:lnSpc>
+              <a:buNone/>
+            </a:pPr>
+            <a:r>
+              <a:rPr lang="en-US" sz="1150" b="1" dirty="0">
+                <a:solidFill>
+                  <a:srgbClr val="FFFFFF"/>
+                </a:solidFill>
+                <a:latin typeface="Public Sans" pitchFamily="34" charset="0"/>
+                <a:ea typeface="Public Sans" pitchFamily="34" charset="-122"/>
+                <a:cs typeface="Public Sans" pitchFamily="34" charset="-120"/>
+              </a:rPr>
+              <a:t>LangSmith · Prometheus · Grafana</a:t>
+            </a:r>
+            <a:endParaRPr lang="en-US" sz="1150" dirty="0"/>
+          </a:p>
+        </p:txBody>
+      </p:sp>
+      <p:sp>
+        <p:nvSpPr>
+          <p:cNvPr id="52" name="Text 50"/>
+          <p:cNvSpPr txBox="1"/>
+          <p:nvPr/>
+        </p:nvSpPr>
+        <p:spPr>
+          <a:xfrm>
+            <a:off x="9220200" y="5727700"/>
+            <a:ext cx="1244600" cy="342900"/>
+          </a:xfrm>
+          <a:prstGeom prst="rect">
+            <a:avLst/>
+          </a:prstGeom>
+          <a:noFill/>
+          <a:ln/>
+        </p:spPr>
+        <p:txBody>
+          <a:bodyPr wrap="square" lIns="0" tIns="0" rIns="0" bIns="0" rtlCol="0" anchor="t"/>
+          <a:lstStyle/>
+          <a:p>
+            <a:pPr algn="l" indent="0" marL="0">
+              <a:lnSpc>
+                <a:spcPct val="115000"/>
+              </a:lnSpc>
+              <a:buNone/>
+            </a:pPr>
+            <a:r>
+              <a:rPr lang="en-US" sz="1000" dirty="0">
+                <a:solidFill>
+                  <a:srgbClr val="9AA3B0"/>
+                </a:solidFill>
+                <a:latin typeface="Public Sans" pitchFamily="34" charset="0"/>
+                <a:ea typeface="Public Sans" pitchFamily="34" charset="-122"/>
+                <a:cs typeface="Public Sans" pitchFamily="34" charset="-120"/>
+              </a:rPr>
+              <a:t>AI traces with inputs hidden; metrics behind a token, one dashboard, six alert rules</a:t>
+            </a:r>
+            <a:endParaRPr lang="en-US" sz="1000" dirty="0"/>
+          </a:p>
+        </p:txBody>
+      </p:sp>
+      <p:sp>
+        <p:nvSpPr>
+          <p:cNvPr id="53" name="Text 51"/>
+          <p:cNvSpPr txBox="1"/>
+          <p:nvPr/>
+        </p:nvSpPr>
+        <p:spPr>
+          <a:xfrm>
+            <a:off x="762000" y="6299200"/>
+            <a:ext cx="7620000" cy="381000"/>
+          </a:xfrm>
+          <a:prstGeom prst="rect">
+            <a:avLst/>
+          </a:prstGeom>
+          <a:noFill/>
+          <a:ln/>
+        </p:spPr>
+        <p:txBody>
+          <a:bodyPr wrap="square" lIns="0" tIns="0" rIns="0" bIns="0" rtlCol="0" anchor="t"/>
+          <a:lstStyle/>
+          <a:p>
+            <a:pPr algn="l" indent="0" marL="0">
+              <a:lnSpc>
+                <a:spcPct val="130000"/>
+              </a:lnSpc>
+              <a:buNone/>
+            </a:pPr>
+            <a:endParaRPr lang="en-US" sz="1000" dirty="0"/>
+          </a:p>
+        </p:txBody>
+      </p:sp>
+      <p:sp>
+        <p:nvSpPr>
+          <p:cNvPr id="54" name="Text 52"/>
+          <p:cNvSpPr txBox="1"/>
+          <p:nvPr/>
+        </p:nvSpPr>
+        <p:spPr>
+          <a:xfrm>
+            <a:off x="10160000" y="571500"/>
+            <a:ext cx="1270000" cy="190500"/>
+          </a:xfrm>
+          <a:prstGeom prst="rect">
+            <a:avLst/>
+          </a:prstGeom>
+          <a:noFill/>
+          <a:ln/>
+        </p:spPr>
+        <p:txBody>
+          <a:bodyPr wrap="square" lIns="0" tIns="0" rIns="0" bIns="0" rtlCol="0" anchor="t"/>
+          <a:lstStyle/>
+          <a:p>
+            <a:pPr algn="r" indent="0" marL="0">
+              <a:lnSpc>
+                <a:spcPct val="115000"/>
+              </a:lnSpc>
+              <a:buNone/>
+            </a:pPr>
+            <a:r>
+              <a:rPr lang="en-US" sz="1000" dirty="0">
+                <a:solidFill>
+                  <a:srgbClr val="616C7A"/>
+                </a:solidFill>
+                <a:latin typeface="IBM Plex Mono" pitchFamily="34" charset="0"/>
+                <a:ea typeface="IBM Plex Mono" pitchFamily="34" charset="-122"/>
+                <a:cs typeface="IBM Plex Mono" pitchFamily="34" charset="-120"/>
+              </a:rPr>
+              <a:t>11 / 15</a:t>
+            </a:r>
+            <a:endParaRPr lang="en-US" sz="1000" dirty="0"/>
+          </a:p>
+        </p:txBody>
+      </p:sp>
+    </p:spTree>
+  </p:cSld>
+  <p:clrMapOvr>
+    <a:masterClrMapping/>
+  </p:clrMapOvr>
+  <p:transition spd="fast">
+    <p:fade/>
+  </p:transition>
+</p:sld>
+</file>
+
+<file path=ppt/slides/slide12.xml><?xml version="1.0" encoding="utf-8"?>
+<p:sld xmlns:a="http://schemas.openxmlformats.org/drawingml/2006/main" xmlns:r="http://schemas.openxmlformats.org/officeDocument/2006/relationships" xmlns:p="http://schemas.openxmlformats.org/presentationml/2006/main">
+  <p:cSld name="Slide 12">
+    <p:bg>
+      <p:bgPr>
+        <a:solidFill>
+          <a:srgbClr val="F4F5F7"/>
+        </a:solidFill>
+      </p:bgPr>
+    </p:bg>
+    <p:spTree>
+      <p:nvGrpSpPr>
+        <p:cNvPr id="1" name=""/>
+        <p:cNvGrpSpPr/>
+        <p:nvPr/>
+      </p:nvGrpSpPr>
+      <p:grpSpPr>
+        <a:xfrm>
+          <a:off x="0" y="0"/>
+          <a:ext cx="0" cy="0"/>
+          <a:chOff x="0" y="0"/>
+          <a:chExt cx="0" cy="0"/>
+        </a:xfrm>
+      </p:grpSpPr>
+      <p:sp>
+        <p:nvSpPr>
+          <p:cNvPr id="2" name="Text 0"/>
+          <p:cNvSpPr txBox="1"/>
+          <p:nvPr/>
+        </p:nvSpPr>
+        <p:spPr>
+          <a:xfrm>
+            <a:off x="762000" y="558800"/>
+            <a:ext cx="8890000" cy="190500"/>
+          </a:xfrm>
+          <a:prstGeom prst="rect">
+            <a:avLst/>
+          </a:prstGeom>
+          <a:noFill/>
+          <a:ln/>
+        </p:spPr>
+        <p:txBody>
+          <a:bodyPr wrap="square" lIns="0" tIns="0" rIns="0" bIns="0" rtlCol="0" anchor="t"/>
+          <a:lstStyle/>
+          <a:p>
+            <a:pPr algn="l" indent="0" marL="0">
+              <a:lnSpc>
+                <a:spcPct val="115000"/>
+              </a:lnSpc>
+              <a:buNone/>
+            </a:pPr>
+            <a:r>
+              <a:rPr lang="en-US" sz="1100" b="1" spc="90" kern="0" dirty="0">
+                <a:solidFill>
+                  <a:srgbClr val="616C7A"/>
+                </a:solidFill>
+                <a:latin typeface="Public Sans" pitchFamily="34" charset="0"/>
+                <a:ea typeface="Public Sans" pitchFamily="34" charset="-122"/>
+                <a:cs typeface="Public Sans" pitchFamily="34" charset="-120"/>
+              </a:rPr>
+              <a:t>BUILT TO BE WATCHED</a:t>
+            </a:r>
+            <a:endParaRPr lang="en-US" sz="1100" dirty="0"/>
+          </a:p>
+        </p:txBody>
+      </p:sp>
+      <p:sp>
+        <p:nvSpPr>
+          <p:cNvPr id="3" name="Text 1"/>
+          <p:cNvSpPr txBox="1"/>
+          <p:nvPr/>
+        </p:nvSpPr>
+        <p:spPr>
+          <a:xfrm>
+            <a:off x="762000" y="863600"/>
+            <a:ext cx="10668000" cy="825500"/>
+          </a:xfrm>
+          <a:prstGeom prst="rect">
+            <a:avLst/>
+          </a:prstGeom>
+          <a:noFill/>
+          <a:ln/>
+        </p:spPr>
+        <p:txBody>
+          <a:bodyPr wrap="square" lIns="0" tIns="0" rIns="0" bIns="0" rtlCol="0" anchor="t"/>
+          <a:lstStyle/>
+          <a:p>
+            <a:pPr algn="l" indent="0" marL="0">
+              <a:lnSpc>
+                <a:spcPct val="108000"/>
+              </a:lnSpc>
+              <a:buNone/>
+            </a:pPr>
+            <a:r>
+              <a:rPr lang="en-US" sz="2000" dirty="0">
+                <a:solidFill>
+                  <a:srgbClr val="1B2430"/>
+                </a:solidFill>
+                <a:latin typeface="Instrument Serif" pitchFamily="34" charset="0"/>
+                <a:ea typeface="Instrument Serif" pitchFamily="34" charset="-122"/>
+                <a:cs typeface="Instrument Serif" pitchFamily="34" charset="-120"/>
+              </a:rPr>
+              <a:t>One dashboard answers whether the API is healthy, whether the document checks are healthy and what they cost, and whether the queue is moving.</a:t>
+            </a:r>
+            <a:endParaRPr lang="en-US" sz="2000" dirty="0"/>
+          </a:p>
+        </p:txBody>
+      </p:sp>
+      <p:sp>
+        <p:nvSpPr>
+          <p:cNvPr id="4" name="Shape 2"/>
+          <p:cNvSpPr/>
+          <p:nvPr/>
+        </p:nvSpPr>
+        <p:spPr>
+          <a:xfrm>
+            <a:off x="2343150" y="1835150"/>
+            <a:ext cx="7505700" cy="4229100"/>
+          </a:xfrm>
+          <a:prstGeom prst="roundRect">
+            <a:avLst>
+              <a:gd name="adj" fmla="val 901"/>
+            </a:avLst>
+          </a:prstGeom>
+          <a:solidFill>
+            <a:srgbClr val="FFFFFF"/>
+          </a:solidFill>
+          <a:ln w="9525">
+            <a:solidFill>
+              <a:srgbClr val="DDE1E7"/>
+            </a:solidFill>
+            <a:prstDash val="solid"/>
+          </a:ln>
+          <a:effectLst>
+            <a:outerShdw sx="100000" sy="100000" kx="0" ky="0" algn="bl" rotWithShape="0" blurRad="38100" dist="12700" dir="5400000">
+              <a:srgbClr val="101828">
+                <a:alpha val="8000"/>
+              </a:srgbClr>
+            </a:outerShdw>
+          </a:effectLst>
+        </p:spPr>
+      </p:sp>
+      <p:pic>
+        <p:nvPicPr>
+          <p:cNvPr id="5" name="Image 0" descr="/Users/suhaasnv/Documents/Desktop ALT/portfolioprojects/permitflow/docs/13-observability/grafana-dashboard.png">    </p:cNvPr>
+          <p:cNvPicPr>
+            <a:picLocks noChangeAspect="1"/>
+          </p:cNvPicPr>
+          <p:nvPr/>
+        </p:nvPicPr>
+        <p:blipFill>
+          <a:blip r:embed="rId1"/>
+          <a:stretch>
+            <a:fillRect/>
+          </a:stretch>
+        </p:blipFill>
+        <p:spPr>
+          <a:xfrm>
+            <a:off x="2349500" y="1841500"/>
+            <a:ext cx="7493000" cy="4216400"/>
+          </a:xfrm>
+          <a:prstGeom prst="rect">
+            <a:avLst/>
+          </a:prstGeom>
+        </p:spPr>
+      </p:pic>
+      <p:sp>
+        <p:nvSpPr>
+          <p:cNvPr id="6" name="Text 3"/>
+          <p:cNvSpPr txBox="1"/>
+          <p:nvPr/>
+        </p:nvSpPr>
+        <p:spPr>
+          <a:xfrm>
+            <a:off x="2349500" y="6146800"/>
+            <a:ext cx="7493000" cy="381000"/>
+          </a:xfrm>
+          <a:prstGeom prst="rect">
+            <a:avLst/>
+          </a:prstGeom>
+          <a:noFill/>
+          <a:ln/>
+        </p:spPr>
+        <p:txBody>
+          <a:bodyPr wrap="square" lIns="0" tIns="0" rIns="0" bIns="0" rtlCol="0" anchor="t"/>
+          <a:lstStyle/>
+          <a:p>
+            <a:pPr algn="l" indent="0" marL="0">
+              <a:lnSpc>
+                <a:spcPct val="125000"/>
+              </a:lnSpc>
+              <a:buNone/>
+            </a:pPr>
+            <a:r>
+              <a:rPr lang="en-US" sz="950" dirty="0">
+                <a:solidFill>
+                  <a:srgbClr val="465060"/>
+                </a:solidFill>
+                <a:latin typeface="Public Sans" pitchFamily="34" charset="0"/>
+                <a:ea typeface="Public Sans" pitchFamily="34" charset="-122"/>
+                <a:cs typeface="Public Sans" pitchFamily="34" charset="-120"/>
+              </a:rPr>
+              <a:t>Grafana on grafana.dev.permitflow.space, fed by Prometheus scraping the API's token-protected metrics every 15 seconds; six alert rules on the service objective and an hourly digest reach Telegram, where a bot also answers /status; the dashboard is a generated file in the repository.</a:t>
+            </a:r>
+            <a:endParaRPr lang="en-US" sz="950" dirty="0"/>
+          </a:p>
+        </p:txBody>
+      </p:sp>
+      <p:sp>
+        <p:nvSpPr>
+          <p:cNvPr id="7" name="Text 4"/>
+          <p:cNvSpPr txBox="1"/>
+          <p:nvPr/>
+        </p:nvSpPr>
+        <p:spPr>
+          <a:xfrm>
+            <a:off x="10160000" y="571500"/>
+            <a:ext cx="1270000" cy="190500"/>
+          </a:xfrm>
+          <a:prstGeom prst="rect">
+            <a:avLst/>
+          </a:prstGeom>
+          <a:noFill/>
+          <a:ln/>
+        </p:spPr>
+        <p:txBody>
+          <a:bodyPr wrap="square" lIns="0" tIns="0" rIns="0" bIns="0" rtlCol="0" anchor="t"/>
+          <a:lstStyle/>
+          <a:p>
+            <a:pPr algn="r" indent="0" marL="0">
+              <a:lnSpc>
+                <a:spcPct val="115000"/>
+              </a:lnSpc>
+              <a:buNone/>
+            </a:pPr>
+            <a:r>
+              <a:rPr lang="en-US" sz="1000" dirty="0">
+                <a:solidFill>
+                  <a:srgbClr val="616C7A"/>
+                </a:solidFill>
+                <a:latin typeface="IBM Plex Mono" pitchFamily="34" charset="0"/>
+                <a:ea typeface="IBM Plex Mono" pitchFamily="34" charset="-122"/>
+                <a:cs typeface="IBM Plex Mono" pitchFamily="34" charset="-120"/>
+              </a:rPr>
+              <a:t>12 / 15</a:t>
+            </a:r>
+            <a:endParaRPr lang="en-US" sz="1000" dirty="0"/>
+          </a:p>
+        </p:txBody>
+      </p:sp>
+    </p:spTree>
+  </p:cSld>
+  <p:clrMapOvr>
+    <a:masterClrMapping/>
+  </p:clrMapOvr>
+  <p:transition spd="fast">
+    <p:fade/>
+  </p:transition>
+</p:sld>
+</file>
+
+<file path=ppt/slides/slide13.xml><?xml version="1.0" encoding="utf-8"?>
+<p:sld xmlns:a="http://schemas.openxmlformats.org/drawingml/2006/main" xmlns:r="http://schemas.openxmlformats.org/officeDocument/2006/relationships" xmlns:p="http://schemas.openxmlformats.org/presentationml/2006/main">
+  <p:cSld name="Slide 13">
+    <p:bg>
+      <p:bgPr>
+        <a:solidFill>
+          <a:srgbClr val="F4F5F7"/>
+        </a:solidFill>
+      </p:bgPr>
+    </p:bg>
+    <p:spTree>
+      <p:nvGrpSpPr>
+        <p:cNvPr id="1" name=""/>
+        <p:cNvGrpSpPr/>
+        <p:nvPr/>
+      </p:nvGrpSpPr>
+      <p:grpSpPr>
+        <a:xfrm>
+          <a:off x="0" y="0"/>
+          <a:ext cx="0" cy="0"/>
+          <a:chOff x="0" y="0"/>
+          <a:chExt cx="0" cy="0"/>
+        </a:xfrm>
+      </p:grpSpPr>
+      <p:sp>
+        <p:nvSpPr>
+          <p:cNvPr id="2" name="Text 0"/>
+          <p:cNvSpPr txBox="1"/>
+          <p:nvPr/>
+        </p:nvSpPr>
+        <p:spPr>
+          <a:xfrm>
+            <a:off x="762000" y="558800"/>
+            <a:ext cx="8890000" cy="190500"/>
+          </a:xfrm>
+          <a:prstGeom prst="rect">
+            <a:avLst/>
+          </a:prstGeom>
+          <a:noFill/>
+          <a:ln/>
+        </p:spPr>
+        <p:txBody>
+          <a:bodyPr wrap="square" lIns="0" tIns="0" rIns="0" bIns="0" rtlCol="0" anchor="t"/>
+          <a:lstStyle/>
+          <a:p>
+            <a:pPr algn="l" indent="0" marL="0">
+              <a:lnSpc>
+                <a:spcPct val="115000"/>
+              </a:lnSpc>
+              <a:buNone/>
+            </a:pPr>
+            <a:r>
+              <a:rPr lang="en-US" sz="1100" b="1" spc="90" kern="0" dirty="0">
+                <a:solidFill>
+                  <a:srgbClr val="616C7A"/>
+                </a:solidFill>
+                <a:latin typeface="Public Sans" pitchFamily="34" charset="0"/>
+                <a:ea typeface="Public Sans" pitchFamily="34" charset="-122"/>
+                <a:cs typeface="Public Sans" pitchFamily="34" charset="-120"/>
+              </a:rPr>
               <a:t>ENGINEERING QUALITY</a:t>
             </a:r>
             <a:endParaRPr lang="en-US" sz="1100" dirty="0"/>
@@ -3969,7 +7515,7 @@
                 <a:ea typeface="IBM Plex Mono" pitchFamily="34" charset="-122"/>
                 <a:cs typeface="IBM Plex Mono" pitchFamily="34" charset="-120"/>
               </a:rPr>
-              <a:t>11 / 13</a:t>
+              <a:t>13 / 15</a:t>
             </a:r>
             <a:endParaRPr lang="en-US" sz="1000" dirty="0"/>
           </a:p>
@@ -5152,9 +8698,9 @@
 </p:sld>
 </file>
 
-<file path=ppt/slides/slide12.xml><?xml version="1.0" encoding="utf-8"?>
+<file path=ppt/slides/slide14.xml><?xml version="1.0" encoding="utf-8"?>
 <p:sld xmlns:a="http://schemas.openxmlformats.org/drawingml/2006/main" xmlns:r="http://schemas.openxmlformats.org/officeDocument/2006/relationships" xmlns:p="http://schemas.openxmlformats.org/presentationml/2006/main">
-  <p:cSld name="Slide 12">
+  <p:cSld name="Slide 14">
     <p:bg>
       <p:bgPr>
         <a:solidFill>
@@ -6668,7 +10214,7 @@
                 <a:ea typeface="IBM Plex Mono" pitchFamily="34" charset="-122"/>
                 <a:cs typeface="IBM Plex Mono" pitchFamily="34" charset="-120"/>
               </a:rPr>
-              <a:t>12 / 13</a:t>
+              <a:t>14 / 15</a:t>
             </a:r>
             <a:endParaRPr lang="en-US" sz="1000" dirty="0"/>
           </a:p>
@@ -6685,9 +10231,9 @@
 </p:sld>
 </file>
 
-<file path=ppt/slides/slide13.xml><?xml version="1.0" encoding="utf-8"?>
+<file path=ppt/slides/slide15.xml><?xml version="1.0" encoding="utf-8"?>
 <p:sld xmlns:a="http://schemas.openxmlformats.org/drawingml/2006/main" xmlns:r="http://schemas.openxmlformats.org/officeDocument/2006/relationships" xmlns:p="http://schemas.openxmlformats.org/presentationml/2006/main">
-  <p:cSld name="Slide 13">
+  <p:cSld name="Slide 15">
     <p:bg>
       <p:bgPr>
         <a:solidFill>
@@ -9098,7 +12644,7 @@
                 <a:ea typeface="IBM Plex Mono" pitchFamily="34" charset="-122"/>
                 <a:cs typeface="IBM Plex Mono" pitchFamily="34" charset="-120"/>
               </a:rPr>
-              <a:t>02 / 13</a:t>
+              <a:t>02 / 15</a:t>
             </a:r>
             <a:endParaRPr lang="en-US" sz="1000" dirty="0"/>
           </a:p>
@@ -9657,6 +13203,191 @@
                 <a:ea typeface="Public Sans" pitchFamily="34" charset="-122"/>
                 <a:cs typeface="Public Sans" pitchFamily="34" charset="-120"/>
               </a:rPr>
+              <a:t>THE PROBLEM · BEFORE</a:t>
+            </a:r>
+            <a:endParaRPr lang="en-US" sz="1100" dirty="0"/>
+          </a:p>
+        </p:txBody>
+      </p:sp>
+      <p:sp>
+        <p:nvSpPr>
+          <p:cNvPr id="3" name="Text 1"/>
+          <p:cNvSpPr txBox="1"/>
+          <p:nvPr/>
+        </p:nvSpPr>
+        <p:spPr>
+          <a:xfrm>
+            <a:off x="762000" y="863600"/>
+            <a:ext cx="10668000" cy="381000"/>
+          </a:xfrm>
+          <a:prstGeom prst="rect">
+            <a:avLst/>
+          </a:prstGeom>
+          <a:noFill/>
+          <a:ln/>
+        </p:spPr>
+        <p:txBody>
+          <a:bodyPr wrap="square" lIns="0" tIns="0" rIns="0" bIns="0" rtlCol="0" anchor="t"/>
+          <a:lstStyle/>
+          <a:p>
+            <a:pPr algn="l" indent="0" marL="0">
+              <a:lnSpc>
+                <a:spcPct val="108000"/>
+              </a:lnSpc>
+              <a:buNone/>
+            </a:pPr>
+            <a:r>
+              <a:rPr lang="en-US" sz="2000" dirty="0">
+                <a:solidFill>
+                  <a:srgbClr val="1B2430"/>
+                </a:solidFill>
+                <a:latin typeface="Instrument Serif" pitchFamily="34" charset="0"/>
+                <a:ea typeface="Instrument Serif" pitchFamily="34" charset="-122"/>
+                <a:cs typeface="Instrument Serif" pitchFamily="34" charset="-120"/>
+              </a:rPr>
+              <a:t>Before: a pile, a letter with no reason, the whole thing again, and an officer comparing by hand.</a:t>
+            </a:r>
+            <a:endParaRPr lang="en-US" sz="2000" dirty="0"/>
+          </a:p>
+        </p:txBody>
+      </p:sp>
+      <p:pic>
+        <p:nvPicPr>
+          <p:cNvPr id="4" name="Image 0" descr="/Users/suhaasnv/Documents/Desktop ALT/portfolioprojects/permitflow/notes/pitch/pitch-deck/pptx/build/comic-before.png">    </p:cNvPr>
+          <p:cNvPicPr>
+            <a:picLocks noChangeAspect="1"/>
+          </p:cNvPicPr>
+          <p:nvPr/>
+        </p:nvPicPr>
+        <p:blipFill>
+          <a:blip r:embed="rId1"/>
+          <a:stretch>
+            <a:fillRect/>
+          </a:stretch>
+        </p:blipFill>
+        <p:spPr>
+          <a:xfrm>
+            <a:off x="1190625" y="1270000"/>
+            <a:ext cx="9810750" cy="5334000"/>
+          </a:xfrm>
+          <a:prstGeom prst="rect">
+            <a:avLst/>
+          </a:prstGeom>
+        </p:spPr>
+      </p:pic>
+      <p:sp>
+        <p:nvSpPr>
+          <p:cNvPr id="5" name="Text 2"/>
+          <p:cNvSpPr txBox="1"/>
+          <p:nvPr/>
+        </p:nvSpPr>
+        <p:spPr>
+          <a:xfrm>
+            <a:off x="10160000" y="571500"/>
+            <a:ext cx="1270000" cy="190500"/>
+          </a:xfrm>
+          <a:prstGeom prst="rect">
+            <a:avLst/>
+          </a:prstGeom>
+          <a:noFill/>
+          <a:ln/>
+        </p:spPr>
+        <p:txBody>
+          <a:bodyPr wrap="square" lIns="0" tIns="0" rIns="0" bIns="0" rtlCol="0" anchor="t"/>
+          <a:lstStyle/>
+          <a:p>
+            <a:pPr algn="r" indent="0" marL="0">
+              <a:lnSpc>
+                <a:spcPct val="115000"/>
+              </a:lnSpc>
+              <a:buNone/>
+            </a:pPr>
+            <a:r>
+              <a:rPr lang="en-US" sz="1000" dirty="0">
+                <a:solidFill>
+                  <a:srgbClr val="616C7A"/>
+                </a:solidFill>
+                <a:latin typeface="IBM Plex Mono" pitchFamily="34" charset="0"/>
+                <a:ea typeface="IBM Plex Mono" pitchFamily="34" charset="-122"/>
+                <a:cs typeface="IBM Plex Mono" pitchFamily="34" charset="-120"/>
+              </a:rPr>
+              <a:t>03 / 15</a:t>
+            </a:r>
+            <a:endParaRPr lang="en-US" sz="1000" dirty="0"/>
+          </a:p>
+        </p:txBody>
+      </p:sp>
+    </p:spTree>
+  </p:cSld>
+  <p:clrMapOvr>
+    <a:masterClrMapping/>
+  </p:clrMapOvr>
+  <p:transition spd="fast">
+    <p:fade/>
+  </p:transition>
+</p:sld>
+</file>
+
+<file path=ppt/slides/slide4.xml><?xml version="1.0" encoding="utf-8"?>
+<p:sld xmlns:a="http://schemas.openxmlformats.org/drawingml/2006/main" xmlns:r="http://schemas.openxmlformats.org/officeDocument/2006/relationships" xmlns:p="http://schemas.openxmlformats.org/presentationml/2006/main">
+  <p:cSld name="Slide 4">
+    <p:bg>
+      <p:bgPr>
+        <a:solidFill>
+          <a:srgbClr val="F4F5F7"/>
+        </a:solidFill>
+      </p:bgPr>
+    </p:bg>
+    <p:spTree>
+      <p:nvGrpSpPr>
+        <p:cNvPr id="1" name=""/>
+        <p:cNvGrpSpPr/>
+        <p:nvPr/>
+      </p:nvGrpSpPr>
+      <p:grpSpPr>
+        <a:xfrm>
+          <a:off x="0" y="0"/>
+          <a:ext cx="0" cy="0"/>
+          <a:chOff x="0" y="0"/>
+          <a:chExt cx="0" cy="0"/>
+        </a:xfrm>
+      </p:grpSpPr>
+      <p:sp>
+        <p:nvSpPr>
+          <p:cNvPr id="2" name="Text 0"/>
+          <p:cNvSpPr txBox="1"/>
+          <p:nvPr/>
+        </p:nvSpPr>
+        <p:spPr>
+          <a:xfrm>
+            <a:off x="762000" y="558800"/>
+            <a:ext cx="8890000" cy="190500"/>
+          </a:xfrm>
+          <a:prstGeom prst="rect">
+            <a:avLst/>
+          </a:prstGeom>
+          <a:noFill/>
+          <a:ln/>
+        </p:spPr>
+        <p:txBody>
+          <a:bodyPr wrap="square" lIns="0" tIns="0" rIns="0" bIns="0" rtlCol="0" anchor="t"/>
+          <a:lstStyle/>
+          <a:p>
+            <a:pPr algn="l" indent="0" marL="0">
+              <a:lnSpc>
+                <a:spcPct val="115000"/>
+              </a:lnSpc>
+              <a:buNone/>
+            </a:pPr>
+            <a:r>
+              <a:rPr lang="en-US" sz="1100" b="1" spc="90" kern="0" dirty="0">
+                <a:solidFill>
+                  <a:srgbClr val="616C7A"/>
+                </a:solidFill>
+                <a:latin typeface="Public Sans" pitchFamily="34" charset="0"/>
+                <a:ea typeface="Public Sans" pitchFamily="34" charset="-122"/>
+                <a:cs typeface="Public Sans" pitchFamily="34" charset="-120"/>
+              </a:rPr>
               <a:t>THE SOLUTION</a:t>
             </a:r>
             <a:endParaRPr lang="en-US" sz="1100" dirty="0"/>
@@ -12169,7 +15900,7 @@
                 <a:ea typeface="IBM Plex Mono" pitchFamily="34" charset="-122"/>
                 <a:cs typeface="IBM Plex Mono" pitchFamily="34" charset="-120"/>
               </a:rPr>
-              <a:t>03 / 13</a:t>
+              <a:t>04 / 15</a:t>
             </a:r>
             <a:endParaRPr lang="en-US" sz="1000" dirty="0"/>
           </a:p>
@@ -14000,505 +17731,6 @@
 </p:sld>
 </file>
 
-<file path=ppt/slides/slide4.xml><?xml version="1.0" encoding="utf-8"?>
-<p:sld xmlns:a="http://schemas.openxmlformats.org/drawingml/2006/main" xmlns:r="http://schemas.openxmlformats.org/officeDocument/2006/relationships" xmlns:p="http://schemas.openxmlformats.org/presentationml/2006/main">
-  <p:cSld name="Slide 4">
-    <p:bg>
-      <p:bgPr>
-        <a:solidFill>
-          <a:srgbClr val="F4F5F7"/>
-        </a:solidFill>
-      </p:bgPr>
-    </p:bg>
-    <p:spTree>
-      <p:nvGrpSpPr>
-        <p:cNvPr id="1" name=""/>
-        <p:cNvGrpSpPr/>
-        <p:nvPr/>
-      </p:nvGrpSpPr>
-      <p:grpSpPr>
-        <a:xfrm>
-          <a:off x="0" y="0"/>
-          <a:ext cx="0" cy="0"/>
-          <a:chOff x="0" y="0"/>
-          <a:chExt cx="0" cy="0"/>
-        </a:xfrm>
-      </p:grpSpPr>
-      <p:sp>
-        <p:nvSpPr>
-          <p:cNvPr id="2" name="Text 0"/>
-          <p:cNvSpPr txBox="1"/>
-          <p:nvPr/>
-        </p:nvSpPr>
-        <p:spPr>
-          <a:xfrm>
-            <a:off x="762000" y="558800"/>
-            <a:ext cx="8890000" cy="190500"/>
-          </a:xfrm>
-          <a:prstGeom prst="rect">
-            <a:avLst/>
-          </a:prstGeom>
-          <a:noFill/>
-          <a:ln/>
-        </p:spPr>
-        <p:txBody>
-          <a:bodyPr wrap="square" lIns="0" tIns="0" rIns="0" bIns="0" rtlCol="0" anchor="t"/>
-          <a:lstStyle/>
-          <a:p>
-            <a:pPr algn="l" indent="0" marL="0">
-              <a:lnSpc>
-                <a:spcPct val="115000"/>
-              </a:lnSpc>
-              <a:buNone/>
-            </a:pPr>
-            <a:r>
-              <a:rPr lang="en-US" sz="1100" b="1" spc="90" kern="0" dirty="0">
-                <a:solidFill>
-                  <a:srgbClr val="616C7A"/>
-                </a:solidFill>
-                <a:latin typeface="Public Sans" pitchFamily="34" charset="0"/>
-                <a:ea typeface="Public Sans" pitchFamily="34" charset="-122"/>
-                <a:cs typeface="Public Sans" pitchFamily="34" charset="-120"/>
-              </a:rPr>
-              <a:t>THE PRODUCT · OPERATOR</a:t>
-            </a:r>
-            <a:endParaRPr lang="en-US" sz="1100" dirty="0"/>
-          </a:p>
-        </p:txBody>
-      </p:sp>
-      <p:sp>
-        <p:nvSpPr>
-          <p:cNvPr id="3" name="Text 1"/>
-          <p:cNvSpPr txBox="1"/>
-          <p:nvPr/>
-        </p:nvSpPr>
-        <p:spPr>
-          <a:xfrm>
-            <a:off x="762000" y="863600"/>
-            <a:ext cx="10668000" cy="635000"/>
-          </a:xfrm>
-          <a:prstGeom prst="rect">
-            <a:avLst/>
-          </a:prstGeom>
-          <a:noFill/>
-          <a:ln/>
-        </p:spPr>
-        <p:txBody>
-          <a:bodyPr wrap="square" lIns="0" tIns="0" rIns="0" bIns="0" rtlCol="0" anchor="t"/>
-          <a:lstStyle/>
-          <a:p>
-            <a:pPr algn="l" indent="0" marL="0">
-              <a:lnSpc>
-                <a:spcPct val="108000"/>
-              </a:lnSpc>
-              <a:buNone/>
-            </a:pPr>
-            <a:r>
-              <a:rPr lang="en-US" sz="2000" dirty="0">
-                <a:solidFill>
-                  <a:srgbClr val="1B2430"/>
-                </a:solidFill>
-                <a:latin typeface="Instrument Serif" pitchFamily="34" charset="0"/>
-                <a:ea typeface="Instrument Serif" pitchFamily="34" charset="-122"/>
-                <a:cs typeface="Instrument Serif" pitchFamily="34" charset="-120"/>
-              </a:rPr>
-              <a:t>The operator's side: applications grouped by who needs to act, and a check result on every upload.</a:t>
-            </a:r>
-            <a:endParaRPr lang="en-US" sz="2000" dirty="0"/>
-          </a:p>
-        </p:txBody>
-      </p:sp>
-      <p:sp>
-        <p:nvSpPr>
-          <p:cNvPr id="4" name="Shape 2"/>
-          <p:cNvSpPr/>
-          <p:nvPr/>
-        </p:nvSpPr>
-        <p:spPr>
-          <a:xfrm>
-            <a:off x="755650" y="1657350"/>
-            <a:ext cx="5194300" cy="2927350"/>
-          </a:xfrm>
-          <a:prstGeom prst="roundRect">
-            <a:avLst>
-              <a:gd name="adj" fmla="val 1302"/>
-            </a:avLst>
-          </a:prstGeom>
-          <a:solidFill>
-            <a:srgbClr val="FFFFFF"/>
-          </a:solidFill>
-          <a:ln w="9525">
-            <a:solidFill>
-              <a:srgbClr val="DDE1E7"/>
-            </a:solidFill>
-            <a:prstDash val="solid"/>
-          </a:ln>
-          <a:effectLst>
-            <a:outerShdw sx="100000" sy="100000" kx="0" ky="0" algn="bl" rotWithShape="0" blurRad="38100" dist="12700" dir="5400000">
-              <a:srgbClr val="101828">
-                <a:alpha val="8000"/>
-              </a:srgbClr>
-            </a:outerShdw>
-          </a:effectLst>
-        </p:spPr>
-      </p:sp>
-      <p:pic>
-        <p:nvPicPr>
-          <p:cNvPr id="5" name="Image 0" descr="/Users/suhaasnv/Documents/Desktop ALT/portfolioprojects/permitflow/notes/pitch/pitch-deck/pptx/build/operator-dashboard-16x9.png">    </p:cNvPr>
-          <p:cNvPicPr>
-            <a:picLocks noChangeAspect="1"/>
-          </p:cNvPicPr>
-          <p:nvPr/>
-        </p:nvPicPr>
-        <p:blipFill>
-          <a:blip r:embed="rId1"/>
-          <a:stretch>
-            <a:fillRect/>
-          </a:stretch>
-        </p:blipFill>
-        <p:spPr>
-          <a:xfrm>
-            <a:off x="762000" y="1663700"/>
-            <a:ext cx="5181600" cy="2914650"/>
-          </a:xfrm>
-          <a:prstGeom prst="rect">
-            <a:avLst/>
-          </a:prstGeom>
-        </p:spPr>
-      </p:pic>
-      <p:sp>
-        <p:nvSpPr>
-          <p:cNvPr id="6" name="Shape 3"/>
-          <p:cNvSpPr/>
-          <p:nvPr/>
-        </p:nvSpPr>
-        <p:spPr>
-          <a:xfrm>
-            <a:off x="762000" y="4679950"/>
-            <a:ext cx="802640" cy="203200"/>
-          </a:xfrm>
-          <a:prstGeom prst="roundRect">
-            <a:avLst>
-              <a:gd name="adj" fmla="val 18750"/>
-            </a:avLst>
-          </a:prstGeom>
-          <a:solidFill>
-            <a:srgbClr val="F2F4F7"/>
-          </a:solidFill>
-          <a:ln w="9525">
-            <a:solidFill>
-              <a:srgbClr val="D0D5DD"/>
-            </a:solidFill>
-            <a:prstDash val="solid"/>
-          </a:ln>
-        </p:spPr>
-      </p:sp>
-      <p:sp>
-        <p:nvSpPr>
-          <p:cNvPr id="7" name="Text 4"/>
-          <p:cNvSpPr txBox="1"/>
-          <p:nvPr/>
-        </p:nvSpPr>
-        <p:spPr>
-          <a:xfrm>
-            <a:off x="762000" y="4679950"/>
-            <a:ext cx="802640" cy="203200"/>
-          </a:xfrm>
-          <a:prstGeom prst="rect">
-            <a:avLst/>
-          </a:prstGeom>
-          <a:noFill/>
-          <a:ln/>
-        </p:spPr>
-        <p:txBody>
-          <a:bodyPr wrap="none" lIns="0" tIns="0" rIns="0" bIns="0" rtlCol="0" anchor="ctr"/>
-          <a:lstStyle/>
-          <a:p>
-            <a:pPr algn="ctr" indent="0" marL="0">
-              <a:lnSpc>
-                <a:spcPct val="115000"/>
-              </a:lnSpc>
-              <a:buNone/>
-            </a:pPr>
-            <a:r>
-              <a:rPr lang="en-US" sz="1000" b="1" dirty="0">
-                <a:solidFill>
-                  <a:srgbClr val="475467"/>
-                </a:solidFill>
-                <a:latin typeface="Public Sans" pitchFamily="34" charset="0"/>
-                <a:ea typeface="Public Sans" pitchFamily="34" charset="-122"/>
-                <a:cs typeface="Public Sans" pitchFamily="34" charset="-120"/>
-              </a:rPr>
-              <a:t>Operator</a:t>
-            </a:r>
-            <a:endParaRPr lang="en-US" sz="1000" dirty="0"/>
-          </a:p>
-        </p:txBody>
-      </p:sp>
-      <p:sp>
-        <p:nvSpPr>
-          <p:cNvPr id="8" name="Text 5"/>
-          <p:cNvSpPr txBox="1"/>
-          <p:nvPr/>
-        </p:nvSpPr>
-        <p:spPr>
-          <a:xfrm>
-            <a:off x="1640840" y="4667250"/>
-            <a:ext cx="4302760" cy="381000"/>
-          </a:xfrm>
-          <a:prstGeom prst="rect">
-            <a:avLst/>
-          </a:prstGeom>
-          <a:noFill/>
-          <a:ln/>
-        </p:spPr>
-        <p:txBody>
-          <a:bodyPr wrap="square" lIns="0" tIns="0" rIns="0" bIns="0" rtlCol="0" anchor="t"/>
-          <a:lstStyle/>
-          <a:p>
-            <a:pPr algn="l" indent="0" marL="0">
-              <a:lnSpc>
-                <a:spcPct val="115000"/>
-              </a:lnSpc>
-              <a:buNone/>
-            </a:pPr>
-            <a:r>
-              <a:rPr lang="en-US" sz="1000" dirty="0">
-                <a:solidFill>
-                  <a:srgbClr val="465060"/>
-                </a:solidFill>
-                <a:latin typeface="Public Sans" pitchFamily="34" charset="0"/>
-                <a:ea typeface="Public Sans" pitchFamily="34" charset="-122"/>
-                <a:cs typeface="Public Sans" pitchFamily="34" charset="-120"/>
-              </a:rPr>
-              <a:t>Dashboard: applications grouped by who needs to act</a:t>
-            </a:r>
-            <a:endParaRPr lang="en-US" sz="1000" dirty="0"/>
-          </a:p>
-        </p:txBody>
-      </p:sp>
-      <p:sp>
-        <p:nvSpPr>
-          <p:cNvPr id="9" name="Shape 6"/>
-          <p:cNvSpPr/>
-          <p:nvPr/>
-        </p:nvSpPr>
-        <p:spPr>
-          <a:xfrm>
-            <a:off x="6242050" y="1657350"/>
-            <a:ext cx="5194300" cy="2927350"/>
-          </a:xfrm>
-          <a:prstGeom prst="roundRect">
-            <a:avLst>
-              <a:gd name="adj" fmla="val 1302"/>
-            </a:avLst>
-          </a:prstGeom>
-          <a:solidFill>
-            <a:srgbClr val="FFFFFF"/>
-          </a:solidFill>
-          <a:ln w="9525">
-            <a:solidFill>
-              <a:srgbClr val="DDE1E7"/>
-            </a:solidFill>
-            <a:prstDash val="solid"/>
-          </a:ln>
-          <a:effectLst>
-            <a:outerShdw sx="100000" sy="100000" kx="0" ky="0" algn="bl" rotWithShape="0" blurRad="38100" dist="12700" dir="5400000">
-              <a:srgbClr val="101828">
-                <a:alpha val="8000"/>
-              </a:srgbClr>
-            </a:outerShdw>
-          </a:effectLst>
-        </p:spPr>
-      </p:sp>
-      <p:pic>
-        <p:nvPicPr>
-          <p:cNvPr id="10" name="Image 1" descr="/Users/suhaasnv/Documents/Desktop ALT/portfolioprojects/permitflow/notes/pitch/pitch-deck/pptx/build/operator-documents-16x9.png">    </p:cNvPr>
-          <p:cNvPicPr>
-            <a:picLocks noChangeAspect="1"/>
-          </p:cNvPicPr>
-          <p:nvPr/>
-        </p:nvPicPr>
-        <p:blipFill>
-          <a:blip r:embed="rId2"/>
-          <a:stretch>
-            <a:fillRect/>
-          </a:stretch>
-        </p:blipFill>
-        <p:spPr>
-          <a:xfrm>
-            <a:off x="6248400" y="1663700"/>
-            <a:ext cx="5181600" cy="2914650"/>
-          </a:xfrm>
-          <a:prstGeom prst="rect">
-            <a:avLst/>
-          </a:prstGeom>
-        </p:spPr>
-      </p:pic>
-      <p:sp>
-        <p:nvSpPr>
-          <p:cNvPr id="11" name="Shape 7"/>
-          <p:cNvSpPr/>
-          <p:nvPr/>
-        </p:nvSpPr>
-        <p:spPr>
-          <a:xfrm>
-            <a:off x="6248400" y="4679950"/>
-            <a:ext cx="802640" cy="203200"/>
-          </a:xfrm>
-          <a:prstGeom prst="roundRect">
-            <a:avLst>
-              <a:gd name="adj" fmla="val 18750"/>
-            </a:avLst>
-          </a:prstGeom>
-          <a:solidFill>
-            <a:srgbClr val="F2F4F7"/>
-          </a:solidFill>
-          <a:ln w="9525">
-            <a:solidFill>
-              <a:srgbClr val="D0D5DD"/>
-            </a:solidFill>
-            <a:prstDash val="solid"/>
-          </a:ln>
-        </p:spPr>
-      </p:sp>
-      <p:sp>
-        <p:nvSpPr>
-          <p:cNvPr id="12" name="Text 8"/>
-          <p:cNvSpPr txBox="1"/>
-          <p:nvPr/>
-        </p:nvSpPr>
-        <p:spPr>
-          <a:xfrm>
-            <a:off x="6248400" y="4679950"/>
-            <a:ext cx="802640" cy="203200"/>
-          </a:xfrm>
-          <a:prstGeom prst="rect">
-            <a:avLst/>
-          </a:prstGeom>
-          <a:noFill/>
-          <a:ln/>
-        </p:spPr>
-        <p:txBody>
-          <a:bodyPr wrap="none" lIns="0" tIns="0" rIns="0" bIns="0" rtlCol="0" anchor="ctr"/>
-          <a:lstStyle/>
-          <a:p>
-            <a:pPr algn="ctr" indent="0" marL="0">
-              <a:lnSpc>
-                <a:spcPct val="115000"/>
-              </a:lnSpc>
-              <a:buNone/>
-            </a:pPr>
-            <a:r>
-              <a:rPr lang="en-US" sz="1000" b="1" dirty="0">
-                <a:solidFill>
-                  <a:srgbClr val="475467"/>
-                </a:solidFill>
-                <a:latin typeface="Public Sans" pitchFamily="34" charset="0"/>
-                <a:ea typeface="Public Sans" pitchFamily="34" charset="-122"/>
-                <a:cs typeface="Public Sans" pitchFamily="34" charset="-120"/>
-              </a:rPr>
-              <a:t>Operator</a:t>
-            </a:r>
-            <a:endParaRPr lang="en-US" sz="1000" dirty="0"/>
-          </a:p>
-        </p:txBody>
-      </p:sp>
-      <p:sp>
-        <p:nvSpPr>
-          <p:cNvPr id="13" name="Text 9"/>
-          <p:cNvSpPr txBox="1"/>
-          <p:nvPr/>
-        </p:nvSpPr>
-        <p:spPr>
-          <a:xfrm>
-            <a:off x="7127240" y="4667250"/>
-            <a:ext cx="4302760" cy="381000"/>
-          </a:xfrm>
-          <a:prstGeom prst="rect">
-            <a:avLst/>
-          </a:prstGeom>
-          <a:noFill/>
-          <a:ln/>
-        </p:spPr>
-        <p:txBody>
-          <a:bodyPr wrap="square" lIns="0" tIns="0" rIns="0" bIns="0" rtlCol="0" anchor="t"/>
-          <a:lstStyle/>
-          <a:p>
-            <a:pPr algn="l" indent="0" marL="0">
-              <a:lnSpc>
-                <a:spcPct val="115000"/>
-              </a:lnSpc>
-              <a:buNone/>
-            </a:pPr>
-            <a:r>
-              <a:rPr lang="en-US" sz="1000" dirty="0">
-                <a:solidFill>
-                  <a:srgbClr val="465060"/>
-                </a:solidFill>
-                <a:latin typeface="Public Sans" pitchFamily="34" charset="0"/>
-                <a:ea typeface="Public Sans" pitchFamily="34" charset="-122"/>
-                <a:cs typeface="Public Sans" pitchFamily="34" charset="-120"/>
-              </a:rPr>
-              <a:t>Documents: a check result on each upload, in plain language</a:t>
-            </a:r>
-            <a:endParaRPr lang="en-US" sz="1000" dirty="0"/>
-          </a:p>
-        </p:txBody>
-      </p:sp>
-      <p:sp>
-        <p:nvSpPr>
-          <p:cNvPr id="14" name="Text 10"/>
-          <p:cNvSpPr txBox="1"/>
-          <p:nvPr/>
-        </p:nvSpPr>
-        <p:spPr>
-          <a:xfrm>
-            <a:off x="10160000" y="571500"/>
-            <a:ext cx="1270000" cy="190500"/>
-          </a:xfrm>
-          <a:prstGeom prst="rect">
-            <a:avLst/>
-          </a:prstGeom>
-          <a:noFill/>
-          <a:ln/>
-        </p:spPr>
-        <p:txBody>
-          <a:bodyPr wrap="square" lIns="0" tIns="0" rIns="0" bIns="0" rtlCol="0" anchor="t"/>
-          <a:lstStyle/>
-          <a:p>
-            <a:pPr algn="r" indent="0" marL="0">
-              <a:lnSpc>
-                <a:spcPct val="115000"/>
-              </a:lnSpc>
-              <a:buNone/>
-            </a:pPr>
-            <a:r>
-              <a:rPr lang="en-US" sz="1000" dirty="0">
-                <a:solidFill>
-                  <a:srgbClr val="616C7A"/>
-                </a:solidFill>
-                <a:latin typeface="IBM Plex Mono" pitchFamily="34" charset="0"/>
-                <a:ea typeface="IBM Plex Mono" pitchFamily="34" charset="-122"/>
-                <a:cs typeface="IBM Plex Mono" pitchFamily="34" charset="-120"/>
-              </a:rPr>
-              <a:t>04 / 13</a:t>
-            </a:r>
-            <a:endParaRPr lang="en-US" sz="1000" dirty="0"/>
-          </a:p>
-        </p:txBody>
-      </p:sp>
-    </p:spTree>
-  </p:cSld>
-  <p:clrMapOvr>
-    <a:masterClrMapping/>
-  </p:clrMapOvr>
-  <p:transition spd="fast">
-    <p:fade/>
-  </p:transition>
-</p:sld>
-</file>
-
 <file path=ppt/slides/slide5.xml><?xml version="1.0" encoding="utf-8"?>
 <p:sld xmlns:a="http://schemas.openxmlformats.org/drawingml/2006/main" xmlns:r="http://schemas.openxmlformats.org/officeDocument/2006/relationships" xmlns:p="http://schemas.openxmlformats.org/presentationml/2006/main">
   <p:cSld name="Slide 5">
@@ -14559,7 +17791,7 @@
                 <a:ea typeface="Public Sans" pitchFamily="34" charset="-122"/>
                 <a:cs typeface="Public Sans" pitchFamily="34" charset="-120"/>
               </a:rPr>
-              <a:t>THE PRODUCT · OFFICER</a:t>
+              <a:t>THE SOLUTION · AFTER</a:t>
             </a:r>
             <a:endParaRPr lang="en-US" sz="1100" dirty="0"/>
           </a:p>
@@ -14574,7 +17806,7 @@
         <p:spPr>
           <a:xfrm>
             <a:off x="762000" y="863600"/>
-            <a:ext cx="10668000" cy="635000"/>
+            <a:ext cx="10668000" cy="381000"/>
           </a:xfrm>
           <a:prstGeom prst="rect">
             <a:avLst/>
@@ -14601,7 +17833,192 @@
                 <a:ea typeface="Instrument Serif" pitchFamily="34" charset="-122"/>
                 <a:cs typeface="Instrument Serif" pitchFamily="34" charset="-120"/>
               </a:rPr>
-              <a:t>The officer's side: findings with evidence beside each document, and a compare view for every round.</a:t>
+              <a:t>After: the same four moments with PermitFlow, and each one is shorter.</a:t>
+            </a:r>
+            <a:endParaRPr lang="en-US" sz="2000" dirty="0"/>
+          </a:p>
+        </p:txBody>
+      </p:sp>
+      <p:pic>
+        <p:nvPicPr>
+          <p:cNvPr id="4" name="Image 0" descr="/Users/suhaasnv/Documents/Desktop ALT/portfolioprojects/permitflow/notes/pitch/pitch-deck/pptx/build/comic-after.png">    </p:cNvPr>
+          <p:cNvPicPr>
+            <a:picLocks noChangeAspect="1"/>
+          </p:cNvPicPr>
+          <p:nvPr/>
+        </p:nvPicPr>
+        <p:blipFill>
+          <a:blip r:embed="rId1"/>
+          <a:stretch>
+            <a:fillRect/>
+          </a:stretch>
+        </p:blipFill>
+        <p:spPr>
+          <a:xfrm>
+            <a:off x="1190625" y="1270000"/>
+            <a:ext cx="9810750" cy="5334000"/>
+          </a:xfrm>
+          <a:prstGeom prst="rect">
+            <a:avLst/>
+          </a:prstGeom>
+        </p:spPr>
+      </p:pic>
+      <p:sp>
+        <p:nvSpPr>
+          <p:cNvPr id="5" name="Text 2"/>
+          <p:cNvSpPr txBox="1"/>
+          <p:nvPr/>
+        </p:nvSpPr>
+        <p:spPr>
+          <a:xfrm>
+            <a:off x="10160000" y="571500"/>
+            <a:ext cx="1270000" cy="190500"/>
+          </a:xfrm>
+          <a:prstGeom prst="rect">
+            <a:avLst/>
+          </a:prstGeom>
+          <a:noFill/>
+          <a:ln/>
+        </p:spPr>
+        <p:txBody>
+          <a:bodyPr wrap="square" lIns="0" tIns="0" rIns="0" bIns="0" rtlCol="0" anchor="t"/>
+          <a:lstStyle/>
+          <a:p>
+            <a:pPr algn="r" indent="0" marL="0">
+              <a:lnSpc>
+                <a:spcPct val="115000"/>
+              </a:lnSpc>
+              <a:buNone/>
+            </a:pPr>
+            <a:r>
+              <a:rPr lang="en-US" sz="1000" dirty="0">
+                <a:solidFill>
+                  <a:srgbClr val="616C7A"/>
+                </a:solidFill>
+                <a:latin typeface="IBM Plex Mono" pitchFamily="34" charset="0"/>
+                <a:ea typeface="IBM Plex Mono" pitchFamily="34" charset="-122"/>
+                <a:cs typeface="IBM Plex Mono" pitchFamily="34" charset="-120"/>
+              </a:rPr>
+              <a:t>05 / 15</a:t>
+            </a:r>
+            <a:endParaRPr lang="en-US" sz="1000" dirty="0"/>
+          </a:p>
+        </p:txBody>
+      </p:sp>
+    </p:spTree>
+  </p:cSld>
+  <p:clrMapOvr>
+    <a:masterClrMapping/>
+  </p:clrMapOvr>
+  <p:transition spd="fast">
+    <p:fade/>
+  </p:transition>
+</p:sld>
+</file>
+
+<file path=ppt/slides/slide6.xml><?xml version="1.0" encoding="utf-8"?>
+<p:sld xmlns:a="http://schemas.openxmlformats.org/drawingml/2006/main" xmlns:r="http://schemas.openxmlformats.org/officeDocument/2006/relationships" xmlns:p="http://schemas.openxmlformats.org/presentationml/2006/main">
+  <p:cSld name="Slide 6">
+    <p:bg>
+      <p:bgPr>
+        <a:solidFill>
+          <a:srgbClr val="F4F5F7"/>
+        </a:solidFill>
+      </p:bgPr>
+    </p:bg>
+    <p:spTree>
+      <p:nvGrpSpPr>
+        <p:cNvPr id="1" name=""/>
+        <p:cNvGrpSpPr/>
+        <p:nvPr/>
+      </p:nvGrpSpPr>
+      <p:grpSpPr>
+        <a:xfrm>
+          <a:off x="0" y="0"/>
+          <a:ext cx="0" cy="0"/>
+          <a:chOff x="0" y="0"/>
+          <a:chExt cx="0" cy="0"/>
+        </a:xfrm>
+      </p:grpSpPr>
+      <p:sp>
+        <p:nvSpPr>
+          <p:cNvPr id="2" name="Text 0"/>
+          <p:cNvSpPr txBox="1"/>
+          <p:nvPr/>
+        </p:nvSpPr>
+        <p:spPr>
+          <a:xfrm>
+            <a:off x="762000" y="558800"/>
+            <a:ext cx="8890000" cy="190500"/>
+          </a:xfrm>
+          <a:prstGeom prst="rect">
+            <a:avLst/>
+          </a:prstGeom>
+          <a:noFill/>
+          <a:ln/>
+        </p:spPr>
+        <p:txBody>
+          <a:bodyPr wrap="square" lIns="0" tIns="0" rIns="0" bIns="0" rtlCol="0" anchor="t"/>
+          <a:lstStyle/>
+          <a:p>
+            <a:pPr algn="l" indent="0" marL="0">
+              <a:lnSpc>
+                <a:spcPct val="115000"/>
+              </a:lnSpc>
+              <a:buNone/>
+            </a:pPr>
+            <a:r>
+              <a:rPr lang="en-US" sz="1100" b="1" spc="90" kern="0" dirty="0">
+                <a:solidFill>
+                  <a:srgbClr val="616C7A"/>
+                </a:solidFill>
+                <a:latin typeface="Public Sans" pitchFamily="34" charset="0"/>
+                <a:ea typeface="Public Sans" pitchFamily="34" charset="-122"/>
+                <a:cs typeface="Public Sans" pitchFamily="34" charset="-120"/>
+              </a:rPr>
+              <a:t>THE PRODUCT · OPERATOR</a:t>
+            </a:r>
+            <a:endParaRPr lang="en-US" sz="1100" dirty="0"/>
+          </a:p>
+        </p:txBody>
+      </p:sp>
+      <p:sp>
+        <p:nvSpPr>
+          <p:cNvPr id="3" name="Text 1"/>
+          <p:cNvSpPr txBox="1"/>
+          <p:nvPr/>
+        </p:nvSpPr>
+        <p:spPr>
+          <a:xfrm>
+            <a:off x="762000" y="863600"/>
+            <a:ext cx="10668000" cy="635000"/>
+          </a:xfrm>
+          <a:prstGeom prst="rect">
+            <a:avLst/>
+          </a:prstGeom>
+          <a:noFill/>
+          <a:ln/>
+        </p:spPr>
+        <p:txBody>
+          <a:bodyPr wrap="square" lIns="0" tIns="0" rIns="0" bIns="0" rtlCol="0" anchor="t"/>
+          <a:lstStyle/>
+          <a:p>
+            <a:pPr algn="l" indent="0" marL="0">
+              <a:lnSpc>
+                <a:spcPct val="108000"/>
+              </a:lnSpc>
+              <a:buNone/>
+            </a:pPr>
+            <a:r>
+              <a:rPr lang="en-US" sz="2000" dirty="0">
+                <a:solidFill>
+                  <a:srgbClr val="1B2430"/>
+                </a:solidFill>
+                <a:latin typeface="Instrument Serif" pitchFamily="34" charset="0"/>
+                <a:ea typeface="Instrument Serif" pitchFamily="34" charset="-122"/>
+                <a:cs typeface="Instrument Serif" pitchFamily="34" charset="-120"/>
+              </a:rPr>
+              <a:t>The operator's side: applications grouped by who needs to act, and a check result on every upload.</a:t>
             </a:r>
             <a:endParaRPr lang="en-US" sz="2000" dirty="0"/>
           </a:p>
@@ -14643,7 +18060,7 @@
       </p:sp>
       <p:pic>
         <p:nvPicPr>
-          <p:cNvPr id="5" name="Image 0" descr="/Users/suhaasnv/Documents/Desktop ALT/portfolioprojects/permitflow/notes/pitch/pitch-deck/pptx/build/officer-case-findings-16x9.png">    </p:cNvPr>
+          <p:cNvPr id="5" name="Image 0" descr="/Users/suhaasnv/Documents/Desktop ALT/portfolioprojects/permitflow/notes/pitch/pitch-deck/pptx/build/operator-dashboard-16x9.png">    </p:cNvPr>
           <p:cNvPicPr>
             <a:picLocks noChangeAspect="1"/>
           </p:cNvPicPr>
@@ -14674,7 +18091,7 @@
         <p:spPr>
           <a:xfrm>
             <a:off x="762000" y="4679950"/>
-            <a:ext cx="721360" cy="203200"/>
+            <a:ext cx="802640" cy="203200"/>
           </a:xfrm>
           <a:prstGeom prst="roundRect">
             <a:avLst>
@@ -14682,11 +18099,11 @@
             </a:avLst>
           </a:prstGeom>
           <a:solidFill>
-            <a:srgbClr val="EEF4FF"/>
+            <a:srgbClr val="F2F4F7"/>
           </a:solidFill>
           <a:ln w="9525">
             <a:solidFill>
-              <a:srgbClr val="B2CCFA"/>
+              <a:srgbClr val="D0D5DD"/>
             </a:solidFill>
             <a:prstDash val="solid"/>
           </a:ln>
@@ -14701,7 +18118,7 @@
         <p:spPr>
           <a:xfrm>
             <a:off x="762000" y="4679950"/>
-            <a:ext cx="721360" cy="203200"/>
+            <a:ext cx="802640" cy="203200"/>
           </a:xfrm>
           <a:prstGeom prst="rect">
             <a:avLst/>
@@ -14722,13 +18139,13 @@
             <a:r>
               <a:rPr lang="en-US" sz="1000" b="1" dirty="0">
                 <a:solidFill>
-                  <a:srgbClr val="175CD3"/>
+                  <a:srgbClr val="475467"/>
                 </a:solidFill>
                 <a:latin typeface="Public Sans" pitchFamily="34" charset="0"/>
                 <a:ea typeface="Public Sans" pitchFamily="34" charset="-122"/>
                 <a:cs typeface="Public Sans" pitchFamily="34" charset="-120"/>
               </a:rPr>
-              <a:t>Officer</a:t>
+              <a:t>Operator</a:t>
             </a:r>
             <a:endParaRPr lang="en-US" sz="1000" dirty="0"/>
           </a:p>
@@ -14742,8 +18159,8 @@
         </p:nvSpPr>
         <p:spPr>
           <a:xfrm>
-            <a:off x="1559560" y="4667250"/>
-            <a:ext cx="4384040" cy="381000"/>
+            <a:off x="1640840" y="4667250"/>
+            <a:ext cx="4302760" cy="381000"/>
           </a:xfrm>
           <a:prstGeom prst="rect">
             <a:avLst/>
@@ -14770,7 +18187,7 @@
                 <a:ea typeface="Public Sans" pitchFamily="34" charset="-122"/>
                 <a:cs typeface="Public Sans" pitchFamily="34" charset="-120"/>
               </a:rPr>
-              <a:t>Case: findings with evidence beside each document, feedback rail on the right</a:t>
+              <a:t>Dashboard: applications grouped by who needs to act</a:t>
             </a:r>
             <a:endParaRPr lang="en-US" sz="1000" dirty="0"/>
           </a:p>
@@ -14812,7 +18229,7 @@
       </p:sp>
       <p:pic>
         <p:nvPicPr>
-          <p:cNvPr id="10" name="Image 1" descr="/Users/suhaasnv/Documents/Desktop ALT/portfolioprojects/permitflow/notes/pitch/pitch-deck/pptx/build/officer-compare-16x9.png">    </p:cNvPr>
+          <p:cNvPr id="10" name="Image 1" descr="/Users/suhaasnv/Documents/Desktop ALT/portfolioprojects/permitflow/notes/pitch/pitch-deck/pptx/build/operator-documents-16x9.png">    </p:cNvPr>
           <p:cNvPicPr>
             <a:picLocks noChangeAspect="1"/>
           </p:cNvPicPr>
@@ -14843,6 +18260,336 @@
         <p:spPr>
           <a:xfrm>
             <a:off x="6248400" y="4679950"/>
+            <a:ext cx="802640" cy="203200"/>
+          </a:xfrm>
+          <a:prstGeom prst="roundRect">
+            <a:avLst>
+              <a:gd name="adj" fmla="val 18750"/>
+            </a:avLst>
+          </a:prstGeom>
+          <a:solidFill>
+            <a:srgbClr val="F2F4F7"/>
+          </a:solidFill>
+          <a:ln w="9525">
+            <a:solidFill>
+              <a:srgbClr val="D0D5DD"/>
+            </a:solidFill>
+            <a:prstDash val="solid"/>
+          </a:ln>
+        </p:spPr>
+      </p:sp>
+      <p:sp>
+        <p:nvSpPr>
+          <p:cNvPr id="12" name="Text 8"/>
+          <p:cNvSpPr txBox="1"/>
+          <p:nvPr/>
+        </p:nvSpPr>
+        <p:spPr>
+          <a:xfrm>
+            <a:off x="6248400" y="4679950"/>
+            <a:ext cx="802640" cy="203200"/>
+          </a:xfrm>
+          <a:prstGeom prst="rect">
+            <a:avLst/>
+          </a:prstGeom>
+          <a:noFill/>
+          <a:ln/>
+        </p:spPr>
+        <p:txBody>
+          <a:bodyPr wrap="none" lIns="0" tIns="0" rIns="0" bIns="0" rtlCol="0" anchor="ctr"/>
+          <a:lstStyle/>
+          <a:p>
+            <a:pPr algn="ctr" indent="0" marL="0">
+              <a:lnSpc>
+                <a:spcPct val="115000"/>
+              </a:lnSpc>
+              <a:buNone/>
+            </a:pPr>
+            <a:r>
+              <a:rPr lang="en-US" sz="1000" b="1" dirty="0">
+                <a:solidFill>
+                  <a:srgbClr val="475467"/>
+                </a:solidFill>
+                <a:latin typeface="Public Sans" pitchFamily="34" charset="0"/>
+                <a:ea typeface="Public Sans" pitchFamily="34" charset="-122"/>
+                <a:cs typeface="Public Sans" pitchFamily="34" charset="-120"/>
+              </a:rPr>
+              <a:t>Operator</a:t>
+            </a:r>
+            <a:endParaRPr lang="en-US" sz="1000" dirty="0"/>
+          </a:p>
+        </p:txBody>
+      </p:sp>
+      <p:sp>
+        <p:nvSpPr>
+          <p:cNvPr id="13" name="Text 9"/>
+          <p:cNvSpPr txBox="1"/>
+          <p:nvPr/>
+        </p:nvSpPr>
+        <p:spPr>
+          <a:xfrm>
+            <a:off x="7127240" y="4667250"/>
+            <a:ext cx="4302760" cy="381000"/>
+          </a:xfrm>
+          <a:prstGeom prst="rect">
+            <a:avLst/>
+          </a:prstGeom>
+          <a:noFill/>
+          <a:ln/>
+        </p:spPr>
+        <p:txBody>
+          <a:bodyPr wrap="square" lIns="0" tIns="0" rIns="0" bIns="0" rtlCol="0" anchor="t"/>
+          <a:lstStyle/>
+          <a:p>
+            <a:pPr algn="l" indent="0" marL="0">
+              <a:lnSpc>
+                <a:spcPct val="115000"/>
+              </a:lnSpc>
+              <a:buNone/>
+            </a:pPr>
+            <a:r>
+              <a:rPr lang="en-US" sz="1000" dirty="0">
+                <a:solidFill>
+                  <a:srgbClr val="465060"/>
+                </a:solidFill>
+                <a:latin typeface="Public Sans" pitchFamily="34" charset="0"/>
+                <a:ea typeface="Public Sans" pitchFamily="34" charset="-122"/>
+                <a:cs typeface="Public Sans" pitchFamily="34" charset="-120"/>
+              </a:rPr>
+              <a:t>Documents: a check result on each upload, in plain language</a:t>
+            </a:r>
+            <a:endParaRPr lang="en-US" sz="1000" dirty="0"/>
+          </a:p>
+        </p:txBody>
+      </p:sp>
+      <p:sp>
+        <p:nvSpPr>
+          <p:cNvPr id="14" name="Text 10"/>
+          <p:cNvSpPr txBox="1"/>
+          <p:nvPr/>
+        </p:nvSpPr>
+        <p:spPr>
+          <a:xfrm>
+            <a:off x="10160000" y="571500"/>
+            <a:ext cx="1270000" cy="190500"/>
+          </a:xfrm>
+          <a:prstGeom prst="rect">
+            <a:avLst/>
+          </a:prstGeom>
+          <a:noFill/>
+          <a:ln/>
+        </p:spPr>
+        <p:txBody>
+          <a:bodyPr wrap="square" lIns="0" tIns="0" rIns="0" bIns="0" rtlCol="0" anchor="t"/>
+          <a:lstStyle/>
+          <a:p>
+            <a:pPr algn="r" indent="0" marL="0">
+              <a:lnSpc>
+                <a:spcPct val="115000"/>
+              </a:lnSpc>
+              <a:buNone/>
+            </a:pPr>
+            <a:r>
+              <a:rPr lang="en-US" sz="1000" dirty="0">
+                <a:solidFill>
+                  <a:srgbClr val="616C7A"/>
+                </a:solidFill>
+                <a:latin typeface="IBM Plex Mono" pitchFamily="34" charset="0"/>
+                <a:ea typeface="IBM Plex Mono" pitchFamily="34" charset="-122"/>
+                <a:cs typeface="IBM Plex Mono" pitchFamily="34" charset="-120"/>
+              </a:rPr>
+              <a:t>06 / 15</a:t>
+            </a:r>
+            <a:endParaRPr lang="en-US" sz="1000" dirty="0"/>
+          </a:p>
+        </p:txBody>
+      </p:sp>
+    </p:spTree>
+  </p:cSld>
+  <p:clrMapOvr>
+    <a:masterClrMapping/>
+  </p:clrMapOvr>
+  <p:transition spd="fast">
+    <p:fade/>
+  </p:transition>
+</p:sld>
+</file>
+
+<file path=ppt/slides/slide7.xml><?xml version="1.0" encoding="utf-8"?>
+<p:sld xmlns:a="http://schemas.openxmlformats.org/drawingml/2006/main" xmlns:r="http://schemas.openxmlformats.org/officeDocument/2006/relationships" xmlns:p="http://schemas.openxmlformats.org/presentationml/2006/main">
+  <p:cSld name="Slide 7">
+    <p:bg>
+      <p:bgPr>
+        <a:solidFill>
+          <a:srgbClr val="F4F5F7"/>
+        </a:solidFill>
+      </p:bgPr>
+    </p:bg>
+    <p:spTree>
+      <p:nvGrpSpPr>
+        <p:cNvPr id="1" name=""/>
+        <p:cNvGrpSpPr/>
+        <p:nvPr/>
+      </p:nvGrpSpPr>
+      <p:grpSpPr>
+        <a:xfrm>
+          <a:off x="0" y="0"/>
+          <a:ext cx="0" cy="0"/>
+          <a:chOff x="0" y="0"/>
+          <a:chExt cx="0" cy="0"/>
+        </a:xfrm>
+      </p:grpSpPr>
+      <p:sp>
+        <p:nvSpPr>
+          <p:cNvPr id="2" name="Text 0"/>
+          <p:cNvSpPr txBox="1"/>
+          <p:nvPr/>
+        </p:nvSpPr>
+        <p:spPr>
+          <a:xfrm>
+            <a:off x="762000" y="558800"/>
+            <a:ext cx="8890000" cy="190500"/>
+          </a:xfrm>
+          <a:prstGeom prst="rect">
+            <a:avLst/>
+          </a:prstGeom>
+          <a:noFill/>
+          <a:ln/>
+        </p:spPr>
+        <p:txBody>
+          <a:bodyPr wrap="square" lIns="0" tIns="0" rIns="0" bIns="0" rtlCol="0" anchor="t"/>
+          <a:lstStyle/>
+          <a:p>
+            <a:pPr algn="l" indent="0" marL="0">
+              <a:lnSpc>
+                <a:spcPct val="115000"/>
+              </a:lnSpc>
+              <a:buNone/>
+            </a:pPr>
+            <a:r>
+              <a:rPr lang="en-US" sz="1100" b="1" spc="90" kern="0" dirty="0">
+                <a:solidFill>
+                  <a:srgbClr val="616C7A"/>
+                </a:solidFill>
+                <a:latin typeface="Public Sans" pitchFamily="34" charset="0"/>
+                <a:ea typeface="Public Sans" pitchFamily="34" charset="-122"/>
+                <a:cs typeface="Public Sans" pitchFamily="34" charset="-120"/>
+              </a:rPr>
+              <a:t>THE PRODUCT · OFFICER</a:t>
+            </a:r>
+            <a:endParaRPr lang="en-US" sz="1100" dirty="0"/>
+          </a:p>
+        </p:txBody>
+      </p:sp>
+      <p:sp>
+        <p:nvSpPr>
+          <p:cNvPr id="3" name="Text 1"/>
+          <p:cNvSpPr txBox="1"/>
+          <p:nvPr/>
+        </p:nvSpPr>
+        <p:spPr>
+          <a:xfrm>
+            <a:off x="762000" y="863600"/>
+            <a:ext cx="10668000" cy="635000"/>
+          </a:xfrm>
+          <a:prstGeom prst="rect">
+            <a:avLst/>
+          </a:prstGeom>
+          <a:noFill/>
+          <a:ln/>
+        </p:spPr>
+        <p:txBody>
+          <a:bodyPr wrap="square" lIns="0" tIns="0" rIns="0" bIns="0" rtlCol="0" anchor="t"/>
+          <a:lstStyle/>
+          <a:p>
+            <a:pPr algn="l" indent="0" marL="0">
+              <a:lnSpc>
+                <a:spcPct val="108000"/>
+              </a:lnSpc>
+              <a:buNone/>
+            </a:pPr>
+            <a:r>
+              <a:rPr lang="en-US" sz="2000" dirty="0">
+                <a:solidFill>
+                  <a:srgbClr val="1B2430"/>
+                </a:solidFill>
+                <a:latin typeface="Instrument Serif" pitchFamily="34" charset="0"/>
+                <a:ea typeface="Instrument Serif" pitchFamily="34" charset="-122"/>
+                <a:cs typeface="Instrument Serif" pitchFamily="34" charset="-120"/>
+              </a:rPr>
+              <a:t>The officer's side: findings with evidence beside each document, and a compare view for every round.</a:t>
+            </a:r>
+            <a:endParaRPr lang="en-US" sz="2000" dirty="0"/>
+          </a:p>
+        </p:txBody>
+      </p:sp>
+      <p:sp>
+        <p:nvSpPr>
+          <p:cNvPr id="4" name="Shape 2"/>
+          <p:cNvSpPr/>
+          <p:nvPr/>
+        </p:nvSpPr>
+        <p:spPr>
+          <a:xfrm>
+            <a:off x="755650" y="1657350"/>
+            <a:ext cx="5194300" cy="2927350"/>
+          </a:xfrm>
+          <a:prstGeom prst="roundRect">
+            <a:avLst>
+              <a:gd name="adj" fmla="val 1302"/>
+            </a:avLst>
+          </a:prstGeom>
+          <a:solidFill>
+            <a:srgbClr val="FFFFFF"/>
+          </a:solidFill>
+          <a:ln w="9525">
+            <a:solidFill>
+              <a:srgbClr val="DDE1E7"/>
+            </a:solidFill>
+            <a:prstDash val="solid"/>
+          </a:ln>
+          <a:effectLst>
+            <a:outerShdw sx="100000" sy="100000" kx="0" ky="0" algn="bl" rotWithShape="0" blurRad="38100" dist="12700" dir="5400000">
+              <a:srgbClr val="101828">
+                <a:alpha val="8000"/>
+              </a:srgbClr>
+            </a:outerShdw>
+          </a:effectLst>
+        </p:spPr>
+      </p:sp>
+      <p:pic>
+        <p:nvPicPr>
+          <p:cNvPr id="5" name="Image 0" descr="/Users/suhaasnv/Documents/Desktop ALT/portfolioprojects/permitflow/notes/pitch/pitch-deck/pptx/build/officer-case-findings-16x9.png">    </p:cNvPr>
+          <p:cNvPicPr>
+            <a:picLocks noChangeAspect="1"/>
+          </p:cNvPicPr>
+          <p:nvPr/>
+        </p:nvPicPr>
+        <p:blipFill>
+          <a:blip r:embed="rId1"/>
+          <a:stretch>
+            <a:fillRect/>
+          </a:stretch>
+        </p:blipFill>
+        <p:spPr>
+          <a:xfrm>
+            <a:off x="762000" y="1663700"/>
+            <a:ext cx="5181600" cy="2914650"/>
+          </a:xfrm>
+          <a:prstGeom prst="rect">
+            <a:avLst/>
+          </a:prstGeom>
+        </p:spPr>
+      </p:pic>
+      <p:sp>
+        <p:nvSpPr>
+          <p:cNvPr id="6" name="Shape 3"/>
+          <p:cNvSpPr/>
+          <p:nvPr/>
+        </p:nvSpPr>
+        <p:spPr>
+          <a:xfrm>
+            <a:off x="762000" y="4679950"/>
             <a:ext cx="721360" cy="203200"/>
           </a:xfrm>
           <a:prstGeom prst="roundRect">
@@ -14863,13 +18610,13 @@
       </p:sp>
       <p:sp>
         <p:nvSpPr>
-          <p:cNvPr id="12" name="Text 8"/>
+          <p:cNvPr id="7" name="Text 4"/>
           <p:cNvSpPr txBox="1"/>
           <p:nvPr/>
         </p:nvSpPr>
         <p:spPr>
           <a:xfrm>
-            <a:off x="6248400" y="4679950"/>
+            <a:off x="762000" y="4679950"/>
             <a:ext cx="721360" cy="203200"/>
           </a:xfrm>
           <a:prstGeom prst="rect">
@@ -14905,13 +18652,13 @@
       </p:sp>
       <p:sp>
         <p:nvSpPr>
-          <p:cNvPr id="13" name="Text 9"/>
+          <p:cNvPr id="8" name="Text 5"/>
           <p:cNvSpPr txBox="1"/>
           <p:nvPr/>
         </p:nvSpPr>
         <p:spPr>
           <a:xfrm>
-            <a:off x="7045960" y="4667250"/>
+            <a:off x="1559560" y="4667250"/>
             <a:ext cx="4384040" cy="381000"/>
           </a:xfrm>
           <a:prstGeom prst="rect">
@@ -14939,6 +18686,175 @@
                 <a:ea typeface="Public Sans" pitchFamily="34" charset="-122"/>
                 <a:cs typeface="Public Sans" pitchFamily="34" charset="-120"/>
               </a:rPr>
+              <a:t>Case: findings with evidence beside each document, feedback rail on the right</a:t>
+            </a:r>
+            <a:endParaRPr lang="en-US" sz="1000" dirty="0"/>
+          </a:p>
+        </p:txBody>
+      </p:sp>
+      <p:sp>
+        <p:nvSpPr>
+          <p:cNvPr id="9" name="Shape 6"/>
+          <p:cNvSpPr/>
+          <p:nvPr/>
+        </p:nvSpPr>
+        <p:spPr>
+          <a:xfrm>
+            <a:off x="6242050" y="1657350"/>
+            <a:ext cx="5194300" cy="2927350"/>
+          </a:xfrm>
+          <a:prstGeom prst="roundRect">
+            <a:avLst>
+              <a:gd name="adj" fmla="val 1302"/>
+            </a:avLst>
+          </a:prstGeom>
+          <a:solidFill>
+            <a:srgbClr val="FFFFFF"/>
+          </a:solidFill>
+          <a:ln w="9525">
+            <a:solidFill>
+              <a:srgbClr val="DDE1E7"/>
+            </a:solidFill>
+            <a:prstDash val="solid"/>
+          </a:ln>
+          <a:effectLst>
+            <a:outerShdw sx="100000" sy="100000" kx="0" ky="0" algn="bl" rotWithShape="0" blurRad="38100" dist="12700" dir="5400000">
+              <a:srgbClr val="101828">
+                <a:alpha val="8000"/>
+              </a:srgbClr>
+            </a:outerShdw>
+          </a:effectLst>
+        </p:spPr>
+      </p:sp>
+      <p:pic>
+        <p:nvPicPr>
+          <p:cNvPr id="10" name="Image 1" descr="/Users/suhaasnv/Documents/Desktop ALT/portfolioprojects/permitflow/notes/pitch/pitch-deck/pptx/build/officer-compare-16x9.png">    </p:cNvPr>
+          <p:cNvPicPr>
+            <a:picLocks noChangeAspect="1"/>
+          </p:cNvPicPr>
+          <p:nvPr/>
+        </p:nvPicPr>
+        <p:blipFill>
+          <a:blip r:embed="rId2"/>
+          <a:stretch>
+            <a:fillRect/>
+          </a:stretch>
+        </p:blipFill>
+        <p:spPr>
+          <a:xfrm>
+            <a:off x="6248400" y="1663700"/>
+            <a:ext cx="5181600" cy="2914650"/>
+          </a:xfrm>
+          <a:prstGeom prst="rect">
+            <a:avLst/>
+          </a:prstGeom>
+        </p:spPr>
+      </p:pic>
+      <p:sp>
+        <p:nvSpPr>
+          <p:cNvPr id="11" name="Shape 7"/>
+          <p:cNvSpPr/>
+          <p:nvPr/>
+        </p:nvSpPr>
+        <p:spPr>
+          <a:xfrm>
+            <a:off x="6248400" y="4679950"/>
+            <a:ext cx="721360" cy="203200"/>
+          </a:xfrm>
+          <a:prstGeom prst="roundRect">
+            <a:avLst>
+              <a:gd name="adj" fmla="val 18750"/>
+            </a:avLst>
+          </a:prstGeom>
+          <a:solidFill>
+            <a:srgbClr val="EEF4FF"/>
+          </a:solidFill>
+          <a:ln w="9525">
+            <a:solidFill>
+              <a:srgbClr val="B2CCFA"/>
+            </a:solidFill>
+            <a:prstDash val="solid"/>
+          </a:ln>
+        </p:spPr>
+      </p:sp>
+      <p:sp>
+        <p:nvSpPr>
+          <p:cNvPr id="12" name="Text 8"/>
+          <p:cNvSpPr txBox="1"/>
+          <p:nvPr/>
+        </p:nvSpPr>
+        <p:spPr>
+          <a:xfrm>
+            <a:off x="6248400" y="4679950"/>
+            <a:ext cx="721360" cy="203200"/>
+          </a:xfrm>
+          <a:prstGeom prst="rect">
+            <a:avLst/>
+          </a:prstGeom>
+          <a:noFill/>
+          <a:ln/>
+        </p:spPr>
+        <p:txBody>
+          <a:bodyPr wrap="none" lIns="0" tIns="0" rIns="0" bIns="0" rtlCol="0" anchor="ctr"/>
+          <a:lstStyle/>
+          <a:p>
+            <a:pPr algn="ctr" indent="0" marL="0">
+              <a:lnSpc>
+                <a:spcPct val="115000"/>
+              </a:lnSpc>
+              <a:buNone/>
+            </a:pPr>
+            <a:r>
+              <a:rPr lang="en-US" sz="1000" b="1" dirty="0">
+                <a:solidFill>
+                  <a:srgbClr val="175CD3"/>
+                </a:solidFill>
+                <a:latin typeface="Public Sans" pitchFamily="34" charset="0"/>
+                <a:ea typeface="Public Sans" pitchFamily="34" charset="-122"/>
+                <a:cs typeface="Public Sans" pitchFamily="34" charset="-120"/>
+              </a:rPr>
+              <a:t>Officer</a:t>
+            </a:r>
+            <a:endParaRPr lang="en-US" sz="1000" dirty="0"/>
+          </a:p>
+        </p:txBody>
+      </p:sp>
+      <p:sp>
+        <p:nvSpPr>
+          <p:cNvPr id="13" name="Text 9"/>
+          <p:cNvSpPr txBox="1"/>
+          <p:nvPr/>
+        </p:nvSpPr>
+        <p:spPr>
+          <a:xfrm>
+            <a:off x="7045960" y="4667250"/>
+            <a:ext cx="4384040" cy="381000"/>
+          </a:xfrm>
+          <a:prstGeom prst="rect">
+            <a:avLst/>
+          </a:prstGeom>
+          <a:noFill/>
+          <a:ln/>
+        </p:spPr>
+        <p:txBody>
+          <a:bodyPr wrap="square" lIns="0" tIns="0" rIns="0" bIns="0" rtlCol="0" anchor="t"/>
+          <a:lstStyle/>
+          <a:p>
+            <a:pPr algn="l" indent="0" marL="0">
+              <a:lnSpc>
+                <a:spcPct val="115000"/>
+              </a:lnSpc>
+              <a:buNone/>
+            </a:pPr>
+            <a:r>
+              <a:rPr lang="en-US" sz="1000" dirty="0">
+                <a:solidFill>
+                  <a:srgbClr val="465060"/>
+                </a:solidFill>
+                <a:latin typeface="Public Sans" pitchFamily="34" charset="0"/>
+                <a:ea typeface="Public Sans" pitchFamily="34" charset="-122"/>
+                <a:cs typeface="Public Sans" pitchFamily="34" charset="-120"/>
+              </a:rPr>
               <a:t>Compare revisions: what changed, and each item's resolution</a:t>
             </a:r>
             <a:endParaRPr lang="en-US" sz="1000" dirty="0"/>
@@ -14981,7 +18897,7 @@
                 <a:ea typeface="IBM Plex Mono" pitchFamily="34" charset="-122"/>
                 <a:cs typeface="IBM Plex Mono" pitchFamily="34" charset="-120"/>
               </a:rPr>
-              <a:t>05 / 13</a:t>
+              <a:t>07 / 15</a:t>
             </a:r>
             <a:endParaRPr lang="en-US" sz="1000" dirty="0"/>
           </a:p>
@@ -15458,9 +19374,9 @@
 </p:sld>
 </file>
 
-<file path=ppt/slides/slide6.xml><?xml version="1.0" encoding="utf-8"?>
+<file path=ppt/slides/slide8.xml><?xml version="1.0" encoding="utf-8"?>
 <p:sld xmlns:a="http://schemas.openxmlformats.org/drawingml/2006/main" xmlns:r="http://schemas.openxmlformats.org/officeDocument/2006/relationships" xmlns:p="http://schemas.openxmlformats.org/presentationml/2006/main">
-  <p:cSld name="Slide 6">
+  <p:cSld name="Slide 8">
     <p:bg>
       <p:bgPr>
         <a:solidFill>
@@ -16763,7 +20679,7 @@
                 <a:ea typeface="IBM Plex Mono" pitchFamily="34" charset="-122"/>
                 <a:cs typeface="IBM Plex Mono" pitchFamily="34" charset="-120"/>
               </a:rPr>
-              <a:t>06 / 13</a:t>
+              <a:t>08 / 15</a:t>
             </a:r>
             <a:endParaRPr lang="en-US" sz="1000" dirty="0"/>
           </a:p>
@@ -16780,9 +20696,9 @@
 </p:sld>
 </file>
 
-<file path=ppt/slides/slide7.xml><?xml version="1.0" encoding="utf-8"?>
+<file path=ppt/slides/slide9.xml><?xml version="1.0" encoding="utf-8"?>
 <p:sld xmlns:a="http://schemas.openxmlformats.org/drawingml/2006/main" xmlns:r="http://schemas.openxmlformats.org/officeDocument/2006/relationships" xmlns:p="http://schemas.openxmlformats.org/presentationml/2006/main">
-  <p:cSld name="Slide 7">
+  <p:cSld name="Slide 9">
     <p:bg>
       <p:bgPr>
         <a:solidFill>
@@ -20803,7 +24719,7 @@
                 <a:ea typeface="IBM Plex Mono" pitchFamily="34" charset="-122"/>
                 <a:cs typeface="IBM Plex Mono" pitchFamily="34" charset="-120"/>
               </a:rPr>
-              <a:t>07 / 13</a:t>
+              <a:t>09 / 15</a:t>
             </a:r>
             <a:endParaRPr lang="en-US" sz="1000" dirty="0"/>
           </a:p>
@@ -25727,3374 +29643,6 @@
       <p:bldP spid="114" grpId="0" animBg="1"/>
     </p:bldLst>
   </p:timing>
-</p:sld>
-</file>
-
-<file path=ppt/slides/slide8.xml><?xml version="1.0" encoding="utf-8"?>
-<p:sld xmlns:a="http://schemas.openxmlformats.org/drawingml/2006/main" xmlns:r="http://schemas.openxmlformats.org/officeDocument/2006/relationships" xmlns:p="http://schemas.openxmlformats.org/presentationml/2006/main">
-  <p:cSld name="Slide 8">
-    <p:bg>
-      <p:bgPr>
-        <a:solidFill>
-          <a:srgbClr val="F4F5F7"/>
-        </a:solidFill>
-      </p:bgPr>
-    </p:bg>
-    <p:spTree>
-      <p:nvGrpSpPr>
-        <p:cNvPr id="1" name=""/>
-        <p:cNvGrpSpPr/>
-        <p:nvPr/>
-      </p:nvGrpSpPr>
-      <p:grpSpPr>
-        <a:xfrm>
-          <a:off x="0" y="0"/>
-          <a:ext cx="0" cy="0"/>
-          <a:chOff x="0" y="0"/>
-          <a:chExt cx="0" cy="0"/>
-        </a:xfrm>
-      </p:grpSpPr>
-      <p:sp>
-        <p:nvSpPr>
-          <p:cNvPr id="2" name="Text 0"/>
-          <p:cNvSpPr txBox="1"/>
-          <p:nvPr/>
-        </p:nvSpPr>
-        <p:spPr>
-          <a:xfrm>
-            <a:off x="762000" y="558800"/>
-            <a:ext cx="8890000" cy="190500"/>
-          </a:xfrm>
-          <a:prstGeom prst="rect">
-            <a:avLst/>
-          </a:prstGeom>
-          <a:noFill/>
-          <a:ln/>
-        </p:spPr>
-        <p:txBody>
-          <a:bodyPr wrap="square" lIns="0" tIns="0" rIns="0" bIns="0" rtlCol="0" anchor="t"/>
-          <a:lstStyle/>
-          <a:p>
-            <a:pPr algn="l" indent="0" marL="0">
-              <a:lnSpc>
-                <a:spcPct val="115000"/>
-              </a:lnSpc>
-              <a:buNone/>
-            </a:pPr>
-            <a:r>
-              <a:rPr lang="en-US" sz="1100" b="1" spc="90" kern="0" dirty="0">
-                <a:solidFill>
-                  <a:srgbClr val="616C7A"/>
-                </a:solidFill>
-                <a:latin typeface="Public Sans" pitchFamily="34" charset="0"/>
-                <a:ea typeface="Public Sans" pitchFamily="34" charset="-122"/>
-                <a:cs typeface="Public Sans" pitchFamily="34" charset="-120"/>
-              </a:rPr>
-              <a:t>WHAT MAKES IT DIFFERENT</a:t>
-            </a:r>
-            <a:endParaRPr lang="en-US" sz="1100" dirty="0"/>
-          </a:p>
-        </p:txBody>
-      </p:sp>
-      <p:sp>
-        <p:nvSpPr>
-          <p:cNvPr id="3" name="Text 1"/>
-          <p:cNvSpPr txBox="1"/>
-          <p:nvPr/>
-        </p:nvSpPr>
-        <p:spPr>
-          <a:xfrm>
-            <a:off x="762000" y="863600"/>
-            <a:ext cx="9906000" cy="508000"/>
-          </a:xfrm>
-          <a:prstGeom prst="rect">
-            <a:avLst/>
-          </a:prstGeom>
-          <a:noFill/>
-          <a:ln/>
-        </p:spPr>
-        <p:txBody>
-          <a:bodyPr wrap="square" lIns="0" tIns="0" rIns="0" bIns="0" rtlCol="0" anchor="t"/>
-          <a:lstStyle/>
-          <a:p>
-            <a:pPr algn="l" indent="0" marL="0">
-              <a:lnSpc>
-                <a:spcPct val="108000"/>
-              </a:lnSpc>
-              <a:buNone/>
-            </a:pPr>
-            <a:r>
-              <a:rPr lang="en-US" sz="3000" dirty="0">
-                <a:solidFill>
-                  <a:srgbClr val="1B2430"/>
-                </a:solidFill>
-                <a:latin typeface="Instrument Serif" pitchFamily="34" charset="0"/>
-                <a:ea typeface="Instrument Serif" pitchFamily="34" charset="-122"/>
-                <a:cs typeface="Instrument Serif" pitchFamily="34" charset="-120"/>
-              </a:rPr>
-              <a:t>Six principles, each enforced by code.</a:t>
-            </a:r>
-            <a:endParaRPr lang="en-US" sz="3000" dirty="0"/>
-          </a:p>
-        </p:txBody>
-      </p:sp>
-      <p:sp>
-        <p:nvSpPr>
-          <p:cNvPr id="4" name="Shape 2"/>
-          <p:cNvSpPr/>
-          <p:nvPr/>
-        </p:nvSpPr>
-        <p:spPr>
-          <a:xfrm>
-            <a:off x="762000" y="1828800"/>
-            <a:ext cx="5156200" cy="0"/>
-          </a:xfrm>
-          <a:prstGeom prst="line">
-            <a:avLst/>
-          </a:prstGeom>
-          <a:noFill/>
-          <a:ln w="9525">
-            <a:solidFill>
-              <a:srgbClr val="DDE1E7"/>
-            </a:solidFill>
-            <a:prstDash val="solid"/>
-          </a:ln>
-        </p:spPr>
-      </p:sp>
-      <p:sp>
-        <p:nvSpPr>
-          <p:cNvPr id="5" name="Text 3"/>
-          <p:cNvSpPr txBox="1"/>
-          <p:nvPr/>
-        </p:nvSpPr>
-        <p:spPr>
-          <a:xfrm>
-            <a:off x="762000" y="2019300"/>
-            <a:ext cx="317500" cy="190500"/>
-          </a:xfrm>
-          <a:prstGeom prst="rect">
-            <a:avLst/>
-          </a:prstGeom>
-          <a:noFill/>
-          <a:ln/>
-        </p:spPr>
-        <p:txBody>
-          <a:bodyPr wrap="square" lIns="0" tIns="0" rIns="0" bIns="0" rtlCol="0" anchor="t"/>
-          <a:lstStyle/>
-          <a:p>
-            <a:pPr algn="l" indent="0" marL="0">
-              <a:lnSpc>
-                <a:spcPct val="115000"/>
-              </a:lnSpc>
-              <a:buNone/>
-            </a:pPr>
-            <a:r>
-              <a:rPr lang="en-US" sz="1100" dirty="0">
-                <a:solidFill>
-                  <a:srgbClr val="616C7A"/>
-                </a:solidFill>
-                <a:latin typeface="IBM Plex Mono" pitchFamily="34" charset="0"/>
-                <a:ea typeface="IBM Plex Mono" pitchFamily="34" charset="-122"/>
-                <a:cs typeface="IBM Plex Mono" pitchFamily="34" charset="-120"/>
-              </a:rPr>
-              <a:t>01</a:t>
-            </a:r>
-            <a:endParaRPr lang="en-US" sz="1100" dirty="0"/>
-          </a:p>
-        </p:txBody>
-      </p:sp>
-      <p:sp>
-        <p:nvSpPr>
-          <p:cNvPr id="6" name="Text 4"/>
-          <p:cNvSpPr txBox="1"/>
-          <p:nvPr/>
-        </p:nvSpPr>
-        <p:spPr>
-          <a:xfrm>
-            <a:off x="1206500" y="1981200"/>
-            <a:ext cx="4711700" cy="1320800"/>
-          </a:xfrm>
-          <a:prstGeom prst="rect">
-            <a:avLst/>
-          </a:prstGeom>
-          <a:noFill/>
-          <a:ln/>
-        </p:spPr>
-        <p:txBody>
-          <a:bodyPr wrap="square" lIns="0" tIns="0" rIns="0" bIns="0" rtlCol="0" anchor="t"/>
-          <a:lstStyle/>
-          <a:p>
-            <a:pPr algn="l" indent="0" marL="0">
-              <a:lnSpc>
-                <a:spcPct val="130000"/>
-              </a:lnSpc>
-              <a:spcAft>
-                <a:spcPts val="600"/>
-              </a:spcAft>
-              <a:buNone/>
-            </a:pPr>
-            <a:r>
-              <a:rPr lang="en-US" sz="1500" b="1" dirty="0">
-                <a:solidFill>
-                  <a:srgbClr val="1B2430"/>
-                </a:solidFill>
-                <a:latin typeface="Public Sans" pitchFamily="34" charset="0"/>
-                <a:ea typeface="Public Sans" pitchFamily="34" charset="-122"/>
-                <a:cs typeface="Public Sans" pitchFamily="34" charset="-120"/>
-              </a:rPr>
-              <a:t>Continuous workflow</a:t>
-            </a:r>
-            <a:endParaRPr lang="en-US" sz="1200" dirty="0"/>
-          </a:p>
-          <a:p>
-            <a:pPr algn="l" indent="0" marL="0">
-              <a:lnSpc>
-                <a:spcPct val="130000"/>
-              </a:lnSpc>
-              <a:spcAft>
-                <a:spcPts val="800"/>
-              </a:spcAft>
-              <a:buNone/>
-            </a:pPr>
-            <a:r>
-              <a:rPr lang="en-US" sz="1200" dirty="0">
-                <a:solidFill>
-                  <a:srgbClr val="465060"/>
-                </a:solidFill>
-                <a:latin typeface="Public Sans" pitchFamily="34" charset="0"/>
-                <a:ea typeface="Public Sans" pitchFamily="34" charset="-122"/>
-                <a:cs typeface="Public Sans" pitchFamily="34" charset="-120"/>
-              </a:rPr>
-              <a:t>One application, any number of rounds. Fourteen states with actors, guards and labels as a table; every status change goes through one function.</a:t>
-            </a:r>
-            <a:endParaRPr lang="en-US" sz="1200" dirty="0"/>
-          </a:p>
-          <a:p>
-            <a:pPr algn="l" indent="0" marL="0">
-              <a:lnSpc>
-                <a:spcPct val="130000"/>
-              </a:lnSpc>
-              <a:buNone/>
-            </a:pPr>
-            <a:endParaRPr lang="en-US" sz="1200" dirty="0"/>
-          </a:p>
-        </p:txBody>
-      </p:sp>
-      <p:sp>
-        <p:nvSpPr>
-          <p:cNvPr id="7" name="Shape 5"/>
-          <p:cNvSpPr/>
-          <p:nvPr/>
-        </p:nvSpPr>
-        <p:spPr>
-          <a:xfrm>
-            <a:off x="762000" y="3403600"/>
-            <a:ext cx="5156200" cy="0"/>
-          </a:xfrm>
-          <a:prstGeom prst="line">
-            <a:avLst/>
-          </a:prstGeom>
-          <a:noFill/>
-          <a:ln w="9525">
-            <a:solidFill>
-              <a:srgbClr val="DDE1E7"/>
-            </a:solidFill>
-            <a:prstDash val="solid"/>
-          </a:ln>
-        </p:spPr>
-      </p:sp>
-      <p:sp>
-        <p:nvSpPr>
-          <p:cNvPr id="8" name="Text 6"/>
-          <p:cNvSpPr txBox="1"/>
-          <p:nvPr/>
-        </p:nvSpPr>
-        <p:spPr>
-          <a:xfrm>
-            <a:off x="762000" y="3594100"/>
-            <a:ext cx="317500" cy="190500"/>
-          </a:xfrm>
-          <a:prstGeom prst="rect">
-            <a:avLst/>
-          </a:prstGeom>
-          <a:noFill/>
-          <a:ln/>
-        </p:spPr>
-        <p:txBody>
-          <a:bodyPr wrap="square" lIns="0" tIns="0" rIns="0" bIns="0" rtlCol="0" anchor="t"/>
-          <a:lstStyle/>
-          <a:p>
-            <a:pPr algn="l" indent="0" marL="0">
-              <a:lnSpc>
-                <a:spcPct val="115000"/>
-              </a:lnSpc>
-              <a:buNone/>
-            </a:pPr>
-            <a:r>
-              <a:rPr lang="en-US" sz="1100" dirty="0">
-                <a:solidFill>
-                  <a:srgbClr val="616C7A"/>
-                </a:solidFill>
-                <a:latin typeface="IBM Plex Mono" pitchFamily="34" charset="0"/>
-                <a:ea typeface="IBM Plex Mono" pitchFamily="34" charset="-122"/>
-                <a:cs typeface="IBM Plex Mono" pitchFamily="34" charset="-120"/>
-              </a:rPr>
-              <a:t>02</a:t>
-            </a:r>
-            <a:endParaRPr lang="en-US" sz="1100" dirty="0"/>
-          </a:p>
-        </p:txBody>
-      </p:sp>
-      <p:sp>
-        <p:nvSpPr>
-          <p:cNvPr id="9" name="Text 7"/>
-          <p:cNvSpPr txBox="1"/>
-          <p:nvPr/>
-        </p:nvSpPr>
-        <p:spPr>
-          <a:xfrm>
-            <a:off x="1206500" y="3556000"/>
-            <a:ext cx="4711700" cy="1320800"/>
-          </a:xfrm>
-          <a:prstGeom prst="rect">
-            <a:avLst/>
-          </a:prstGeom>
-          <a:noFill/>
-          <a:ln/>
-        </p:spPr>
-        <p:txBody>
-          <a:bodyPr wrap="square" lIns="0" tIns="0" rIns="0" bIns="0" rtlCol="0" anchor="t"/>
-          <a:lstStyle/>
-          <a:p>
-            <a:pPr algn="l" indent="0" marL="0">
-              <a:lnSpc>
-                <a:spcPct val="130000"/>
-              </a:lnSpc>
-              <a:spcAft>
-                <a:spcPts val="600"/>
-              </a:spcAft>
-              <a:buNone/>
-            </a:pPr>
-            <a:r>
-              <a:rPr lang="en-US" sz="1500" b="1" dirty="0">
-                <a:solidFill>
-                  <a:srgbClr val="1B2430"/>
-                </a:solidFill>
-                <a:latin typeface="Public Sans" pitchFamily="34" charset="0"/>
-                <a:ea typeface="Public Sans" pitchFamily="34" charset="-122"/>
-                <a:cs typeface="Public Sans" pitchFamily="34" charset="-120"/>
-              </a:rPr>
-              <a:t>Immutable revisions</a:t>
-            </a:r>
-            <a:endParaRPr lang="en-US" sz="1200" dirty="0"/>
-          </a:p>
-          <a:p>
-            <a:pPr algn="l" indent="0" marL="0">
-              <a:lnSpc>
-                <a:spcPct val="130000"/>
-              </a:lnSpc>
-              <a:spcAft>
-                <a:spcPts val="800"/>
-              </a:spcAft>
-              <a:buNone/>
-            </a:pPr>
-            <a:r>
-              <a:rPr lang="en-US" sz="1200" dirty="0">
-                <a:solidFill>
-                  <a:srgbClr val="465060"/>
-                </a:solidFill>
-                <a:latin typeface="Public Sans" pitchFamily="34" charset="0"/>
-                <a:ea typeface="Public Sans" pitchFamily="34" charset="-122"/>
-                <a:cs typeface="Public Sans" pitchFamily="34" charset="-120"/>
-              </a:rPr>
-              <a:t>Every submission is a snapshot. The compare view is a read-time diff, computed and never stored, so nothing is lost between rounds by construction.</a:t>
-            </a:r>
-            <a:endParaRPr lang="en-US" sz="1200" dirty="0"/>
-          </a:p>
-          <a:p>
-            <a:pPr algn="l" indent="0" marL="0">
-              <a:lnSpc>
-                <a:spcPct val="130000"/>
-              </a:lnSpc>
-              <a:buNone/>
-            </a:pPr>
-            <a:endParaRPr lang="en-US" sz="1200" dirty="0"/>
-          </a:p>
-        </p:txBody>
-      </p:sp>
-      <p:sp>
-        <p:nvSpPr>
-          <p:cNvPr id="10" name="Shape 8"/>
-          <p:cNvSpPr/>
-          <p:nvPr/>
-        </p:nvSpPr>
-        <p:spPr>
-          <a:xfrm>
-            <a:off x="762000" y="4978400"/>
-            <a:ext cx="5156200" cy="0"/>
-          </a:xfrm>
-          <a:prstGeom prst="line">
-            <a:avLst/>
-          </a:prstGeom>
-          <a:noFill/>
-          <a:ln w="9525">
-            <a:solidFill>
-              <a:srgbClr val="DDE1E7"/>
-            </a:solidFill>
-            <a:prstDash val="solid"/>
-          </a:ln>
-        </p:spPr>
-      </p:sp>
-      <p:sp>
-        <p:nvSpPr>
-          <p:cNvPr id="11" name="Text 9"/>
-          <p:cNvSpPr txBox="1"/>
-          <p:nvPr/>
-        </p:nvSpPr>
-        <p:spPr>
-          <a:xfrm>
-            <a:off x="762000" y="5168900"/>
-            <a:ext cx="317500" cy="190500"/>
-          </a:xfrm>
-          <a:prstGeom prst="rect">
-            <a:avLst/>
-          </a:prstGeom>
-          <a:noFill/>
-          <a:ln/>
-        </p:spPr>
-        <p:txBody>
-          <a:bodyPr wrap="square" lIns="0" tIns="0" rIns="0" bIns="0" rtlCol="0" anchor="t"/>
-          <a:lstStyle/>
-          <a:p>
-            <a:pPr algn="l" indent="0" marL="0">
-              <a:lnSpc>
-                <a:spcPct val="115000"/>
-              </a:lnSpc>
-              <a:buNone/>
-            </a:pPr>
-            <a:r>
-              <a:rPr lang="en-US" sz="1100" dirty="0">
-                <a:solidFill>
-                  <a:srgbClr val="616C7A"/>
-                </a:solidFill>
-                <a:latin typeface="IBM Plex Mono" pitchFamily="34" charset="0"/>
-                <a:ea typeface="IBM Plex Mono" pitchFamily="34" charset="-122"/>
-                <a:cs typeface="IBM Plex Mono" pitchFamily="34" charset="-120"/>
-              </a:rPr>
-              <a:t>03</a:t>
-            </a:r>
-            <a:endParaRPr lang="en-US" sz="1100" dirty="0"/>
-          </a:p>
-        </p:txBody>
-      </p:sp>
-      <p:sp>
-        <p:nvSpPr>
-          <p:cNvPr id="12" name="Text 10"/>
-          <p:cNvSpPr txBox="1"/>
-          <p:nvPr/>
-        </p:nvSpPr>
-        <p:spPr>
-          <a:xfrm>
-            <a:off x="1206500" y="5130800"/>
-            <a:ext cx="4711700" cy="1320800"/>
-          </a:xfrm>
-          <a:prstGeom prst="rect">
-            <a:avLst/>
-          </a:prstGeom>
-          <a:noFill/>
-          <a:ln/>
-        </p:spPr>
-        <p:txBody>
-          <a:bodyPr wrap="square" lIns="0" tIns="0" rIns="0" bIns="0" rtlCol="0" anchor="t"/>
-          <a:lstStyle/>
-          <a:p>
-            <a:pPr algn="l" indent="0" marL="0">
-              <a:lnSpc>
-                <a:spcPct val="130000"/>
-              </a:lnSpc>
-              <a:spcAft>
-                <a:spcPts val="600"/>
-              </a:spcAft>
-              <a:buNone/>
-            </a:pPr>
-            <a:r>
-              <a:rPr lang="en-US" sz="1500" b="1" dirty="0">
-                <a:solidFill>
-                  <a:srgbClr val="1B2430"/>
-                </a:solidFill>
-                <a:latin typeface="Public Sans" pitchFamily="34" charset="0"/>
-                <a:ea typeface="Public Sans" pitchFamily="34" charset="-122"/>
-                <a:cs typeface="Public Sans" pitchFamily="34" charset="-120"/>
-              </a:rPr>
-              <a:t>Contextual feedback</a:t>
-            </a:r>
-            <a:endParaRPr lang="en-US" sz="1200" dirty="0"/>
-          </a:p>
-          <a:p>
-            <a:pPr algn="l" indent="0" marL="0">
-              <a:lnSpc>
-                <a:spcPct val="130000"/>
-              </a:lnSpc>
-              <a:spcAft>
-                <a:spcPts val="800"/>
-              </a:spcAft>
-              <a:buNone/>
-            </a:pPr>
-            <a:r>
-              <a:rPr lang="en-US" sz="1200" dirty="0">
-                <a:solidFill>
-                  <a:srgbClr val="465060"/>
-                </a:solidFill>
-                <a:latin typeface="Public Sans" pitchFamily="34" charset="0"/>
-                <a:ea typeface="Public Sans" pitchFamily="34" charset="-122"/>
-                <a:cs typeface="Public Sans" pitchFamily="34" charset="-120"/>
-              </a:rPr>
-              <a:t>Every item is tied to a section or a document. "Only the flagged parts" is an authorization rule: the server answers 403, the UI walks the operator through exactly those targets.</a:t>
-            </a:r>
-            <a:endParaRPr lang="en-US" sz="1200" dirty="0"/>
-          </a:p>
-          <a:p>
-            <a:pPr algn="l" indent="0" marL="0">
-              <a:lnSpc>
-                <a:spcPct val="130000"/>
-              </a:lnSpc>
-              <a:buNone/>
-            </a:pPr>
-            <a:endParaRPr lang="en-US" sz="1200" dirty="0"/>
-          </a:p>
-        </p:txBody>
-      </p:sp>
-      <p:sp>
-        <p:nvSpPr>
-          <p:cNvPr id="13" name="b1"/>
-          <p:cNvSpPr/>
-          <p:nvPr/>
-        </p:nvSpPr>
-        <p:spPr>
-          <a:xfrm>
-            <a:off x="6273800" y="1828800"/>
-            <a:ext cx="5156200" cy="0"/>
-          </a:xfrm>
-          <a:prstGeom prst="line">
-            <a:avLst/>
-          </a:prstGeom>
-          <a:noFill/>
-          <a:ln w="9525">
-            <a:solidFill>
-              <a:srgbClr val="DDE1E7"/>
-            </a:solidFill>
-            <a:prstDash val="solid"/>
-          </a:ln>
-        </p:spPr>
-      </p:sp>
-      <p:sp>
-        <p:nvSpPr>
-          <p:cNvPr id="14" name="b1"/>
-          <p:cNvSpPr txBox="1"/>
-          <p:nvPr/>
-        </p:nvSpPr>
-        <p:spPr>
-          <a:xfrm>
-            <a:off x="6273800" y="2019300"/>
-            <a:ext cx="317500" cy="190500"/>
-          </a:xfrm>
-          <a:prstGeom prst="rect">
-            <a:avLst/>
-          </a:prstGeom>
-          <a:noFill/>
-          <a:ln/>
-        </p:spPr>
-        <p:txBody>
-          <a:bodyPr wrap="square" lIns="0" tIns="0" rIns="0" bIns="0" rtlCol="0" anchor="t"/>
-          <a:lstStyle/>
-          <a:p>
-            <a:pPr algn="l" indent="0" marL="0">
-              <a:lnSpc>
-                <a:spcPct val="115000"/>
-              </a:lnSpc>
-              <a:buNone/>
-            </a:pPr>
-            <a:r>
-              <a:rPr lang="en-US" sz="1100" dirty="0">
-                <a:solidFill>
-                  <a:srgbClr val="616C7A"/>
-                </a:solidFill>
-                <a:latin typeface="IBM Plex Mono" pitchFamily="34" charset="0"/>
-                <a:ea typeface="IBM Plex Mono" pitchFamily="34" charset="-122"/>
-                <a:cs typeface="IBM Plex Mono" pitchFamily="34" charset="-120"/>
-              </a:rPr>
-              <a:t>04</a:t>
-            </a:r>
-            <a:endParaRPr lang="en-US" sz="1100" dirty="0"/>
-          </a:p>
-        </p:txBody>
-      </p:sp>
-      <p:sp>
-        <p:nvSpPr>
-          <p:cNvPr id="15" name="b1"/>
-          <p:cNvSpPr txBox="1"/>
-          <p:nvPr/>
-        </p:nvSpPr>
-        <p:spPr>
-          <a:xfrm>
-            <a:off x="6718300" y="1981200"/>
-            <a:ext cx="4711700" cy="1320800"/>
-          </a:xfrm>
-          <a:prstGeom prst="rect">
-            <a:avLst/>
-          </a:prstGeom>
-          <a:noFill/>
-          <a:ln/>
-        </p:spPr>
-        <p:txBody>
-          <a:bodyPr wrap="square" lIns="0" tIns="0" rIns="0" bIns="0" rtlCol="0" anchor="t"/>
-          <a:lstStyle/>
-          <a:p>
-            <a:pPr algn="l" indent="0" marL="0">
-              <a:lnSpc>
-                <a:spcPct val="130000"/>
-              </a:lnSpc>
-              <a:spcAft>
-                <a:spcPts val="600"/>
-              </a:spcAft>
-              <a:buNone/>
-            </a:pPr>
-            <a:r>
-              <a:rPr lang="en-US" sz="1500" b="1" dirty="0">
-                <a:solidFill>
-                  <a:srgbClr val="1B2430"/>
-                </a:solidFill>
-                <a:latin typeface="Public Sans" pitchFamily="34" charset="0"/>
-                <a:ea typeface="Public Sans" pitchFamily="34" charset="-122"/>
-                <a:cs typeface="Public Sans" pitchFamily="34" charset="-120"/>
-              </a:rPr>
-              <a:t>AI-assisted, never AI-decided</a:t>
-            </a:r>
-            <a:endParaRPr lang="en-US" sz="1200" dirty="0"/>
-          </a:p>
-          <a:p>
-            <a:pPr algn="l" indent="0" marL="0">
-              <a:lnSpc>
-                <a:spcPct val="130000"/>
-              </a:lnSpc>
-              <a:spcAft>
-                <a:spcPts val="800"/>
-              </a:spcAft>
-              <a:buNone/>
-            </a:pPr>
-            <a:r>
-              <a:rPr lang="en-US" sz="1200" dirty="0">
-                <a:solidFill>
-                  <a:srgbClr val="465060"/>
-                </a:solidFill>
-                <a:latin typeface="Public Sans" pitchFamily="34" charset="0"/>
-                <a:ea typeface="Public Sans" pitchFamily="34" charset="-122"/>
-                <a:cs typeface="Public Sans" pitchFamily="34" charset="-120"/>
-              </a:rPr>
-              <a:t>The verifier writes only to verification_runs. The state machine has no AI actor. Injection is handled by a deterministic rule before the verdict is read.</a:t>
-            </a:r>
-            <a:endParaRPr lang="en-US" sz="1200" dirty="0"/>
-          </a:p>
-          <a:p>
-            <a:pPr algn="l" indent="0" marL="0">
-              <a:lnSpc>
-                <a:spcPct val="130000"/>
-              </a:lnSpc>
-              <a:buNone/>
-            </a:pPr>
-            <a:endParaRPr lang="en-US" sz="1200" dirty="0"/>
-          </a:p>
-        </p:txBody>
-      </p:sp>
-      <p:sp>
-        <p:nvSpPr>
-          <p:cNvPr id="16" name="b1"/>
-          <p:cNvSpPr/>
-          <p:nvPr/>
-        </p:nvSpPr>
-        <p:spPr>
-          <a:xfrm>
-            <a:off x="6273800" y="3403600"/>
-            <a:ext cx="5156200" cy="0"/>
-          </a:xfrm>
-          <a:prstGeom prst="line">
-            <a:avLst/>
-          </a:prstGeom>
-          <a:noFill/>
-          <a:ln w="9525">
-            <a:solidFill>
-              <a:srgbClr val="DDE1E7"/>
-            </a:solidFill>
-            <a:prstDash val="solid"/>
-          </a:ln>
-        </p:spPr>
-      </p:sp>
-      <p:sp>
-        <p:nvSpPr>
-          <p:cNvPr id="17" name="b1"/>
-          <p:cNvSpPr txBox="1"/>
-          <p:nvPr/>
-        </p:nvSpPr>
-        <p:spPr>
-          <a:xfrm>
-            <a:off x="6273800" y="3594100"/>
-            <a:ext cx="317500" cy="190500"/>
-          </a:xfrm>
-          <a:prstGeom prst="rect">
-            <a:avLst/>
-          </a:prstGeom>
-          <a:noFill/>
-          <a:ln/>
-        </p:spPr>
-        <p:txBody>
-          <a:bodyPr wrap="square" lIns="0" tIns="0" rIns="0" bIns="0" rtlCol="0" anchor="t"/>
-          <a:lstStyle/>
-          <a:p>
-            <a:pPr algn="l" indent="0" marL="0">
-              <a:lnSpc>
-                <a:spcPct val="115000"/>
-              </a:lnSpc>
-              <a:buNone/>
-            </a:pPr>
-            <a:r>
-              <a:rPr lang="en-US" sz="1100" dirty="0">
-                <a:solidFill>
-                  <a:srgbClr val="616C7A"/>
-                </a:solidFill>
-                <a:latin typeface="IBM Plex Mono" pitchFamily="34" charset="0"/>
-                <a:ea typeface="IBM Plex Mono" pitchFamily="34" charset="-122"/>
-                <a:cs typeface="IBM Plex Mono" pitchFamily="34" charset="-120"/>
-              </a:rPr>
-              <a:t>05</a:t>
-            </a:r>
-            <a:endParaRPr lang="en-US" sz="1100" dirty="0"/>
-          </a:p>
-        </p:txBody>
-      </p:sp>
-      <p:sp>
-        <p:nvSpPr>
-          <p:cNvPr id="18" name="b1"/>
-          <p:cNvSpPr txBox="1"/>
-          <p:nvPr/>
-        </p:nvSpPr>
-        <p:spPr>
-          <a:xfrm>
-            <a:off x="6718300" y="3556000"/>
-            <a:ext cx="4711700" cy="1320800"/>
-          </a:xfrm>
-          <a:prstGeom prst="rect">
-            <a:avLst/>
-          </a:prstGeom>
-          <a:noFill/>
-          <a:ln/>
-        </p:spPr>
-        <p:txBody>
-          <a:bodyPr wrap="square" lIns="0" tIns="0" rIns="0" bIns="0" rtlCol="0" anchor="t"/>
-          <a:lstStyle/>
-          <a:p>
-            <a:pPr algn="l" indent="0" marL="0">
-              <a:lnSpc>
-                <a:spcPct val="130000"/>
-              </a:lnSpc>
-              <a:spcAft>
-                <a:spcPts val="600"/>
-              </a:spcAft>
-              <a:buNone/>
-            </a:pPr>
-            <a:r>
-              <a:rPr lang="en-US" sz="1500" b="1" dirty="0">
-                <a:solidFill>
-                  <a:srgbClr val="1B2430"/>
-                </a:solidFill>
-                <a:latin typeface="Public Sans" pitchFamily="34" charset="0"/>
-                <a:ea typeface="Public Sans" pitchFamily="34" charset="-122"/>
-                <a:cs typeface="Public Sans" pitchFamily="34" charset="-120"/>
-              </a:rPr>
-              <a:t>Same-transaction audit</a:t>
-            </a:r>
-            <a:endParaRPr lang="en-US" sz="1200" dirty="0"/>
-          </a:p>
-          <a:p>
-            <a:pPr algn="l" indent="0" marL="0">
-              <a:lnSpc>
-                <a:spcPct val="130000"/>
-              </a:lnSpc>
-              <a:spcAft>
-                <a:spcPts val="800"/>
-              </a:spcAft>
-              <a:buNone/>
-            </a:pPr>
-            <a:r>
-              <a:rPr lang="en-US" sz="1200" dirty="0">
-                <a:solidFill>
-                  <a:srgbClr val="465060"/>
-                </a:solidFill>
-                <a:latin typeface="Public Sans" pitchFamily="34" charset="0"/>
-                <a:ea typeface="Public Sans" pitchFamily="34" charset="-122"/>
-                <a:cs typeface="Public Sans" pitchFamily="34" charset="-120"/>
-              </a:rPr>
-              <a:t>A status change, its audit row, the operator's notification and, on approval, the licence certificate either all happen or none do.</a:t>
-            </a:r>
-            <a:endParaRPr lang="en-US" sz="1200" dirty="0"/>
-          </a:p>
-          <a:p>
-            <a:pPr algn="l" indent="0" marL="0">
-              <a:lnSpc>
-                <a:spcPct val="130000"/>
-              </a:lnSpc>
-              <a:buNone/>
-            </a:pPr>
-            <a:endParaRPr lang="en-US" sz="1200" dirty="0"/>
-          </a:p>
-        </p:txBody>
-      </p:sp>
-      <p:sp>
-        <p:nvSpPr>
-          <p:cNvPr id="19" name="b1"/>
-          <p:cNvSpPr/>
-          <p:nvPr/>
-        </p:nvSpPr>
-        <p:spPr>
-          <a:xfrm>
-            <a:off x="6273800" y="4978400"/>
-            <a:ext cx="5156200" cy="0"/>
-          </a:xfrm>
-          <a:prstGeom prst="line">
-            <a:avLst/>
-          </a:prstGeom>
-          <a:noFill/>
-          <a:ln w="9525">
-            <a:solidFill>
-              <a:srgbClr val="DDE1E7"/>
-            </a:solidFill>
-            <a:prstDash val="solid"/>
-          </a:ln>
-        </p:spPr>
-      </p:sp>
-      <p:sp>
-        <p:nvSpPr>
-          <p:cNvPr id="20" name="b1"/>
-          <p:cNvSpPr txBox="1"/>
-          <p:nvPr/>
-        </p:nvSpPr>
-        <p:spPr>
-          <a:xfrm>
-            <a:off x="6273800" y="5168900"/>
-            <a:ext cx="317500" cy="190500"/>
-          </a:xfrm>
-          <a:prstGeom prst="rect">
-            <a:avLst/>
-          </a:prstGeom>
-          <a:noFill/>
-          <a:ln/>
-        </p:spPr>
-        <p:txBody>
-          <a:bodyPr wrap="square" lIns="0" tIns="0" rIns="0" bIns="0" rtlCol="0" anchor="t"/>
-          <a:lstStyle/>
-          <a:p>
-            <a:pPr algn="l" indent="0" marL="0">
-              <a:lnSpc>
-                <a:spcPct val="115000"/>
-              </a:lnSpc>
-              <a:buNone/>
-            </a:pPr>
-            <a:r>
-              <a:rPr lang="en-US" sz="1100" dirty="0">
-                <a:solidFill>
-                  <a:srgbClr val="616C7A"/>
-                </a:solidFill>
-                <a:latin typeface="IBM Plex Mono" pitchFamily="34" charset="0"/>
-                <a:ea typeface="IBM Plex Mono" pitchFamily="34" charset="-122"/>
-                <a:cs typeface="IBM Plex Mono" pitchFamily="34" charset="-120"/>
-              </a:rPr>
-              <a:t>06</a:t>
-            </a:r>
-            <a:endParaRPr lang="en-US" sz="1100" dirty="0"/>
-          </a:p>
-        </p:txBody>
-      </p:sp>
-      <p:sp>
-        <p:nvSpPr>
-          <p:cNvPr id="21" name="b1"/>
-          <p:cNvSpPr txBox="1"/>
-          <p:nvPr/>
-        </p:nvSpPr>
-        <p:spPr>
-          <a:xfrm>
-            <a:off x="6718300" y="5130800"/>
-            <a:ext cx="4711700" cy="1320800"/>
-          </a:xfrm>
-          <a:prstGeom prst="rect">
-            <a:avLst/>
-          </a:prstGeom>
-          <a:noFill/>
-          <a:ln/>
-        </p:spPr>
-        <p:txBody>
-          <a:bodyPr wrap="square" lIns="0" tIns="0" rIns="0" bIns="0" rtlCol="0" anchor="t"/>
-          <a:lstStyle/>
-          <a:p>
-            <a:pPr algn="l" indent="0" marL="0">
-              <a:lnSpc>
-                <a:spcPct val="130000"/>
-              </a:lnSpc>
-              <a:spcAft>
-                <a:spcPts val="600"/>
-              </a:spcAft>
-              <a:buNone/>
-            </a:pPr>
-            <a:r>
-              <a:rPr lang="en-US" sz="1500" b="1" dirty="0">
-                <a:solidFill>
-                  <a:srgbClr val="1B2430"/>
-                </a:solidFill>
-                <a:latin typeface="Public Sans" pitchFamily="34" charset="0"/>
-                <a:ea typeface="Public Sans" pitchFamily="34" charset="-122"/>
-                <a:cs typeface="Public Sans" pitchFamily="34" charset="-120"/>
-              </a:rPr>
-              <a:t>Role-aware by construction</a:t>
-            </a:r>
-            <a:endParaRPr lang="en-US" sz="1200" dirty="0"/>
-          </a:p>
-          <a:p>
-            <a:pPr algn="l" indent="0" marL="0">
-              <a:lnSpc>
-                <a:spcPct val="130000"/>
-              </a:lnSpc>
-              <a:spcAft>
-                <a:spcPts val="800"/>
-              </a:spcAft>
-              <a:buNone/>
-            </a:pPr>
-            <a:r>
-              <a:rPr lang="en-US" sz="1200" dirty="0">
-                <a:solidFill>
-                  <a:srgbClr val="465060"/>
-                </a:solidFill>
-                <a:latin typeface="Public Sans" pitchFamily="34" charset="0"/>
-                <a:ea typeface="Public Sans" pitchFamily="34" charset="-122"/>
-                <a:cs typeface="Public Sans" pitchFamily="34" charset="-120"/>
-              </a:rPr>
-              <a:t>Authorization is server-side on every route with an authorization test per endpoint. Operators receive their own labels and never an internal status code.</a:t>
-            </a:r>
-            <a:endParaRPr lang="en-US" sz="1200" dirty="0"/>
-          </a:p>
-          <a:p>
-            <a:pPr algn="l" indent="0" marL="0">
-              <a:lnSpc>
-                <a:spcPct val="130000"/>
-              </a:lnSpc>
-              <a:buNone/>
-            </a:pPr>
-            <a:endParaRPr lang="en-US" sz="1200" dirty="0"/>
-          </a:p>
-        </p:txBody>
-      </p:sp>
-      <p:sp>
-        <p:nvSpPr>
-          <p:cNvPr id="22" name="Text 20"/>
-          <p:cNvSpPr txBox="1"/>
-          <p:nvPr/>
-        </p:nvSpPr>
-        <p:spPr>
-          <a:xfrm>
-            <a:off x="10160000" y="571500"/>
-            <a:ext cx="1270000" cy="190500"/>
-          </a:xfrm>
-          <a:prstGeom prst="rect">
-            <a:avLst/>
-          </a:prstGeom>
-          <a:noFill/>
-          <a:ln/>
-        </p:spPr>
-        <p:txBody>
-          <a:bodyPr wrap="square" lIns="0" tIns="0" rIns="0" bIns="0" rtlCol="0" anchor="t"/>
-          <a:lstStyle/>
-          <a:p>
-            <a:pPr algn="r" indent="0" marL="0">
-              <a:lnSpc>
-                <a:spcPct val="115000"/>
-              </a:lnSpc>
-              <a:buNone/>
-            </a:pPr>
-            <a:r>
-              <a:rPr lang="en-US" sz="1000" dirty="0">
-                <a:solidFill>
-                  <a:srgbClr val="616C7A"/>
-                </a:solidFill>
-                <a:latin typeface="IBM Plex Mono" pitchFamily="34" charset="0"/>
-                <a:ea typeface="IBM Plex Mono" pitchFamily="34" charset="-122"/>
-                <a:cs typeface="IBM Plex Mono" pitchFamily="34" charset="-120"/>
-              </a:rPr>
-              <a:t>08 / 13</a:t>
-            </a:r>
-            <a:endParaRPr lang="en-US" sz="1000" dirty="0"/>
-          </a:p>
-        </p:txBody>
-      </p:sp>
-    </p:spTree>
-  </p:cSld>
-  <p:clrMapOvr>
-    <a:masterClrMapping/>
-  </p:clrMapOvr>
-  <p:transition spd="fast">
-    <p:fade/>
-  </p:transition>
-  <p:timing>
-    <p:tnLst>
-      <p:par>
-        <p:cTn id="1" dur="indefinite" restart="never" nodeType="tmRoot">
-          <p:childTnLst>
-            <p:seq concurrent="1" nextAc="seek">
-              <p:cTn id="2" dur="indefinite" nodeType="mainSeq">
-                <p:childTnLst>
-                  <p:par>
-                    <p:cTn id="30" fill="hold">
-                      <p:stCondLst>
-                        <p:cond delay="indefinite"/>
-                      </p:stCondLst>
-                      <p:childTnLst>
-                        <p:par>
-                          <p:cTn id="31" fill="hold">
-                            <p:stCondLst>
-                              <p:cond delay="0"/>
-                            </p:stCondLst>
-                            <p:childTnLst>
-                              <p:par>
-                                <p:cTn id="3" presetID="10" presetClass="entr" presetSubtype="0" fill="hold" grpId="0" nodeType="clickEffect">
-                                  <p:stCondLst>
-                                    <p:cond delay="0"/>
-                                  </p:stCondLst>
-                                  <p:childTnLst>
-                                    <p:set>
-                                      <p:cBhvr>
-                                        <p:cTn id="4" dur="1" fill="hold">
-                                          <p:stCondLst>
-                                            <p:cond delay="0"/>
-                                          </p:stCondLst>
-                                        </p:cTn>
-                                        <p:tgtEl>
-                                          <p:spTgt spid="13"/>
-                                        </p:tgtEl>
-                                        <p:attrNameLst>
-                                          <p:attrName>style.visibility</p:attrName>
-                                        </p:attrNameLst>
-                                      </p:cBhvr>
-                                      <p:to>
-                                        <p:strVal val="visible"/>
-                                      </p:to>
-                                    </p:set>
-                                    <p:animEffect transition="in" filter="fade">
-                                      <p:cBhvr>
-                                        <p:cTn id="5" dur="320"/>
-                                        <p:tgtEl>
-                                          <p:spTgt spid="13"/>
-                                        </p:tgtEl>
-                                      </p:cBhvr>
-                                    </p:animEffect>
-                                  </p:childTnLst>
-                                </p:cTn>
-                              </p:par>
-                              <p:par>
-                                <p:cTn id="6" presetID="10" presetClass="entr" presetSubtype="0" fill="hold" grpId="0" nodeType="withEffect">
-                                  <p:stCondLst>
-                                    <p:cond delay="100"/>
-                                  </p:stCondLst>
-                                  <p:childTnLst>
-                                    <p:set>
-                                      <p:cBhvr>
-                                        <p:cTn id="7" dur="1" fill="hold">
-                                          <p:stCondLst>
-                                            <p:cond delay="0"/>
-                                          </p:stCondLst>
-                                        </p:cTn>
-                                        <p:tgtEl>
-                                          <p:spTgt spid="14"/>
-                                        </p:tgtEl>
-                                        <p:attrNameLst>
-                                          <p:attrName>style.visibility</p:attrName>
-                                        </p:attrNameLst>
-                                      </p:cBhvr>
-                                      <p:to>
-                                        <p:strVal val="visible"/>
-                                      </p:to>
-                                    </p:set>
-                                    <p:animEffect transition="in" filter="fade">
-                                      <p:cBhvr>
-                                        <p:cTn id="8" dur="320"/>
-                                        <p:tgtEl>
-                                          <p:spTgt spid="14"/>
-                                        </p:tgtEl>
-                                      </p:cBhvr>
-                                    </p:animEffect>
-                                  </p:childTnLst>
-                                </p:cTn>
-                              </p:par>
-                              <p:par>
-                                <p:cTn id="9" presetID="10" presetClass="entr" presetSubtype="0" fill="hold" grpId="0" nodeType="withEffect">
-                                  <p:stCondLst>
-                                    <p:cond delay="200"/>
-                                  </p:stCondLst>
-                                  <p:childTnLst>
-                                    <p:set>
-                                      <p:cBhvr>
-                                        <p:cTn id="10" dur="1" fill="hold">
-                                          <p:stCondLst>
-                                            <p:cond delay="0"/>
-                                          </p:stCondLst>
-                                        </p:cTn>
-                                        <p:tgtEl>
-                                          <p:spTgt spid="15"/>
-                                        </p:tgtEl>
-                                        <p:attrNameLst>
-                                          <p:attrName>style.visibility</p:attrName>
-                                        </p:attrNameLst>
-                                      </p:cBhvr>
-                                      <p:to>
-                                        <p:strVal val="visible"/>
-                                      </p:to>
-                                    </p:set>
-                                    <p:animEffect transition="in" filter="fade">
-                                      <p:cBhvr>
-                                        <p:cTn id="11" dur="320"/>
-                                        <p:tgtEl>
-                                          <p:spTgt spid="15"/>
-                                        </p:tgtEl>
-                                      </p:cBhvr>
-                                    </p:animEffect>
-                                  </p:childTnLst>
-                                </p:cTn>
-                              </p:par>
-                              <p:par>
-                                <p:cTn id="12" presetID="10" presetClass="entr" presetSubtype="0" fill="hold" grpId="0" nodeType="withEffect">
-                                  <p:stCondLst>
-                                    <p:cond delay="300"/>
-                                  </p:stCondLst>
-                                  <p:childTnLst>
-                                    <p:set>
-                                      <p:cBhvr>
-                                        <p:cTn id="13" dur="1" fill="hold">
-                                          <p:stCondLst>
-                                            <p:cond delay="0"/>
-                                          </p:stCondLst>
-                                        </p:cTn>
-                                        <p:tgtEl>
-                                          <p:spTgt spid="16"/>
-                                        </p:tgtEl>
-                                        <p:attrNameLst>
-                                          <p:attrName>style.visibility</p:attrName>
-                                        </p:attrNameLst>
-                                      </p:cBhvr>
-                                      <p:to>
-                                        <p:strVal val="visible"/>
-                                      </p:to>
-                                    </p:set>
-                                    <p:animEffect transition="in" filter="fade">
-                                      <p:cBhvr>
-                                        <p:cTn id="14" dur="320"/>
-                                        <p:tgtEl>
-                                          <p:spTgt spid="16"/>
-                                        </p:tgtEl>
-                                      </p:cBhvr>
-                                    </p:animEffect>
-                                  </p:childTnLst>
-                                </p:cTn>
-                              </p:par>
-                              <p:par>
-                                <p:cTn id="15" presetID="10" presetClass="entr" presetSubtype="0" fill="hold" grpId="0" nodeType="withEffect">
-                                  <p:stCondLst>
-                                    <p:cond delay="400"/>
-                                  </p:stCondLst>
-                                  <p:childTnLst>
-                                    <p:set>
-                                      <p:cBhvr>
-                                        <p:cTn id="16" dur="1" fill="hold">
-                                          <p:stCondLst>
-                                            <p:cond delay="0"/>
-                                          </p:stCondLst>
-                                        </p:cTn>
-                                        <p:tgtEl>
-                                          <p:spTgt spid="17"/>
-                                        </p:tgtEl>
-                                        <p:attrNameLst>
-                                          <p:attrName>style.visibility</p:attrName>
-                                        </p:attrNameLst>
-                                      </p:cBhvr>
-                                      <p:to>
-                                        <p:strVal val="visible"/>
-                                      </p:to>
-                                    </p:set>
-                                    <p:animEffect transition="in" filter="fade">
-                                      <p:cBhvr>
-                                        <p:cTn id="17" dur="320"/>
-                                        <p:tgtEl>
-                                          <p:spTgt spid="17"/>
-                                        </p:tgtEl>
-                                      </p:cBhvr>
-                                    </p:animEffect>
-                                  </p:childTnLst>
-                                </p:cTn>
-                              </p:par>
-                              <p:par>
-                                <p:cTn id="18" presetID="10" presetClass="entr" presetSubtype="0" fill="hold" grpId="0" nodeType="withEffect">
-                                  <p:stCondLst>
-                                    <p:cond delay="500"/>
-                                  </p:stCondLst>
-                                  <p:childTnLst>
-                                    <p:set>
-                                      <p:cBhvr>
-                                        <p:cTn id="19" dur="1" fill="hold">
-                                          <p:stCondLst>
-                                            <p:cond delay="0"/>
-                                          </p:stCondLst>
-                                        </p:cTn>
-                                        <p:tgtEl>
-                                          <p:spTgt spid="18"/>
-                                        </p:tgtEl>
-                                        <p:attrNameLst>
-                                          <p:attrName>style.visibility</p:attrName>
-                                        </p:attrNameLst>
-                                      </p:cBhvr>
-                                      <p:to>
-                                        <p:strVal val="visible"/>
-                                      </p:to>
-                                    </p:set>
-                                    <p:animEffect transition="in" filter="fade">
-                                      <p:cBhvr>
-                                        <p:cTn id="20" dur="320"/>
-                                        <p:tgtEl>
-                                          <p:spTgt spid="18"/>
-                                        </p:tgtEl>
-                                      </p:cBhvr>
-                                    </p:animEffect>
-                                  </p:childTnLst>
-                                </p:cTn>
-                              </p:par>
-                              <p:par>
-                                <p:cTn id="21" presetID="10" presetClass="entr" presetSubtype="0" fill="hold" grpId="0" nodeType="withEffect">
-                                  <p:stCondLst>
-                                    <p:cond delay="600"/>
-                                  </p:stCondLst>
-                                  <p:childTnLst>
-                                    <p:set>
-                                      <p:cBhvr>
-                                        <p:cTn id="22" dur="1" fill="hold">
-                                          <p:stCondLst>
-                                            <p:cond delay="0"/>
-                                          </p:stCondLst>
-                                        </p:cTn>
-                                        <p:tgtEl>
-                                          <p:spTgt spid="19"/>
-                                        </p:tgtEl>
-                                        <p:attrNameLst>
-                                          <p:attrName>style.visibility</p:attrName>
-                                        </p:attrNameLst>
-                                      </p:cBhvr>
-                                      <p:to>
-                                        <p:strVal val="visible"/>
-                                      </p:to>
-                                    </p:set>
-                                    <p:animEffect transition="in" filter="fade">
-                                      <p:cBhvr>
-                                        <p:cTn id="23" dur="320"/>
-                                        <p:tgtEl>
-                                          <p:spTgt spid="19"/>
-                                        </p:tgtEl>
-                                      </p:cBhvr>
-                                    </p:animEffect>
-                                  </p:childTnLst>
-                                </p:cTn>
-                              </p:par>
-                              <p:par>
-                                <p:cTn id="24" presetID="10" presetClass="entr" presetSubtype="0" fill="hold" grpId="0" nodeType="withEffect">
-                                  <p:stCondLst>
-                                    <p:cond delay="700"/>
-                                  </p:stCondLst>
-                                  <p:childTnLst>
-                                    <p:set>
-                                      <p:cBhvr>
-                                        <p:cTn id="25" dur="1" fill="hold">
-                                          <p:stCondLst>
-                                            <p:cond delay="0"/>
-                                          </p:stCondLst>
-                                        </p:cTn>
-                                        <p:tgtEl>
-                                          <p:spTgt spid="20"/>
-                                        </p:tgtEl>
-                                        <p:attrNameLst>
-                                          <p:attrName>style.visibility</p:attrName>
-                                        </p:attrNameLst>
-                                      </p:cBhvr>
-                                      <p:to>
-                                        <p:strVal val="visible"/>
-                                      </p:to>
-                                    </p:set>
-                                    <p:animEffect transition="in" filter="fade">
-                                      <p:cBhvr>
-                                        <p:cTn id="26" dur="320"/>
-                                        <p:tgtEl>
-                                          <p:spTgt spid="20"/>
-                                        </p:tgtEl>
-                                      </p:cBhvr>
-                                    </p:animEffect>
-                                  </p:childTnLst>
-                                </p:cTn>
-                              </p:par>
-                              <p:par>
-                                <p:cTn id="27" presetID="10" presetClass="entr" presetSubtype="0" fill="hold" grpId="0" nodeType="withEffect">
-                                  <p:stCondLst>
-                                    <p:cond delay="800"/>
-                                  </p:stCondLst>
-                                  <p:childTnLst>
-                                    <p:set>
-                                      <p:cBhvr>
-                                        <p:cTn id="28" dur="1" fill="hold">
-                                          <p:stCondLst>
-                                            <p:cond delay="0"/>
-                                          </p:stCondLst>
-                                        </p:cTn>
-                                        <p:tgtEl>
-                                          <p:spTgt spid="21"/>
-                                        </p:tgtEl>
-                                        <p:attrNameLst>
-                                          <p:attrName>style.visibility</p:attrName>
-                                        </p:attrNameLst>
-                                      </p:cBhvr>
-                                      <p:to>
-                                        <p:strVal val="visible"/>
-                                      </p:to>
-                                    </p:set>
-                                    <p:animEffect transition="in" filter="fade">
-                                      <p:cBhvr>
-                                        <p:cTn id="29" dur="320"/>
-                                        <p:tgtEl>
-                                          <p:spTgt spid="21"/>
-                                        </p:tgtEl>
-                                      </p:cBhvr>
-                                    </p:animEffect>
-                                  </p:childTnLst>
-                                </p:cTn>
-                              </p:par>
-                            </p:childTnLst>
-                          </p:cTn>
-                        </p:par>
-                      </p:childTnLst>
-                    </p:cTn>
-                  </p:par>
-                </p:childTnLst>
-              </p:cTn>
-              <p:prevCondLst>
-                <p:cond evt="onPrev" delay="0">
-                  <p:tgtEl>
-                    <p:sldTgt/>
-                  </p:tgtEl>
-                </p:cond>
-              </p:prevCondLst>
-              <p:nextCondLst>
-                <p:cond evt="onNext" delay="0">
-                  <p:tgtEl>
-                    <p:sldTgt/>
-                  </p:tgtEl>
-                </p:cond>
-              </p:nextCondLst>
-            </p:seq>
-          </p:childTnLst>
-        </p:cTn>
-      </p:par>
-    </p:tnLst>
-    <p:bldLst>
-      <p:bldP spid="13" grpId="0" animBg="1"/>
-      <p:bldP spid="14" grpId="0" animBg="1"/>
-      <p:bldP spid="15" grpId="0" animBg="1"/>
-      <p:bldP spid="16" grpId="0" animBg="1"/>
-      <p:bldP spid="17" grpId="0" animBg="1"/>
-      <p:bldP spid="18" grpId="0" animBg="1"/>
-      <p:bldP spid="19" grpId="0" animBg="1"/>
-      <p:bldP spid="20" grpId="0" animBg="1"/>
-      <p:bldP spid="21" grpId="0" animBg="1"/>
-    </p:bldLst>
-  </p:timing>
-</p:sld>
-</file>
-
-<file path=ppt/slides/slide9.xml><?xml version="1.0" encoding="utf-8"?>
-<p:sld xmlns:a="http://schemas.openxmlformats.org/drawingml/2006/main" xmlns:r="http://schemas.openxmlformats.org/officeDocument/2006/relationships" xmlns:p="http://schemas.openxmlformats.org/presentationml/2006/main">
-  <p:cSld name="Slide 9">
-    <p:bg>
-      <p:bgPr>
-        <a:solidFill>
-          <a:srgbClr val="F4F5F7"/>
-        </a:solidFill>
-      </p:bgPr>
-    </p:bg>
-    <p:spTree>
-      <p:nvGrpSpPr>
-        <p:cNvPr id="1" name=""/>
-        <p:cNvGrpSpPr/>
-        <p:nvPr/>
-      </p:nvGrpSpPr>
-      <p:grpSpPr>
-        <a:xfrm>
-          <a:off x="0" y="0"/>
-          <a:ext cx="0" cy="0"/>
-          <a:chOff x="0" y="0"/>
-          <a:chExt cx="0" cy="0"/>
-        </a:xfrm>
-      </p:grpSpPr>
-      <p:sp>
-        <p:nvSpPr>
-          <p:cNvPr id="2" name="Text 0"/>
-          <p:cNvSpPr txBox="1"/>
-          <p:nvPr/>
-        </p:nvSpPr>
-        <p:spPr>
-          <a:xfrm>
-            <a:off x="762000" y="558800"/>
-            <a:ext cx="8890000" cy="190500"/>
-          </a:xfrm>
-          <a:prstGeom prst="rect">
-            <a:avLst/>
-          </a:prstGeom>
-          <a:noFill/>
-          <a:ln/>
-        </p:spPr>
-        <p:txBody>
-          <a:bodyPr wrap="square" lIns="0" tIns="0" rIns="0" bIns="0" rtlCol="0" anchor="t"/>
-          <a:lstStyle/>
-          <a:p>
-            <a:pPr algn="l" indent="0" marL="0">
-              <a:lnSpc>
-                <a:spcPct val="115000"/>
-              </a:lnSpc>
-              <a:buNone/>
-            </a:pPr>
-            <a:r>
-              <a:rPr lang="en-US" sz="1100" b="1" spc="90" kern="0" dirty="0">
-                <a:solidFill>
-                  <a:srgbClr val="616C7A"/>
-                </a:solidFill>
-                <a:latin typeface="Public Sans" pitchFamily="34" charset="0"/>
-                <a:ea typeface="Public Sans" pitchFamily="34" charset="-122"/>
-                <a:cs typeface="Public Sans" pitchFamily="34" charset="-120"/>
-              </a:rPr>
-              <a:t>BUILT TO BE TAKEN TO PRODUCTION</a:t>
-            </a:r>
-            <a:endParaRPr lang="en-US" sz="1100" dirty="0"/>
-          </a:p>
-        </p:txBody>
-      </p:sp>
-      <p:sp>
-        <p:nvSpPr>
-          <p:cNvPr id="3" name="Text 1"/>
-          <p:cNvSpPr txBox="1"/>
-          <p:nvPr/>
-        </p:nvSpPr>
-        <p:spPr>
-          <a:xfrm>
-            <a:off x="762000" y="863600"/>
-            <a:ext cx="9906000" cy="825500"/>
-          </a:xfrm>
-          <a:prstGeom prst="rect">
-            <a:avLst/>
-          </a:prstGeom>
-          <a:noFill/>
-          <a:ln/>
-        </p:spPr>
-        <p:txBody>
-          <a:bodyPr wrap="square" lIns="0" tIns="0" rIns="0" bIns="0" rtlCol="0" anchor="t"/>
-          <a:lstStyle/>
-          <a:p>
-            <a:pPr algn="l" indent="0" marL="0">
-              <a:lnSpc>
-                <a:spcPct val="108000"/>
-              </a:lnSpc>
-              <a:buNone/>
-            </a:pPr>
-            <a:r>
-              <a:rPr lang="en-US" sz="2700" dirty="0">
-                <a:solidFill>
-                  <a:srgbClr val="1B2430"/>
-                </a:solidFill>
-                <a:latin typeface="Instrument Serif" pitchFamily="34" charset="0"/>
-                <a:ea typeface="Instrument Serif" pitchFamily="34" charset="-122"/>
-                <a:cs typeface="Instrument Serif" pitchFamily="34" charset="-120"/>
-              </a:rPr>
-              <a:t>A modular monolith with an explicit state machine, an advisory AI module and an audit trail written in the same transaction.</a:t>
-            </a:r>
-            <a:endParaRPr lang="en-US" sz="2700" dirty="0"/>
-          </a:p>
-        </p:txBody>
-      </p:sp>
-      <p:sp>
-        <p:nvSpPr>
-          <p:cNvPr id="4" name="Text 2"/>
-          <p:cNvSpPr txBox="1"/>
-          <p:nvPr/>
-        </p:nvSpPr>
-        <p:spPr>
-          <a:xfrm>
-            <a:off x="736600" y="2146300"/>
-            <a:ext cx="711200" cy="177800"/>
-          </a:xfrm>
-          <a:prstGeom prst="rect">
-            <a:avLst/>
-          </a:prstGeom>
-          <a:noFill/>
-          <a:ln/>
-        </p:spPr>
-        <p:txBody>
-          <a:bodyPr wrap="square" lIns="0" tIns="0" rIns="0" bIns="0" rtlCol="0" anchor="t"/>
-          <a:lstStyle/>
-          <a:p>
-            <a:pPr algn="l" indent="0" marL="0">
-              <a:lnSpc>
-                <a:spcPct val="115000"/>
-              </a:lnSpc>
-              <a:buNone/>
-            </a:pPr>
-            <a:r>
-              <a:rPr lang="en-US" sz="950" b="1" spc="20" kern="0" dirty="0">
-                <a:solidFill>
-                  <a:srgbClr val="616C7A"/>
-                </a:solidFill>
-                <a:latin typeface="Public Sans" pitchFamily="34" charset="0"/>
-                <a:ea typeface="Public Sans" pitchFamily="34" charset="-122"/>
-                <a:cs typeface="Public Sans" pitchFamily="34" charset="-120"/>
-              </a:rPr>
-              <a:t>BROWSER</a:t>
-            </a:r>
-            <a:endParaRPr lang="en-US" sz="950" dirty="0"/>
-          </a:p>
-        </p:txBody>
-      </p:sp>
-      <p:sp>
-        <p:nvSpPr>
-          <p:cNvPr id="5" name="Text 3"/>
-          <p:cNvSpPr txBox="1"/>
-          <p:nvPr/>
-        </p:nvSpPr>
-        <p:spPr>
-          <a:xfrm>
-            <a:off x="736600" y="3035300"/>
-            <a:ext cx="711200" cy="177800"/>
-          </a:xfrm>
-          <a:prstGeom prst="rect">
-            <a:avLst/>
-          </a:prstGeom>
-          <a:noFill/>
-          <a:ln/>
-        </p:spPr>
-        <p:txBody>
-          <a:bodyPr wrap="square" lIns="0" tIns="0" rIns="0" bIns="0" rtlCol="0" anchor="t"/>
-          <a:lstStyle/>
-          <a:p>
-            <a:pPr algn="l" indent="0" marL="0">
-              <a:lnSpc>
-                <a:spcPct val="115000"/>
-              </a:lnSpc>
-              <a:buNone/>
-            </a:pPr>
-            <a:r>
-              <a:rPr lang="en-US" sz="950" b="1" spc="20" kern="0" dirty="0">
-                <a:solidFill>
-                  <a:srgbClr val="616C7A"/>
-                </a:solidFill>
-                <a:latin typeface="Public Sans" pitchFamily="34" charset="0"/>
-                <a:ea typeface="Public Sans" pitchFamily="34" charset="-122"/>
-                <a:cs typeface="Public Sans" pitchFamily="34" charset="-120"/>
-              </a:rPr>
-              <a:t>API</a:t>
-            </a:r>
-            <a:endParaRPr lang="en-US" sz="950" dirty="0"/>
-          </a:p>
-        </p:txBody>
-      </p:sp>
-      <p:sp>
-        <p:nvSpPr>
-          <p:cNvPr id="6" name="Text 4"/>
-          <p:cNvSpPr txBox="1"/>
-          <p:nvPr/>
-        </p:nvSpPr>
-        <p:spPr>
-          <a:xfrm>
-            <a:off x="736600" y="3924300"/>
-            <a:ext cx="711200" cy="177800"/>
-          </a:xfrm>
-          <a:prstGeom prst="rect">
-            <a:avLst/>
-          </a:prstGeom>
-          <a:noFill/>
-          <a:ln/>
-        </p:spPr>
-        <p:txBody>
-          <a:bodyPr wrap="square" lIns="0" tIns="0" rIns="0" bIns="0" rtlCol="0" anchor="t"/>
-          <a:lstStyle/>
-          <a:p>
-            <a:pPr algn="l" indent="0" marL="0">
-              <a:lnSpc>
-                <a:spcPct val="115000"/>
-              </a:lnSpc>
-              <a:buNone/>
-            </a:pPr>
-            <a:r>
-              <a:rPr lang="en-US" sz="950" b="1" spc="20" kern="0" dirty="0">
-                <a:solidFill>
-                  <a:srgbClr val="616C7A"/>
-                </a:solidFill>
-                <a:latin typeface="Public Sans" pitchFamily="34" charset="0"/>
-                <a:ea typeface="Public Sans" pitchFamily="34" charset="-122"/>
-                <a:cs typeface="Public Sans" pitchFamily="34" charset="-120"/>
-              </a:rPr>
-              <a:t>DOMAIN</a:t>
-            </a:r>
-            <a:endParaRPr lang="en-US" sz="950" dirty="0"/>
-          </a:p>
-        </p:txBody>
-      </p:sp>
-      <p:sp>
-        <p:nvSpPr>
-          <p:cNvPr id="7" name="Text 5"/>
-          <p:cNvSpPr txBox="1"/>
-          <p:nvPr/>
-        </p:nvSpPr>
-        <p:spPr>
-          <a:xfrm>
-            <a:off x="736600" y="4813300"/>
-            <a:ext cx="711200" cy="177800"/>
-          </a:xfrm>
-          <a:prstGeom prst="rect">
-            <a:avLst/>
-          </a:prstGeom>
-          <a:noFill/>
-          <a:ln/>
-        </p:spPr>
-        <p:txBody>
-          <a:bodyPr wrap="square" lIns="0" tIns="0" rIns="0" bIns="0" rtlCol="0" anchor="t"/>
-          <a:lstStyle/>
-          <a:p>
-            <a:pPr algn="l" indent="0" marL="0">
-              <a:lnSpc>
-                <a:spcPct val="115000"/>
-              </a:lnSpc>
-              <a:buNone/>
-            </a:pPr>
-            <a:r>
-              <a:rPr lang="en-US" sz="950" b="1" spc="20" kern="0" dirty="0">
-                <a:solidFill>
-                  <a:srgbClr val="616C7A"/>
-                </a:solidFill>
-                <a:latin typeface="Public Sans" pitchFamily="34" charset="0"/>
-                <a:ea typeface="Public Sans" pitchFamily="34" charset="-122"/>
-                <a:cs typeface="Public Sans" pitchFamily="34" charset="-120"/>
-              </a:rPr>
-              <a:t>DATA</a:t>
-            </a:r>
-            <a:endParaRPr lang="en-US" sz="950" dirty="0"/>
-          </a:p>
-        </p:txBody>
-      </p:sp>
-      <p:sp>
-        <p:nvSpPr>
-          <p:cNvPr id="8" name="Text 6"/>
-          <p:cNvSpPr txBox="1"/>
-          <p:nvPr/>
-        </p:nvSpPr>
-        <p:spPr>
-          <a:xfrm>
-            <a:off x="736600" y="5702300"/>
-            <a:ext cx="711200" cy="177800"/>
-          </a:xfrm>
-          <a:prstGeom prst="rect">
-            <a:avLst/>
-          </a:prstGeom>
-          <a:noFill/>
-          <a:ln/>
-        </p:spPr>
-        <p:txBody>
-          <a:bodyPr wrap="square" lIns="0" tIns="0" rIns="0" bIns="0" rtlCol="0" anchor="t"/>
-          <a:lstStyle/>
-          <a:p>
-            <a:pPr algn="l" indent="0" marL="0">
-              <a:lnSpc>
-                <a:spcPct val="115000"/>
-              </a:lnSpc>
-              <a:buNone/>
-            </a:pPr>
-            <a:r>
-              <a:rPr lang="en-US" sz="950" b="1" spc="20" kern="0" dirty="0">
-                <a:solidFill>
-                  <a:srgbClr val="616C7A"/>
-                </a:solidFill>
-                <a:latin typeface="Public Sans" pitchFamily="34" charset="0"/>
-                <a:ea typeface="Public Sans" pitchFamily="34" charset="-122"/>
-                <a:cs typeface="Public Sans" pitchFamily="34" charset="-120"/>
-              </a:rPr>
-              <a:t>RUNS ON</a:t>
-            </a:r>
-            <a:endParaRPr lang="en-US" sz="950" dirty="0"/>
-          </a:p>
-        </p:txBody>
-      </p:sp>
-      <p:sp>
-        <p:nvSpPr>
-          <p:cNvPr id="9" name="Shape 7"/>
-          <p:cNvSpPr/>
-          <p:nvPr/>
-        </p:nvSpPr>
-        <p:spPr>
-          <a:xfrm>
-            <a:off x="3937000" y="2540000"/>
-            <a:ext cx="0" cy="254000"/>
-          </a:xfrm>
-          <a:prstGeom prst="line">
-            <a:avLst/>
-          </a:prstGeom>
-          <a:noFill/>
-          <a:ln w="31750">
-            <a:solidFill>
-              <a:srgbClr val="AEB6C2"/>
-            </a:solidFill>
-            <a:prstDash val="solid"/>
-          </a:ln>
-        </p:spPr>
-      </p:sp>
-      <p:sp>
-        <p:nvSpPr>
-          <p:cNvPr id="10" name="Shape 8"/>
-          <p:cNvSpPr/>
-          <p:nvPr/>
-        </p:nvSpPr>
-        <p:spPr>
-          <a:xfrm>
-            <a:off x="3937000" y="3429000"/>
-            <a:ext cx="0" cy="254000"/>
-          </a:xfrm>
-          <a:prstGeom prst="line">
-            <a:avLst/>
-          </a:prstGeom>
-          <a:noFill/>
-          <a:ln w="31750">
-            <a:solidFill>
-              <a:srgbClr val="AEB6C2"/>
-            </a:solidFill>
-            <a:prstDash val="solid"/>
-          </a:ln>
-        </p:spPr>
-      </p:sp>
-      <p:sp>
-        <p:nvSpPr>
-          <p:cNvPr id="11" name="Shape 9"/>
-          <p:cNvSpPr/>
-          <p:nvPr/>
-        </p:nvSpPr>
-        <p:spPr>
-          <a:xfrm>
-            <a:off x="3937000" y="4318000"/>
-            <a:ext cx="0" cy="254000"/>
-          </a:xfrm>
-          <a:prstGeom prst="line">
-            <a:avLst/>
-          </a:prstGeom>
-          <a:noFill/>
-          <a:ln w="31750">
-            <a:solidFill>
-              <a:srgbClr val="AEB6C2"/>
-            </a:solidFill>
-            <a:prstDash val="solid"/>
-          </a:ln>
-        </p:spPr>
-      </p:sp>
-      <p:sp>
-        <p:nvSpPr>
-          <p:cNvPr id="12" name="Shape 10"/>
-          <p:cNvSpPr/>
-          <p:nvPr/>
-        </p:nvSpPr>
-        <p:spPr>
-          <a:xfrm>
-            <a:off x="3937000" y="5207000"/>
-            <a:ext cx="0" cy="254000"/>
-          </a:xfrm>
-          <a:prstGeom prst="line">
-            <a:avLst/>
-          </a:prstGeom>
-          <a:noFill/>
-          <a:ln w="31750">
-            <a:solidFill>
-              <a:srgbClr val="AEB6C2"/>
-            </a:solidFill>
-            <a:prstDash val="solid"/>
-          </a:ln>
-        </p:spPr>
-      </p:sp>
-      <p:sp>
-        <p:nvSpPr>
-          <p:cNvPr id="13" name="Shape 11"/>
-          <p:cNvSpPr/>
-          <p:nvPr/>
-        </p:nvSpPr>
-        <p:spPr>
-          <a:xfrm>
-            <a:off x="6413500" y="3111500"/>
-            <a:ext cx="635000" cy="0"/>
-          </a:xfrm>
-          <a:prstGeom prst="line">
-            <a:avLst/>
-          </a:prstGeom>
-          <a:noFill/>
-          <a:ln w="31750">
-            <a:solidFill>
-              <a:srgbClr val="AEB6C2"/>
-            </a:solidFill>
-            <a:prstDash val="solid"/>
-          </a:ln>
-        </p:spPr>
-      </p:sp>
-      <p:sp>
-        <p:nvSpPr>
-          <p:cNvPr id="14" name="Shape 12"/>
-          <p:cNvSpPr/>
-          <p:nvPr/>
-        </p:nvSpPr>
-        <p:spPr>
-          <a:xfrm>
-            <a:off x="8826500" y="3429000"/>
-            <a:ext cx="0" cy="254000"/>
-          </a:xfrm>
-          <a:prstGeom prst="line">
-            <a:avLst/>
-          </a:prstGeom>
-          <a:noFill/>
-          <a:ln w="31750">
-            <a:solidFill>
-              <a:srgbClr val="AEB6C2"/>
-            </a:solidFill>
-            <a:prstDash val="solid"/>
-          </a:ln>
-        </p:spPr>
-      </p:sp>
-      <p:sp>
-        <p:nvSpPr>
-          <p:cNvPr id="15" name="Shape 13"/>
-          <p:cNvSpPr/>
-          <p:nvPr/>
-        </p:nvSpPr>
-        <p:spPr>
-          <a:xfrm>
-            <a:off x="8826500" y="4318000"/>
-            <a:ext cx="0" cy="254000"/>
-          </a:xfrm>
-          <a:prstGeom prst="line">
-            <a:avLst/>
-          </a:prstGeom>
-          <a:noFill/>
-          <a:ln w="31750">
-            <a:solidFill>
-              <a:srgbClr val="AEB6C2"/>
-            </a:solidFill>
-            <a:prstDash val="solid"/>
-          </a:ln>
-        </p:spPr>
-      </p:sp>
-      <p:sp>
-        <p:nvSpPr>
-          <p:cNvPr id="16" name="Shape 14"/>
-          <p:cNvSpPr/>
-          <p:nvPr/>
-        </p:nvSpPr>
-        <p:spPr>
-          <a:xfrm>
-            <a:off x="5588000" y="4318000"/>
-            <a:ext cx="0" cy="254000"/>
-          </a:xfrm>
-          <a:prstGeom prst="line">
-            <a:avLst/>
-          </a:prstGeom>
-          <a:noFill/>
-          <a:ln w="31750">
-            <a:solidFill>
-              <a:srgbClr val="AEB6C2"/>
-            </a:solidFill>
-            <a:prstDash val="solid"/>
-          </a:ln>
-        </p:spPr>
-      </p:sp>
-      <p:sp>
-        <p:nvSpPr>
-          <p:cNvPr id="17" name="Shape 15"/>
-          <p:cNvSpPr/>
-          <p:nvPr/>
-        </p:nvSpPr>
-        <p:spPr>
-          <a:xfrm>
-            <a:off x="1460500" y="1905000"/>
-            <a:ext cx="4953000" cy="635000"/>
-          </a:xfrm>
-          <a:prstGeom prst="roundRect">
-            <a:avLst>
-              <a:gd name="adj" fmla="val 6000"/>
-            </a:avLst>
-          </a:prstGeom>
-          <a:solidFill>
-            <a:srgbClr val="FFFFFF"/>
-          </a:solidFill>
-          <a:ln w="9525">
-            <a:solidFill>
-              <a:srgbClr val="DDE1E7"/>
-            </a:solidFill>
-            <a:prstDash val="solid"/>
-          </a:ln>
-          <a:effectLst>
-            <a:outerShdw sx="100000" sy="100000" kx="0" ky="0" algn="bl" rotWithShape="0" blurRad="38100" dist="12700" dir="5400000">
-              <a:srgbClr val="101828">
-                <a:alpha val="8000"/>
-              </a:srgbClr>
-            </a:outerShdw>
-          </a:effectLst>
-        </p:spPr>
-      </p:sp>
-      <p:sp>
-        <p:nvSpPr>
-          <p:cNvPr id="18" name="Text 16"/>
-          <p:cNvSpPr txBox="1"/>
-          <p:nvPr/>
-        </p:nvSpPr>
-        <p:spPr>
-          <a:xfrm>
-            <a:off x="1600200" y="1993900"/>
-            <a:ext cx="4673600" cy="190500"/>
-          </a:xfrm>
-          <a:prstGeom prst="rect">
-            <a:avLst/>
-          </a:prstGeom>
-          <a:noFill/>
-          <a:ln/>
-        </p:spPr>
-        <p:txBody>
-          <a:bodyPr wrap="none" lIns="0" tIns="0" rIns="0" bIns="0" rtlCol="0" anchor="t"/>
-          <a:lstStyle/>
-          <a:p>
-            <a:pPr algn="l" indent="0" marL="0">
-              <a:lnSpc>
-                <a:spcPct val="115000"/>
-              </a:lnSpc>
-              <a:buNone/>
-            </a:pPr>
-            <a:r>
-              <a:rPr lang="en-US" sz="1150" b="1" dirty="0">
-                <a:solidFill>
-                  <a:srgbClr val="1B2430"/>
-                </a:solidFill>
-                <a:latin typeface="Public Sans" pitchFamily="34" charset="0"/>
-                <a:ea typeface="Public Sans" pitchFamily="34" charset="-122"/>
-                <a:cs typeface="Public Sans" pitchFamily="34" charset="-120"/>
-              </a:rPr>
-              <a:t>React 19 UI · TypeScript strict · Vite · TanStack Query</a:t>
-            </a:r>
-            <a:endParaRPr lang="en-US" sz="1150" dirty="0"/>
-          </a:p>
-        </p:txBody>
-      </p:sp>
-      <p:sp>
-        <p:nvSpPr>
-          <p:cNvPr id="19" name="Text 17"/>
-          <p:cNvSpPr txBox="1"/>
-          <p:nvPr/>
-        </p:nvSpPr>
-        <p:spPr>
-          <a:xfrm>
-            <a:off x="1600200" y="2171700"/>
-            <a:ext cx="4673600" cy="342900"/>
-          </a:xfrm>
-          <a:prstGeom prst="rect">
-            <a:avLst/>
-          </a:prstGeom>
-          <a:noFill/>
-          <a:ln/>
-        </p:spPr>
-        <p:txBody>
-          <a:bodyPr wrap="square" lIns="0" tIns="0" rIns="0" bIns="0" rtlCol="0" anchor="t"/>
-          <a:lstStyle/>
-          <a:p>
-            <a:pPr algn="l" indent="0" marL="0">
-              <a:lnSpc>
-                <a:spcPct val="115000"/>
-              </a:lnSpc>
-              <a:buNone/>
-            </a:pPr>
-            <a:r>
-              <a:rPr lang="en-US" sz="1000" dirty="0">
-                <a:solidFill>
-                  <a:srgbClr val="465060"/>
-                </a:solidFill>
-                <a:latin typeface="Public Sans" pitchFamily="34" charset="0"/>
-                <a:ea typeface="Public Sans" pitchFamily="34" charset="-122"/>
-                <a:cs typeface="Public Sans" pitchFamily="34" charset="-120"/>
-              </a:rPr>
-              <a:t>Operator and officer workspaces, role-specific labels; a check's status is polled while it runs</a:t>
-            </a:r>
-            <a:endParaRPr lang="en-US" sz="1000" dirty="0"/>
-          </a:p>
-        </p:txBody>
-      </p:sp>
-      <p:sp>
-        <p:nvSpPr>
-          <p:cNvPr id="20" name="Shape 18"/>
-          <p:cNvSpPr/>
-          <p:nvPr/>
-        </p:nvSpPr>
-        <p:spPr>
-          <a:xfrm>
-            <a:off x="7048500" y="1905000"/>
-            <a:ext cx="3556000" cy="635000"/>
-          </a:xfrm>
-          <a:prstGeom prst="roundRect">
-            <a:avLst>
-              <a:gd name="adj" fmla="val 6000"/>
-            </a:avLst>
-          </a:prstGeom>
-          <a:solidFill>
-            <a:srgbClr val="F8F9FB"/>
-          </a:solidFill>
-          <a:ln w="9525">
-            <a:solidFill>
-              <a:srgbClr val="DDE1E7"/>
-            </a:solidFill>
-            <a:prstDash val="solid"/>
-          </a:ln>
-          <a:effectLst>
-            <a:outerShdw sx="100000" sy="100000" kx="0" ky="0" algn="bl" rotWithShape="0" blurRad="38100" dist="12700" dir="5400000">
-              <a:srgbClr val="101828">
-                <a:alpha val="8000"/>
-              </a:srgbClr>
-            </a:outerShdw>
-          </a:effectLst>
-        </p:spPr>
-      </p:sp>
-      <p:sp>
-        <p:nvSpPr>
-          <p:cNvPr id="21" name="Text 19"/>
-          <p:cNvSpPr txBox="1"/>
-          <p:nvPr/>
-        </p:nvSpPr>
-        <p:spPr>
-          <a:xfrm>
-            <a:off x="7188200" y="1993900"/>
-            <a:ext cx="3276600" cy="190500"/>
-          </a:xfrm>
-          <a:prstGeom prst="rect">
-            <a:avLst/>
-          </a:prstGeom>
-          <a:noFill/>
-          <a:ln/>
-        </p:spPr>
-        <p:txBody>
-          <a:bodyPr wrap="none" lIns="0" tIns="0" rIns="0" bIns="0" rtlCol="0" anchor="t"/>
-          <a:lstStyle/>
-          <a:p>
-            <a:pPr algn="l" indent="0" marL="0">
-              <a:lnSpc>
-                <a:spcPct val="115000"/>
-              </a:lnSpc>
-              <a:buNone/>
-            </a:pPr>
-            <a:r>
-              <a:rPr lang="en-US" sz="1150" b="1" dirty="0">
-                <a:solidFill>
-                  <a:srgbClr val="1B2430"/>
-                </a:solidFill>
-                <a:latin typeface="Public Sans" pitchFamily="34" charset="0"/>
-                <a:ea typeface="Public Sans" pitchFamily="34" charset="-122"/>
-                <a:cs typeface="Public Sans" pitchFamily="34" charset="-120"/>
-              </a:rPr>
-              <a:t>Operator · Officer · Admin (reserved)</a:t>
-            </a:r>
-            <a:endParaRPr lang="en-US" sz="1150" dirty="0"/>
-          </a:p>
-        </p:txBody>
-      </p:sp>
-      <p:sp>
-        <p:nvSpPr>
-          <p:cNvPr id="22" name="Text 20"/>
-          <p:cNvSpPr txBox="1"/>
-          <p:nvPr/>
-        </p:nvSpPr>
-        <p:spPr>
-          <a:xfrm>
-            <a:off x="7188200" y="2171700"/>
-            <a:ext cx="3276600" cy="342900"/>
-          </a:xfrm>
-          <a:prstGeom prst="rect">
-            <a:avLst/>
-          </a:prstGeom>
-          <a:noFill/>
-          <a:ln/>
-        </p:spPr>
-        <p:txBody>
-          <a:bodyPr wrap="square" lIns="0" tIns="0" rIns="0" bIns="0" rtlCol="0" anchor="t"/>
-          <a:lstStyle/>
-          <a:p>
-            <a:pPr algn="l" indent="0" marL="0">
-              <a:lnSpc>
-                <a:spcPct val="115000"/>
-              </a:lnSpc>
-              <a:buNone/>
-            </a:pPr>
-            <a:r>
-              <a:rPr lang="en-US" sz="1000" dirty="0">
-                <a:solidFill>
-                  <a:srgbClr val="465060"/>
-                </a:solidFill>
-                <a:latin typeface="Public Sans" pitchFamily="34" charset="0"/>
-                <a:ea typeface="Public Sans" pitchFamily="34" charset="-122"/>
-                <a:cs typeface="Public Sans" pitchFamily="34" charset="-120"/>
-              </a:rPr>
-              <a:t>Three roles; every authorization decision is made on the server</a:t>
-            </a:r>
-            <a:endParaRPr lang="en-US" sz="1000" dirty="0"/>
-          </a:p>
-        </p:txBody>
-      </p:sp>
-      <p:sp>
-        <p:nvSpPr>
-          <p:cNvPr id="23" name="Shape 21"/>
-          <p:cNvSpPr/>
-          <p:nvPr/>
-        </p:nvSpPr>
-        <p:spPr>
-          <a:xfrm>
-            <a:off x="1460500" y="2794000"/>
-            <a:ext cx="4953000" cy="635000"/>
-          </a:xfrm>
-          <a:prstGeom prst="roundRect">
-            <a:avLst>
-              <a:gd name="adj" fmla="val 6000"/>
-            </a:avLst>
-          </a:prstGeom>
-          <a:solidFill>
-            <a:srgbClr val="FFFFFF"/>
-          </a:solidFill>
-          <a:ln w="9525">
-            <a:solidFill>
-              <a:srgbClr val="DDE1E7"/>
-            </a:solidFill>
-            <a:prstDash val="solid"/>
-          </a:ln>
-          <a:effectLst>
-            <a:outerShdw sx="100000" sy="100000" kx="0" ky="0" algn="bl" rotWithShape="0" blurRad="38100" dist="12700" dir="5400000">
-              <a:srgbClr val="101828">
-                <a:alpha val="8000"/>
-              </a:srgbClr>
-            </a:outerShdw>
-          </a:effectLst>
-        </p:spPr>
-      </p:sp>
-      <p:sp>
-        <p:nvSpPr>
-          <p:cNvPr id="24" name="Text 22"/>
-          <p:cNvSpPr txBox="1"/>
-          <p:nvPr/>
-        </p:nvSpPr>
-        <p:spPr>
-          <a:xfrm>
-            <a:off x="1600200" y="2882900"/>
-            <a:ext cx="4673600" cy="190500"/>
-          </a:xfrm>
-          <a:prstGeom prst="rect">
-            <a:avLst/>
-          </a:prstGeom>
-          <a:noFill/>
-          <a:ln/>
-        </p:spPr>
-        <p:txBody>
-          <a:bodyPr wrap="none" lIns="0" tIns="0" rIns="0" bIns="0" rtlCol="0" anchor="t"/>
-          <a:lstStyle/>
-          <a:p>
-            <a:pPr algn="l" indent="0" marL="0">
-              <a:lnSpc>
-                <a:spcPct val="115000"/>
-              </a:lnSpc>
-              <a:buNone/>
-            </a:pPr>
-            <a:r>
-              <a:rPr lang="en-US" sz="1150" b="1" dirty="0">
-                <a:solidFill>
-                  <a:srgbClr val="1B2430"/>
-                </a:solidFill>
-                <a:latin typeface="Public Sans" pitchFamily="34" charset="0"/>
-                <a:ea typeface="Public Sans" pitchFamily="34" charset="-122"/>
-                <a:cs typeface="Public Sans" pitchFamily="34" charset="-120"/>
-              </a:rPr>
-              <a:t>FastAPI · JWT with a role claim · rate limits</a:t>
-            </a:r>
-            <a:endParaRPr lang="en-US" sz="1150" dirty="0"/>
-          </a:p>
-        </p:txBody>
-      </p:sp>
-      <p:sp>
-        <p:nvSpPr>
-          <p:cNvPr id="25" name="Text 23"/>
-          <p:cNvSpPr txBox="1"/>
-          <p:nvPr/>
-        </p:nvSpPr>
-        <p:spPr>
-          <a:xfrm>
-            <a:off x="1600200" y="3060700"/>
-            <a:ext cx="4673600" cy="342900"/>
-          </a:xfrm>
-          <a:prstGeom prst="rect">
-            <a:avLst/>
-          </a:prstGeom>
-          <a:noFill/>
-          <a:ln/>
-        </p:spPr>
-        <p:txBody>
-          <a:bodyPr wrap="square" lIns="0" tIns="0" rIns="0" bIns="0" rtlCol="0" anchor="t"/>
-          <a:lstStyle/>
-          <a:p>
-            <a:pPr algn="l" indent="0" marL="0">
-              <a:lnSpc>
-                <a:spcPct val="115000"/>
-              </a:lnSpc>
-              <a:buNone/>
-            </a:pPr>
-            <a:r>
-              <a:rPr lang="en-US" sz="1000" dirty="0">
-                <a:solidFill>
-                  <a:srgbClr val="465060"/>
-                </a:solidFill>
-                <a:latin typeface="Public Sans" pitchFamily="34" charset="0"/>
-                <a:ea typeface="Public Sans" pitchFamily="34" charset="-122"/>
-                <a:cs typeface="Public Sans" pitchFamily="34" charset="-120"/>
-              </a:rPr>
-              <a:t>Role guard per router, ownership as 404, one error envelope with a request id</a:t>
-            </a:r>
-            <a:endParaRPr lang="en-US" sz="1000" dirty="0"/>
-          </a:p>
-        </p:txBody>
-      </p:sp>
-      <p:sp>
-        <p:nvSpPr>
-          <p:cNvPr id="26" name="Shape 24"/>
-          <p:cNvSpPr/>
-          <p:nvPr/>
-        </p:nvSpPr>
-        <p:spPr>
-          <a:xfrm>
-            <a:off x="7048500" y="2794000"/>
-            <a:ext cx="3556000" cy="635000"/>
-          </a:xfrm>
-          <a:prstGeom prst="roundRect">
-            <a:avLst>
-              <a:gd name="adj" fmla="val 6000"/>
-            </a:avLst>
-          </a:prstGeom>
-          <a:solidFill>
-            <a:srgbClr val="FFFFFF"/>
-          </a:solidFill>
-          <a:ln w="9525">
-            <a:solidFill>
-              <a:srgbClr val="DDE1E7"/>
-            </a:solidFill>
-            <a:prstDash val="solid"/>
-          </a:ln>
-          <a:effectLst>
-            <a:outerShdw sx="100000" sy="100000" kx="0" ky="0" algn="bl" rotWithShape="0" blurRad="38100" dist="12700" dir="5400000">
-              <a:srgbClr val="101828">
-                <a:alpha val="8000"/>
-              </a:srgbClr>
-            </a:outerShdw>
-          </a:effectLst>
-        </p:spPr>
-      </p:sp>
-      <p:sp>
-        <p:nvSpPr>
-          <p:cNvPr id="27" name="Text 25"/>
-          <p:cNvSpPr txBox="1"/>
-          <p:nvPr/>
-        </p:nvSpPr>
-        <p:spPr>
-          <a:xfrm>
-            <a:off x="7188200" y="2882900"/>
-            <a:ext cx="3276600" cy="190500"/>
-          </a:xfrm>
-          <a:prstGeom prst="rect">
-            <a:avLst/>
-          </a:prstGeom>
-          <a:noFill/>
-          <a:ln/>
-        </p:spPr>
-        <p:txBody>
-          <a:bodyPr wrap="none" lIns="0" tIns="0" rIns="0" bIns="0" rtlCol="0" anchor="t"/>
-          <a:lstStyle/>
-          <a:p>
-            <a:pPr algn="l" indent="0" marL="0">
-              <a:lnSpc>
-                <a:spcPct val="115000"/>
-              </a:lnSpc>
-              <a:buNone/>
-            </a:pPr>
-            <a:r>
-              <a:rPr lang="en-US" sz="1150" b="1" dirty="0">
-                <a:solidFill>
-                  <a:srgbClr val="1B2430"/>
-                </a:solidFill>
-                <a:latin typeface="Public Sans" pitchFamily="34" charset="0"/>
-                <a:ea typeface="Public Sans" pitchFamily="34" charset="-122"/>
-                <a:cs typeface="Public Sans" pitchFamily="34" charset="-120"/>
-              </a:rPr>
-              <a:t>AI verification</a:t>
-            </a:r>
-            <a:endParaRPr lang="en-US" sz="1150" dirty="0"/>
-          </a:p>
-        </p:txBody>
-      </p:sp>
-      <p:sp>
-        <p:nvSpPr>
-          <p:cNvPr id="28" name="Text 26"/>
-          <p:cNvSpPr txBox="1"/>
-          <p:nvPr/>
-        </p:nvSpPr>
-        <p:spPr>
-          <a:xfrm>
-            <a:off x="7188200" y="3060700"/>
-            <a:ext cx="3276600" cy="342900"/>
-          </a:xfrm>
-          <a:prstGeom prst="rect">
-            <a:avLst/>
-          </a:prstGeom>
-          <a:noFill/>
-          <a:ln/>
-        </p:spPr>
-        <p:txBody>
-          <a:bodyPr wrap="square" lIns="0" tIns="0" rIns="0" bIns="0" rtlCol="0" anchor="t"/>
-          <a:lstStyle/>
-          <a:p>
-            <a:pPr algn="l" indent="0" marL="0">
-              <a:lnSpc>
-                <a:spcPct val="115000"/>
-              </a:lnSpc>
-              <a:buNone/>
-            </a:pPr>
-            <a:r>
-              <a:rPr lang="en-US" sz="1000" dirty="0">
-                <a:solidFill>
-                  <a:srgbClr val="465060"/>
-                </a:solidFill>
-                <a:latin typeface="Public Sans" pitchFamily="34" charset="0"/>
-                <a:ea typeface="Public Sans" pitchFamily="34" charset="-122"/>
-                <a:cs typeface="Public Sans" pitchFamily="34" charset="-120"/>
-              </a:rPr>
-              <a:t>In-process background task per upload; Re-run check recovers after a restart</a:t>
-            </a:r>
-            <a:endParaRPr lang="en-US" sz="1000" dirty="0"/>
-          </a:p>
-        </p:txBody>
-      </p:sp>
-      <p:sp>
-        <p:nvSpPr>
-          <p:cNvPr id="29" name="Shape 27"/>
-          <p:cNvSpPr/>
-          <p:nvPr/>
-        </p:nvSpPr>
-        <p:spPr>
-          <a:xfrm>
-            <a:off x="1460500" y="3683000"/>
-            <a:ext cx="4953000" cy="635000"/>
-          </a:xfrm>
-          <a:prstGeom prst="roundRect">
-            <a:avLst>
-              <a:gd name="adj" fmla="val 6000"/>
-            </a:avLst>
-          </a:prstGeom>
-          <a:solidFill>
-            <a:srgbClr val="FFFFFF"/>
-          </a:solidFill>
-          <a:ln w="9525">
-            <a:solidFill>
-              <a:srgbClr val="DDE1E7"/>
-            </a:solidFill>
-            <a:prstDash val="solid"/>
-          </a:ln>
-          <a:effectLst>
-            <a:outerShdw sx="100000" sy="100000" kx="0" ky="0" algn="bl" rotWithShape="0" blurRad="38100" dist="12700" dir="5400000">
-              <a:srgbClr val="101828">
-                <a:alpha val="8000"/>
-              </a:srgbClr>
-            </a:outerShdw>
-          </a:effectLst>
-        </p:spPr>
-      </p:sp>
-      <p:sp>
-        <p:nvSpPr>
-          <p:cNvPr id="30" name="Text 28"/>
-          <p:cNvSpPr txBox="1"/>
-          <p:nvPr/>
-        </p:nvSpPr>
-        <p:spPr>
-          <a:xfrm>
-            <a:off x="1600200" y="3771900"/>
-            <a:ext cx="4673600" cy="190500"/>
-          </a:xfrm>
-          <a:prstGeom prst="rect">
-            <a:avLst/>
-          </a:prstGeom>
-          <a:noFill/>
-          <a:ln/>
-        </p:spPr>
-        <p:txBody>
-          <a:bodyPr wrap="none" lIns="0" tIns="0" rIns="0" bIns="0" rtlCol="0" anchor="t"/>
-          <a:lstStyle/>
-          <a:p>
-            <a:pPr algn="l" indent="0" marL="0">
-              <a:lnSpc>
-                <a:spcPct val="115000"/>
-              </a:lnSpc>
-              <a:buNone/>
-            </a:pPr>
-            <a:r>
-              <a:rPr lang="en-US" sz="1150" b="1" dirty="0">
-                <a:solidFill>
-                  <a:srgbClr val="1B2430"/>
-                </a:solidFill>
-                <a:latin typeface="Public Sans" pitchFamily="34" charset="0"/>
-                <a:ea typeface="Public Sans" pitchFamily="34" charset="-122"/>
-                <a:cs typeface="Public Sans" pitchFamily="34" charset="-120"/>
-              </a:rPr>
-              <a:t>Application services · pure Python domain</a:t>
-            </a:r>
-            <a:endParaRPr lang="en-US" sz="1150" dirty="0"/>
-          </a:p>
-        </p:txBody>
-      </p:sp>
-      <p:sp>
-        <p:nvSpPr>
-          <p:cNvPr id="31" name="Text 29"/>
-          <p:cNvSpPr txBox="1"/>
-          <p:nvPr/>
-        </p:nvSpPr>
-        <p:spPr>
-          <a:xfrm>
-            <a:off x="1600200" y="3949700"/>
-            <a:ext cx="4673600" cy="342900"/>
-          </a:xfrm>
-          <a:prstGeom prst="rect">
-            <a:avLst/>
-          </a:prstGeom>
-          <a:noFill/>
-          <a:ln/>
-        </p:spPr>
-        <p:txBody>
-          <a:bodyPr wrap="square" lIns="0" tIns="0" rIns="0" bIns="0" rtlCol="0" anchor="t"/>
-          <a:lstStyle/>
-          <a:p>
-            <a:pPr algn="l" indent="0" marL="0">
-              <a:lnSpc>
-                <a:spcPct val="115000"/>
-              </a:lnSpc>
-              <a:buNone/>
-            </a:pPr>
-            <a:r>
-              <a:rPr lang="en-US" sz="1000" dirty="0">
-                <a:solidFill>
-                  <a:srgbClr val="465060"/>
-                </a:solidFill>
-                <a:latin typeface="Public Sans" pitchFamily="34" charset="0"/>
-                <a:ea typeface="Public Sans" pitchFamily="34" charset="-122"/>
-                <a:cs typeface="Public Sans" pitchFamily="34" charset="-120"/>
-              </a:rPr>
-              <a:t>Workflow table, verification rules, diff, upload rules; no FastAPI or SQLAlchemy import</a:t>
-            </a:r>
-            <a:endParaRPr lang="en-US" sz="1000" dirty="0"/>
-          </a:p>
-        </p:txBody>
-      </p:sp>
-      <p:sp>
-        <p:nvSpPr>
-          <p:cNvPr id="32" name="Shape 30"/>
-          <p:cNvSpPr/>
-          <p:nvPr/>
-        </p:nvSpPr>
-        <p:spPr>
-          <a:xfrm>
-            <a:off x="7048500" y="3683000"/>
-            <a:ext cx="3556000" cy="635000"/>
-          </a:xfrm>
-          <a:prstGeom prst="roundRect">
-            <a:avLst>
-              <a:gd name="adj" fmla="val 6000"/>
-            </a:avLst>
-          </a:prstGeom>
-          <a:solidFill>
-            <a:srgbClr val="FFFFFF"/>
-          </a:solidFill>
-          <a:ln w="9525">
-            <a:solidFill>
-              <a:srgbClr val="DDE1E7"/>
-            </a:solidFill>
-            <a:prstDash val="solid"/>
-          </a:ln>
-          <a:effectLst>
-            <a:outerShdw sx="100000" sy="100000" kx="0" ky="0" algn="bl" rotWithShape="0" blurRad="38100" dist="12700" dir="5400000">
-              <a:srgbClr val="101828">
-                <a:alpha val="8000"/>
-              </a:srgbClr>
-            </a:outerShdw>
-          </a:effectLst>
-        </p:spPr>
-      </p:sp>
-      <p:sp>
-        <p:nvSpPr>
-          <p:cNvPr id="33" name="Text 31"/>
-          <p:cNvSpPr txBox="1"/>
-          <p:nvPr/>
-        </p:nvSpPr>
-        <p:spPr>
-          <a:xfrm>
-            <a:off x="7188200" y="3771900"/>
-            <a:ext cx="3276600" cy="190500"/>
-          </a:xfrm>
-          <a:prstGeom prst="rect">
-            <a:avLst/>
-          </a:prstGeom>
-          <a:noFill/>
-          <a:ln/>
-        </p:spPr>
-        <p:txBody>
-          <a:bodyPr wrap="none" lIns="0" tIns="0" rIns="0" bIns="0" rtlCol="0" anchor="t"/>
-          <a:lstStyle/>
-          <a:p>
-            <a:pPr algn="l" indent="0" marL="0">
-              <a:lnSpc>
-                <a:spcPct val="115000"/>
-              </a:lnSpc>
-              <a:buNone/>
-            </a:pPr>
-            <a:r>
-              <a:rPr lang="en-US" sz="1150" b="1" dirty="0">
-                <a:solidFill>
-                  <a:srgbClr val="1B2430"/>
-                </a:solidFill>
-                <a:latin typeface="Public Sans" pitchFamily="34" charset="0"/>
-                <a:ea typeface="Public Sans" pitchFamily="34" charset="-122"/>
-                <a:cs typeface="Public Sans" pitchFamily="34" charset="-120"/>
-              </a:rPr>
-              <a:t>VerificationProvider</a:t>
-            </a:r>
-            <a:endParaRPr lang="en-US" sz="1150" dirty="0"/>
-          </a:p>
-        </p:txBody>
-      </p:sp>
-      <p:sp>
-        <p:nvSpPr>
-          <p:cNvPr id="34" name="Text 32"/>
-          <p:cNvSpPr txBox="1"/>
-          <p:nvPr/>
-        </p:nvSpPr>
-        <p:spPr>
-          <a:xfrm>
-            <a:off x="7188200" y="3949700"/>
-            <a:ext cx="3276600" cy="342900"/>
-          </a:xfrm>
-          <a:prstGeom prst="rect">
-            <a:avLst/>
-          </a:prstGeom>
-          <a:noFill/>
-          <a:ln/>
-        </p:spPr>
-        <p:txBody>
-          <a:bodyPr wrap="square" lIns="0" tIns="0" rIns="0" bIns="0" rtlCol="0" anchor="t"/>
-          <a:lstStyle/>
-          <a:p>
-            <a:pPr algn="l" indent="0" marL="0">
-              <a:lnSpc>
-                <a:spcPct val="115000"/>
-              </a:lnSpc>
-              <a:buNone/>
-            </a:pPr>
-            <a:r>
-              <a:rPr lang="en-US" sz="1000" dirty="0">
-                <a:solidFill>
-                  <a:srgbClr val="465060"/>
-                </a:solidFill>
-                <a:latin typeface="Public Sans" pitchFamily="34" charset="0"/>
-                <a:ea typeface="Public Sans" pitchFamily="34" charset="-122"/>
-                <a:cs typeface="Public Sans" pitchFamily="34" charset="-120"/>
-              </a:rPr>
-              <a:t>Structured output through two strict schemas, then deterministic post-rules</a:t>
-            </a:r>
-            <a:endParaRPr lang="en-US" sz="1000" dirty="0"/>
-          </a:p>
-        </p:txBody>
-      </p:sp>
-      <p:sp>
-        <p:nvSpPr>
-          <p:cNvPr id="35" name="Shape 33"/>
-          <p:cNvSpPr/>
-          <p:nvPr/>
-        </p:nvSpPr>
-        <p:spPr>
-          <a:xfrm>
-            <a:off x="1460500" y="4572000"/>
-            <a:ext cx="3048000" cy="635000"/>
-          </a:xfrm>
-          <a:prstGeom prst="roundRect">
-            <a:avLst>
-              <a:gd name="adj" fmla="val 6000"/>
-            </a:avLst>
-          </a:prstGeom>
-          <a:solidFill>
-            <a:srgbClr val="FFFFFF"/>
-          </a:solidFill>
-          <a:ln w="9525">
-            <a:solidFill>
-              <a:srgbClr val="DDE1E7"/>
-            </a:solidFill>
-            <a:prstDash val="solid"/>
-          </a:ln>
-          <a:effectLst>
-            <a:outerShdw sx="100000" sy="100000" kx="0" ky="0" algn="bl" rotWithShape="0" blurRad="38100" dist="12700" dir="5400000">
-              <a:srgbClr val="101828">
-                <a:alpha val="8000"/>
-              </a:srgbClr>
-            </a:outerShdw>
-          </a:effectLst>
-        </p:spPr>
-      </p:sp>
-      <p:sp>
-        <p:nvSpPr>
-          <p:cNvPr id="36" name="Text 34"/>
-          <p:cNvSpPr txBox="1"/>
-          <p:nvPr/>
-        </p:nvSpPr>
-        <p:spPr>
-          <a:xfrm>
-            <a:off x="1600200" y="4660900"/>
-            <a:ext cx="2768600" cy="190500"/>
-          </a:xfrm>
-          <a:prstGeom prst="rect">
-            <a:avLst/>
-          </a:prstGeom>
-          <a:noFill/>
-          <a:ln/>
-        </p:spPr>
-        <p:txBody>
-          <a:bodyPr wrap="none" lIns="0" tIns="0" rIns="0" bIns="0" rtlCol="0" anchor="t"/>
-          <a:lstStyle/>
-          <a:p>
-            <a:pPr algn="l" indent="0" marL="0">
-              <a:lnSpc>
-                <a:spcPct val="115000"/>
-              </a:lnSpc>
-              <a:buNone/>
-            </a:pPr>
-            <a:r>
-              <a:rPr lang="en-US" sz="1150" b="1" dirty="0">
-                <a:solidFill>
-                  <a:srgbClr val="1B2430"/>
-                </a:solidFill>
-                <a:latin typeface="Public Sans" pitchFamily="34" charset="0"/>
-                <a:ea typeface="Public Sans" pitchFamily="34" charset="-122"/>
-                <a:cs typeface="Public Sans" pitchFamily="34" charset="-120"/>
-              </a:rPr>
-              <a:t>Repositories · audit trail</a:t>
-            </a:r>
-            <a:endParaRPr lang="en-US" sz="1150" dirty="0"/>
-          </a:p>
-        </p:txBody>
-      </p:sp>
-      <p:sp>
-        <p:nvSpPr>
-          <p:cNvPr id="37" name="Text 35"/>
-          <p:cNvSpPr txBox="1"/>
-          <p:nvPr/>
-        </p:nvSpPr>
-        <p:spPr>
-          <a:xfrm>
-            <a:off x="1600200" y="4838700"/>
-            <a:ext cx="2768600" cy="342900"/>
-          </a:xfrm>
-          <a:prstGeom prst="rect">
-            <a:avLst/>
-          </a:prstGeom>
-          <a:noFill/>
-          <a:ln/>
-        </p:spPr>
-        <p:txBody>
-          <a:bodyPr wrap="square" lIns="0" tIns="0" rIns="0" bIns="0" rtlCol="0" anchor="t"/>
-          <a:lstStyle/>
-          <a:p>
-            <a:pPr algn="l" indent="0" marL="0">
-              <a:lnSpc>
-                <a:spcPct val="115000"/>
-              </a:lnSpc>
-              <a:buNone/>
-            </a:pPr>
-            <a:r>
-              <a:rPr lang="en-US" sz="1000" dirty="0">
-                <a:solidFill>
-                  <a:srgbClr val="465060"/>
-                </a:solidFill>
-                <a:latin typeface="Public Sans" pitchFamily="34" charset="0"/>
-                <a:ea typeface="Public Sans" pitchFamily="34" charset="-122"/>
-                <a:cs typeface="Public Sans" pitchFamily="34" charset="-120"/>
-              </a:rPr>
-              <a:t>Append-only audit rows in the same transaction</a:t>
-            </a:r>
-            <a:endParaRPr lang="en-US" sz="1000" dirty="0"/>
-          </a:p>
-        </p:txBody>
-      </p:sp>
-      <p:sp>
-        <p:nvSpPr>
-          <p:cNvPr id="38" name="Shape 36"/>
-          <p:cNvSpPr/>
-          <p:nvPr/>
-        </p:nvSpPr>
-        <p:spPr>
-          <a:xfrm>
-            <a:off x="4762500" y="4572000"/>
-            <a:ext cx="1651000" cy="635000"/>
-          </a:xfrm>
-          <a:prstGeom prst="roundRect">
-            <a:avLst>
-              <a:gd name="adj" fmla="val 6000"/>
-            </a:avLst>
-          </a:prstGeom>
-          <a:solidFill>
-            <a:srgbClr val="FFFFFF"/>
-          </a:solidFill>
-          <a:ln w="9525">
-            <a:solidFill>
-              <a:srgbClr val="DDE1E7"/>
-            </a:solidFill>
-            <a:prstDash val="solid"/>
-          </a:ln>
-          <a:effectLst>
-            <a:outerShdw sx="100000" sy="100000" kx="0" ky="0" algn="bl" rotWithShape="0" blurRad="38100" dist="12700" dir="5400000">
-              <a:srgbClr val="101828">
-                <a:alpha val="8000"/>
-              </a:srgbClr>
-            </a:outerShdw>
-          </a:effectLst>
-        </p:spPr>
-      </p:sp>
-      <p:sp>
-        <p:nvSpPr>
-          <p:cNvPr id="39" name="Text 37"/>
-          <p:cNvSpPr txBox="1"/>
-          <p:nvPr/>
-        </p:nvSpPr>
-        <p:spPr>
-          <a:xfrm>
-            <a:off x="4902200" y="4660900"/>
-            <a:ext cx="1371600" cy="190500"/>
-          </a:xfrm>
-          <a:prstGeom prst="rect">
-            <a:avLst/>
-          </a:prstGeom>
-          <a:noFill/>
-          <a:ln/>
-        </p:spPr>
-        <p:txBody>
-          <a:bodyPr wrap="none" lIns="0" tIns="0" rIns="0" bIns="0" rtlCol="0" anchor="t"/>
-          <a:lstStyle/>
-          <a:p>
-            <a:pPr algn="l" indent="0" marL="0">
-              <a:lnSpc>
-                <a:spcPct val="115000"/>
-              </a:lnSpc>
-              <a:buNone/>
-            </a:pPr>
-            <a:r>
-              <a:rPr lang="en-US" sz="1150" b="1" dirty="0">
-                <a:solidFill>
-                  <a:srgbClr val="1B2430"/>
-                </a:solidFill>
-                <a:latin typeface="Public Sans" pitchFamily="34" charset="0"/>
-                <a:ea typeface="Public Sans" pitchFamily="34" charset="-122"/>
-                <a:cs typeface="Public Sans" pitchFamily="34" charset="-120"/>
-              </a:rPr>
-              <a:t>FileStorage</a:t>
-            </a:r>
-            <a:endParaRPr lang="en-US" sz="1150" dirty="0"/>
-          </a:p>
-        </p:txBody>
-      </p:sp>
-      <p:sp>
-        <p:nvSpPr>
-          <p:cNvPr id="40" name="Text 38"/>
-          <p:cNvSpPr txBox="1"/>
-          <p:nvPr/>
-        </p:nvSpPr>
-        <p:spPr>
-          <a:xfrm>
-            <a:off x="4902200" y="4838700"/>
-            <a:ext cx="1371600" cy="342900"/>
-          </a:xfrm>
-          <a:prstGeom prst="rect">
-            <a:avLst/>
-          </a:prstGeom>
-          <a:noFill/>
-          <a:ln/>
-        </p:spPr>
-        <p:txBody>
-          <a:bodyPr wrap="square" lIns="0" tIns="0" rIns="0" bIns="0" rtlCol="0" anchor="t"/>
-          <a:lstStyle/>
-          <a:p>
-            <a:pPr algn="l" indent="0" marL="0">
-              <a:lnSpc>
-                <a:spcPct val="115000"/>
-              </a:lnSpc>
-              <a:buNone/>
-            </a:pPr>
-            <a:r>
-              <a:rPr lang="en-US" sz="1000" dirty="0">
-                <a:solidFill>
-                  <a:srgbClr val="465060"/>
-                </a:solidFill>
-                <a:latin typeface="Public Sans" pitchFamily="34" charset="0"/>
-                <a:ea typeface="Public Sans" pitchFamily="34" charset="-122"/>
-                <a:cs typeface="Public Sans" pitchFamily="34" charset="-120"/>
-              </a:rPr>
-              <a:t>Allowlist, 10 MB, magic bytes</a:t>
-            </a:r>
-            <a:endParaRPr lang="en-US" sz="1000" dirty="0"/>
-          </a:p>
-        </p:txBody>
-      </p:sp>
-      <p:sp>
-        <p:nvSpPr>
-          <p:cNvPr id="41" name="Shape 39"/>
-          <p:cNvSpPr/>
-          <p:nvPr/>
-        </p:nvSpPr>
-        <p:spPr>
-          <a:xfrm>
-            <a:off x="7048500" y="4572000"/>
-            <a:ext cx="3556000" cy="635000"/>
-          </a:xfrm>
-          <a:prstGeom prst="roundRect">
-            <a:avLst>
-              <a:gd name="adj" fmla="val 6000"/>
-            </a:avLst>
-          </a:prstGeom>
-          <a:solidFill>
-            <a:srgbClr val="F8F9FB"/>
-          </a:solidFill>
-          <a:ln w="9525">
-            <a:solidFill>
-              <a:srgbClr val="DDE1E7"/>
-            </a:solidFill>
-            <a:prstDash val="solid"/>
-          </a:ln>
-          <a:effectLst>
-            <a:outerShdw sx="100000" sy="100000" kx="0" ky="0" algn="bl" rotWithShape="0" blurRad="38100" dist="12700" dir="5400000">
-              <a:srgbClr val="101828">
-                <a:alpha val="8000"/>
-              </a:srgbClr>
-            </a:outerShdw>
-          </a:effectLst>
-        </p:spPr>
-      </p:sp>
-      <p:sp>
-        <p:nvSpPr>
-          <p:cNvPr id="42" name="Text 40"/>
-          <p:cNvSpPr txBox="1"/>
-          <p:nvPr/>
-        </p:nvSpPr>
-        <p:spPr>
-          <a:xfrm>
-            <a:off x="7188200" y="4660900"/>
-            <a:ext cx="3276600" cy="190500"/>
-          </a:xfrm>
-          <a:prstGeom prst="rect">
-            <a:avLst/>
-          </a:prstGeom>
-          <a:noFill/>
-          <a:ln/>
-        </p:spPr>
-        <p:txBody>
-          <a:bodyPr wrap="none" lIns="0" tIns="0" rIns="0" bIns="0" rtlCol="0" anchor="t"/>
-          <a:lstStyle/>
-          <a:p>
-            <a:pPr algn="l" indent="0" marL="0">
-              <a:lnSpc>
-                <a:spcPct val="115000"/>
-              </a:lnSpc>
-              <a:buNone/>
-            </a:pPr>
-            <a:r>
-              <a:rPr lang="en-US" sz="1150" b="1" dirty="0">
-                <a:solidFill>
-                  <a:srgbClr val="1B2430"/>
-                </a:solidFill>
-                <a:latin typeface="Public Sans" pitchFamily="34" charset="0"/>
-                <a:ea typeface="Public Sans" pitchFamily="34" charset="-122"/>
-                <a:cs typeface="Public Sans" pitchFamily="34" charset="-120"/>
-              </a:rPr>
-              <a:t>OpenAI (gpt-4.1-mini) or Mock</a:t>
-            </a:r>
-            <a:endParaRPr lang="en-US" sz="1150" dirty="0"/>
-          </a:p>
-        </p:txBody>
-      </p:sp>
-      <p:sp>
-        <p:nvSpPr>
-          <p:cNvPr id="43" name="Text 41"/>
-          <p:cNvSpPr txBox="1"/>
-          <p:nvPr/>
-        </p:nvSpPr>
-        <p:spPr>
-          <a:xfrm>
-            <a:off x="7188200" y="4838700"/>
-            <a:ext cx="3276600" cy="342900"/>
-          </a:xfrm>
-          <a:prstGeom prst="rect">
-            <a:avLst/>
-          </a:prstGeom>
-          <a:noFill/>
-          <a:ln/>
-        </p:spPr>
-        <p:txBody>
-          <a:bodyPr wrap="square" lIns="0" tIns="0" rIns="0" bIns="0" rtlCol="0" anchor="t"/>
-          <a:lstStyle/>
-          <a:p>
-            <a:pPr algn="l" indent="0" marL="0">
-              <a:lnSpc>
-                <a:spcPct val="115000"/>
-              </a:lnSpc>
-              <a:buNone/>
-            </a:pPr>
-            <a:r>
-              <a:rPr lang="en-US" sz="1000" dirty="0">
-                <a:solidFill>
-                  <a:srgbClr val="465060"/>
-                </a:solidFill>
-                <a:latin typeface="Public Sans" pitchFamily="34" charset="0"/>
-                <a:ea typeface="Public Sans" pitchFamily="34" charset="-122"/>
-                <a:cs typeface="Public Sans" pitchFamily="34" charset="-120"/>
-              </a:rPr>
-              <a:t>Mock by default, in tests and CI; with no key a check is stored unavailable, no model call</a:t>
-            </a:r>
-            <a:endParaRPr lang="en-US" sz="1000" dirty="0"/>
-          </a:p>
-        </p:txBody>
-      </p:sp>
-      <p:sp>
-        <p:nvSpPr>
-          <p:cNvPr id="44" name="Shape 42"/>
-          <p:cNvSpPr/>
-          <p:nvPr/>
-        </p:nvSpPr>
-        <p:spPr>
-          <a:xfrm>
-            <a:off x="1460500" y="5461000"/>
-            <a:ext cx="3048000" cy="635000"/>
-          </a:xfrm>
-          <a:prstGeom prst="roundRect">
-            <a:avLst>
-              <a:gd name="adj" fmla="val 6000"/>
-            </a:avLst>
-          </a:prstGeom>
-          <a:solidFill>
-            <a:srgbClr val="1B2430"/>
-          </a:solidFill>
-          <a:ln w="9525">
-            <a:solidFill>
-              <a:srgbClr val="1B2430"/>
-            </a:solidFill>
-            <a:prstDash val="solid"/>
-          </a:ln>
-        </p:spPr>
-      </p:sp>
-      <p:sp>
-        <p:nvSpPr>
-          <p:cNvPr id="45" name="Text 43"/>
-          <p:cNvSpPr txBox="1"/>
-          <p:nvPr/>
-        </p:nvSpPr>
-        <p:spPr>
-          <a:xfrm>
-            <a:off x="1600200" y="5549900"/>
-            <a:ext cx="2768600" cy="190500"/>
-          </a:xfrm>
-          <a:prstGeom prst="rect">
-            <a:avLst/>
-          </a:prstGeom>
-          <a:noFill/>
-          <a:ln/>
-        </p:spPr>
-        <p:txBody>
-          <a:bodyPr wrap="none" lIns="0" tIns="0" rIns="0" bIns="0" rtlCol="0" anchor="t"/>
-          <a:lstStyle/>
-          <a:p>
-            <a:pPr algn="l" indent="0" marL="0">
-              <a:lnSpc>
-                <a:spcPct val="115000"/>
-              </a:lnSpc>
-              <a:buNone/>
-            </a:pPr>
-            <a:r>
-              <a:rPr lang="en-US" sz="1150" b="1" dirty="0">
-                <a:solidFill>
-                  <a:srgbClr val="FFFFFF"/>
-                </a:solidFill>
-                <a:latin typeface="Public Sans" pitchFamily="34" charset="0"/>
-                <a:ea typeface="Public Sans" pitchFamily="34" charset="-122"/>
-                <a:cs typeface="Public Sans" pitchFamily="34" charset="-120"/>
-              </a:rPr>
-              <a:t>PostgreSQL 18</a:t>
-            </a:r>
-            <a:endParaRPr lang="en-US" sz="1150" dirty="0"/>
-          </a:p>
-        </p:txBody>
-      </p:sp>
-      <p:sp>
-        <p:nvSpPr>
-          <p:cNvPr id="46" name="Text 44"/>
-          <p:cNvSpPr txBox="1"/>
-          <p:nvPr/>
-        </p:nvSpPr>
-        <p:spPr>
-          <a:xfrm>
-            <a:off x="1600200" y="5727700"/>
-            <a:ext cx="2768600" cy="342900"/>
-          </a:xfrm>
-          <a:prstGeom prst="rect">
-            <a:avLst/>
-          </a:prstGeom>
-          <a:noFill/>
-          <a:ln/>
-        </p:spPr>
-        <p:txBody>
-          <a:bodyPr wrap="square" lIns="0" tIns="0" rIns="0" bIns="0" rtlCol="0" anchor="t"/>
-          <a:lstStyle/>
-          <a:p>
-            <a:pPr algn="l" indent="0" marL="0">
-              <a:lnSpc>
-                <a:spcPct val="115000"/>
-              </a:lnSpc>
-              <a:buNone/>
-            </a:pPr>
-            <a:r>
-              <a:rPr lang="en-US" sz="1000" dirty="0">
-                <a:solidFill>
-                  <a:srgbClr val="9AA3B0"/>
-                </a:solidFill>
-                <a:latin typeface="Public Sans" pitchFamily="34" charset="0"/>
-                <a:ea typeface="Public Sans" pitchFamily="34" charset="-122"/>
-                <a:cs typeface="Public Sans" pitchFamily="34" charset="-120"/>
-              </a:rPr>
-              <a:t>Row locks, UUIDs, revisions as JSONB snapshots; 18 on Railway, 16 locally and in CI</a:t>
-            </a:r>
-            <a:endParaRPr lang="en-US" sz="1000" dirty="0"/>
-          </a:p>
-        </p:txBody>
-      </p:sp>
-      <p:sp>
-        <p:nvSpPr>
-          <p:cNvPr id="47" name="Shape 45"/>
-          <p:cNvSpPr/>
-          <p:nvPr/>
-        </p:nvSpPr>
-        <p:spPr>
-          <a:xfrm>
-            <a:off x="4762500" y="5461000"/>
-            <a:ext cx="4064000" cy="635000"/>
-          </a:xfrm>
-          <a:prstGeom prst="roundRect">
-            <a:avLst>
-              <a:gd name="adj" fmla="val 6000"/>
-            </a:avLst>
-          </a:prstGeom>
-          <a:solidFill>
-            <a:srgbClr val="1B2430"/>
-          </a:solidFill>
-          <a:ln w="9525">
-            <a:solidFill>
-              <a:srgbClr val="1B2430"/>
-            </a:solidFill>
-            <a:prstDash val="solid"/>
-          </a:ln>
-        </p:spPr>
-      </p:sp>
-      <p:sp>
-        <p:nvSpPr>
-          <p:cNvPr id="48" name="Text 46"/>
-          <p:cNvSpPr txBox="1"/>
-          <p:nvPr/>
-        </p:nvSpPr>
-        <p:spPr>
-          <a:xfrm>
-            <a:off x="4902200" y="5549900"/>
-            <a:ext cx="3784600" cy="190500"/>
-          </a:xfrm>
-          <a:prstGeom prst="rect">
-            <a:avLst/>
-          </a:prstGeom>
-          <a:noFill/>
-          <a:ln/>
-        </p:spPr>
-        <p:txBody>
-          <a:bodyPr wrap="none" lIns="0" tIns="0" rIns="0" bIns="0" rtlCol="0" anchor="t"/>
-          <a:lstStyle/>
-          <a:p>
-            <a:pPr algn="l" indent="0" marL="0">
-              <a:lnSpc>
-                <a:spcPct val="115000"/>
-              </a:lnSpc>
-              <a:buNone/>
-            </a:pPr>
-            <a:r>
-              <a:rPr lang="en-US" sz="1150" b="1" dirty="0">
-                <a:solidFill>
-                  <a:srgbClr val="FFFFFF"/>
-                </a:solidFill>
-                <a:latin typeface="Public Sans" pitchFamily="34" charset="0"/>
-                <a:ea typeface="Public Sans" pitchFamily="34" charset="-122"/>
-                <a:cs typeface="Public Sans" pitchFamily="34" charset="-120"/>
-              </a:rPr>
-              <a:t>Railway · two environments</a:t>
-            </a:r>
-            <a:endParaRPr lang="en-US" sz="1150" dirty="0"/>
-          </a:p>
-        </p:txBody>
-      </p:sp>
-      <p:sp>
-        <p:nvSpPr>
-          <p:cNvPr id="49" name="Text 47"/>
-          <p:cNvSpPr txBox="1"/>
-          <p:nvPr/>
-        </p:nvSpPr>
-        <p:spPr>
-          <a:xfrm>
-            <a:off x="4902200" y="5727700"/>
-            <a:ext cx="3784600" cy="342900"/>
-          </a:xfrm>
-          <a:prstGeom prst="rect">
-            <a:avLst/>
-          </a:prstGeom>
-          <a:noFill/>
-          <a:ln/>
-        </p:spPr>
-        <p:txBody>
-          <a:bodyPr wrap="square" lIns="0" tIns="0" rIns="0" bIns="0" rtlCol="0" anchor="t"/>
-          <a:lstStyle/>
-          <a:p>
-            <a:pPr algn="l" indent="0" marL="0">
-              <a:lnSpc>
-                <a:spcPct val="115000"/>
-              </a:lnSpc>
-              <a:buNone/>
-            </a:pPr>
-            <a:r>
-              <a:rPr lang="en-US" sz="1000" dirty="0">
-                <a:solidFill>
-                  <a:srgbClr val="9AA3B0"/>
-                </a:solidFill>
-                <a:latin typeface="Public Sans" pitchFamily="34" charset="0"/>
-                <a:ea typeface="Public Sans" pitchFamily="34" charset="-122"/>
-                <a:cs typeface="Public Sans" pitchFamily="34" charset="-120"/>
-              </a:rPr>
-              <a:t>Images built once in CI; dev on push, production run by hand from main and paused for an approval; health gate</a:t>
-            </a:r>
-            <a:endParaRPr lang="en-US" sz="1000" dirty="0"/>
-          </a:p>
-        </p:txBody>
-      </p:sp>
-      <p:sp>
-        <p:nvSpPr>
-          <p:cNvPr id="50" name="Shape 48"/>
-          <p:cNvSpPr/>
-          <p:nvPr/>
-        </p:nvSpPr>
-        <p:spPr>
-          <a:xfrm>
-            <a:off x="9080500" y="5461000"/>
-            <a:ext cx="1524000" cy="635000"/>
-          </a:xfrm>
-          <a:prstGeom prst="roundRect">
-            <a:avLst>
-              <a:gd name="adj" fmla="val 6000"/>
-            </a:avLst>
-          </a:prstGeom>
-          <a:solidFill>
-            <a:srgbClr val="1B2430"/>
-          </a:solidFill>
-          <a:ln w="9525">
-            <a:solidFill>
-              <a:srgbClr val="1B2430"/>
-            </a:solidFill>
-            <a:prstDash val="solid"/>
-          </a:ln>
-        </p:spPr>
-      </p:sp>
-      <p:sp>
-        <p:nvSpPr>
-          <p:cNvPr id="51" name="Text 49"/>
-          <p:cNvSpPr txBox="1"/>
-          <p:nvPr/>
-        </p:nvSpPr>
-        <p:spPr>
-          <a:xfrm>
-            <a:off x="9220200" y="5549900"/>
-            <a:ext cx="1244600" cy="190500"/>
-          </a:xfrm>
-          <a:prstGeom prst="rect">
-            <a:avLst/>
-          </a:prstGeom>
-          <a:noFill/>
-          <a:ln/>
-        </p:spPr>
-        <p:txBody>
-          <a:bodyPr wrap="none" lIns="0" tIns="0" rIns="0" bIns="0" rtlCol="0" anchor="t"/>
-          <a:lstStyle/>
-          <a:p>
-            <a:pPr algn="l" indent="0" marL="0">
-              <a:lnSpc>
-                <a:spcPct val="115000"/>
-              </a:lnSpc>
-              <a:buNone/>
-            </a:pPr>
-            <a:r>
-              <a:rPr lang="en-US" sz="1150" b="1" dirty="0">
-                <a:solidFill>
-                  <a:srgbClr val="FFFFFF"/>
-                </a:solidFill>
-                <a:latin typeface="Public Sans" pitchFamily="34" charset="0"/>
-                <a:ea typeface="Public Sans" pitchFamily="34" charset="-122"/>
-                <a:cs typeface="Public Sans" pitchFamily="34" charset="-120"/>
-              </a:rPr>
-              <a:t>LangSmith · Prometheus · Grafana</a:t>
-            </a:r>
-            <a:endParaRPr lang="en-US" sz="1150" dirty="0"/>
-          </a:p>
-        </p:txBody>
-      </p:sp>
-      <p:sp>
-        <p:nvSpPr>
-          <p:cNvPr id="52" name="Text 50"/>
-          <p:cNvSpPr txBox="1"/>
-          <p:nvPr/>
-        </p:nvSpPr>
-        <p:spPr>
-          <a:xfrm>
-            <a:off x="9220200" y="5727700"/>
-            <a:ext cx="1244600" cy="342900"/>
-          </a:xfrm>
-          <a:prstGeom prst="rect">
-            <a:avLst/>
-          </a:prstGeom>
-          <a:noFill/>
-          <a:ln/>
-        </p:spPr>
-        <p:txBody>
-          <a:bodyPr wrap="square" lIns="0" tIns="0" rIns="0" bIns="0" rtlCol="0" anchor="t"/>
-          <a:lstStyle/>
-          <a:p>
-            <a:pPr algn="l" indent="0" marL="0">
-              <a:lnSpc>
-                <a:spcPct val="115000"/>
-              </a:lnSpc>
-              <a:buNone/>
-            </a:pPr>
-            <a:r>
-              <a:rPr lang="en-US" sz="1000" dirty="0">
-                <a:solidFill>
-                  <a:srgbClr val="9AA3B0"/>
-                </a:solidFill>
-                <a:latin typeface="Public Sans" pitchFamily="34" charset="0"/>
-                <a:ea typeface="Public Sans" pitchFamily="34" charset="-122"/>
-                <a:cs typeface="Public Sans" pitchFamily="34" charset="-120"/>
-              </a:rPr>
-              <a:t>AI traces with inputs hidden; metrics behind a token, one dashboard, six alert rules</a:t>
-            </a:r>
-            <a:endParaRPr lang="en-US" sz="1000" dirty="0"/>
-          </a:p>
-        </p:txBody>
-      </p:sp>
-      <p:sp>
-        <p:nvSpPr>
-          <p:cNvPr id="53" name="Text 51"/>
-          <p:cNvSpPr txBox="1"/>
-          <p:nvPr/>
-        </p:nvSpPr>
-        <p:spPr>
-          <a:xfrm>
-            <a:off x="762000" y="6299200"/>
-            <a:ext cx="7620000" cy="381000"/>
-          </a:xfrm>
-          <a:prstGeom prst="rect">
-            <a:avLst/>
-          </a:prstGeom>
-          <a:noFill/>
-          <a:ln/>
-        </p:spPr>
-        <p:txBody>
-          <a:bodyPr wrap="square" lIns="0" tIns="0" rIns="0" bIns="0" rtlCol="0" anchor="t"/>
-          <a:lstStyle/>
-          <a:p>
-            <a:pPr algn="l" indent="0" marL="0">
-              <a:lnSpc>
-                <a:spcPct val="130000"/>
-              </a:lnSpc>
-              <a:buNone/>
-            </a:pPr>
-            <a:endParaRPr lang="en-US" sz="1000" dirty="0"/>
-          </a:p>
-        </p:txBody>
-      </p:sp>
-      <p:sp>
-        <p:nvSpPr>
-          <p:cNvPr id="54" name="Text 52"/>
-          <p:cNvSpPr txBox="1"/>
-          <p:nvPr/>
-        </p:nvSpPr>
-        <p:spPr>
-          <a:xfrm>
-            <a:off x="10160000" y="571500"/>
-            <a:ext cx="1270000" cy="190500"/>
-          </a:xfrm>
-          <a:prstGeom prst="rect">
-            <a:avLst/>
-          </a:prstGeom>
-          <a:noFill/>
-          <a:ln/>
-        </p:spPr>
-        <p:txBody>
-          <a:bodyPr wrap="square" lIns="0" tIns="0" rIns="0" bIns="0" rtlCol="0" anchor="t"/>
-          <a:lstStyle/>
-          <a:p>
-            <a:pPr algn="r" indent="0" marL="0">
-              <a:lnSpc>
-                <a:spcPct val="115000"/>
-              </a:lnSpc>
-              <a:buNone/>
-            </a:pPr>
-            <a:r>
-              <a:rPr lang="en-US" sz="1000" dirty="0">
-                <a:solidFill>
-                  <a:srgbClr val="616C7A"/>
-                </a:solidFill>
-                <a:latin typeface="IBM Plex Mono" pitchFamily="34" charset="0"/>
-                <a:ea typeface="IBM Plex Mono" pitchFamily="34" charset="-122"/>
-                <a:cs typeface="IBM Plex Mono" pitchFamily="34" charset="-120"/>
-              </a:rPr>
-              <a:t>09 / 13</a:t>
-            </a:r>
-            <a:endParaRPr lang="en-US" sz="1000" dirty="0"/>
-          </a:p>
-        </p:txBody>
-      </p:sp>
-    </p:spTree>
-  </p:cSld>
-  <p:clrMapOvr>
-    <a:masterClrMapping/>
-  </p:clrMapOvr>
-  <p:transition spd="fast">
-    <p:fade/>
-  </p:transition>
 </p:sld>
 </file>
 

--- a/docs/14-debrief/pitch-deck/PermitFlow-pitch.pptx
+++ b/docs/14-debrief/pitch-deck/PermitFlow-pitch.pptx
@@ -6285,7 +6285,7 @@
                 <a:ea typeface="Public Sans" pitchFamily="34" charset="-122"/>
                 <a:cs typeface="Public Sans" pitchFamily="34" charset="-120"/>
               </a:rPr>
-              <a:t>158</a:t>
+              <a:t>160</a:t>
             </a:r>
             <a:pPr algn="l" indent="0" marL="0">
               <a:lnSpc>
